--- a/OTC_Tracker_One_Pager.pptx
+++ b/OTC_Tracker_One_Pager.pptx
@@ -3295,8 +3295,8 @@
         </p:nvSpPr>
         <p:spPr>
           <a:xfrm>
-            <a:off x="566928" y="1627632"/>
-            <a:ext cx="2724912" cy="3310128"/>
+            <a:off x="566928" y="1481328"/>
+            <a:ext cx="2724912" cy="3200400"/>
           </a:xfrm>
           <a:prstGeom prst="roundRect">
             <a:avLst>
@@ -3343,7 +3343,7 @@
         </p:nvSpPr>
         <p:spPr>
           <a:xfrm>
-            <a:off x="768096" y="1883664"/>
+            <a:off x="768096" y="1737360"/>
             <a:ext cx="475488" cy="68580"/>
           </a:xfrm>
           <a:prstGeom prst="roundRect">
@@ -3389,7 +3389,7 @@
         </p:nvSpPr>
         <p:spPr>
           <a:xfrm>
-            <a:off x="768096" y="2066543"/>
+            <a:off x="768096" y="1920240"/>
             <a:ext cx="2322576" cy="566928"/>
           </a:xfrm>
           <a:prstGeom prst="rect">
@@ -3415,7 +3415,7 @@
                 </a:solidFill>
                 <a:latin typeface="Segoe UI"/>
               </a:rPr>
-              <a:t>One system, end to end</a:t>
+              <a:t>One solution, end to end</a:t>
             </a:r>
           </a:p>
         </p:txBody>
@@ -3428,7 +3428,7 @@
         </p:nvSpPr>
         <p:spPr>
           <a:xfrm>
-            <a:off x="768096" y="2542032"/>
+            <a:off x="768096" y="2395728"/>
             <a:ext cx="2322576" cy="777240"/>
           </a:xfrm>
           <a:prstGeom prst="rect">
@@ -3454,7 +3454,7 @@
                 </a:solidFill>
                 <a:latin typeface="Segoe UI"/>
               </a:rPr>
-              <a:t>Registration, confirmation, settlement and regulatory reporting live in the same place — every desk reads and writes the same data.</a:t>
+              <a:t>Registration, confirmation, settlement and regulatory reporting live in the same place — every user reads and writes the same data.</a:t>
             </a:r>
           </a:p>
         </p:txBody>
@@ -3467,7 +3467,7 @@
         </p:nvSpPr>
         <p:spPr>
           <a:xfrm>
-            <a:off x="786384" y="3415284"/>
+            <a:off x="786384" y="3268980"/>
             <a:ext cx="56692" cy="56692"/>
           </a:xfrm>
           <a:prstGeom prst="roundRect">
@@ -3513,7 +3513,7 @@
         </p:nvSpPr>
         <p:spPr>
           <a:xfrm>
-            <a:off x="932688" y="3332988"/>
+            <a:off x="932688" y="3186684"/>
             <a:ext cx="2157984" cy="658368"/>
           </a:xfrm>
           <a:prstGeom prst="rect">
@@ -3552,7 +3552,7 @@
         </p:nvSpPr>
         <p:spPr>
           <a:xfrm>
-            <a:off x="786384" y="3872484"/>
+            <a:off x="786384" y="3726180"/>
             <a:ext cx="56692" cy="56692"/>
           </a:xfrm>
           <a:prstGeom prst="roundRect">
@@ -3598,7 +3598,7 @@
         </p:nvSpPr>
         <p:spPr>
           <a:xfrm>
-            <a:off x="932688" y="3790188"/>
+            <a:off x="932688" y="3643884"/>
             <a:ext cx="2157984" cy="658368"/>
           </a:xfrm>
           <a:prstGeom prst="rect">
@@ -3637,7 +3637,7 @@
         </p:nvSpPr>
         <p:spPr>
           <a:xfrm>
-            <a:off x="786384" y="4329684"/>
+            <a:off x="786384" y="4183380"/>
             <a:ext cx="56692" cy="56692"/>
           </a:xfrm>
           <a:prstGeom prst="roundRect">
@@ -3683,7 +3683,7 @@
         </p:nvSpPr>
         <p:spPr>
           <a:xfrm>
-            <a:off x="932688" y="4247388"/>
+            <a:off x="932688" y="4101084"/>
             <a:ext cx="2157984" cy="658368"/>
           </a:xfrm>
           <a:prstGeom prst="rect">
@@ -3722,8 +3722,8 @@
         </p:nvSpPr>
         <p:spPr>
           <a:xfrm>
-            <a:off x="3511296" y="1627632"/>
-            <a:ext cx="2724912" cy="3310128"/>
+            <a:off x="3511296" y="1481328"/>
+            <a:ext cx="2724912" cy="3200400"/>
           </a:xfrm>
           <a:prstGeom prst="roundRect">
             <a:avLst>
@@ -3770,7 +3770,7 @@
         </p:nvSpPr>
         <p:spPr>
           <a:xfrm>
-            <a:off x="3712463" y="1883664"/>
+            <a:off x="3712463" y="1737360"/>
             <a:ext cx="475488" cy="68580"/>
           </a:xfrm>
           <a:prstGeom prst="roundRect">
@@ -3816,7 +3816,7 @@
         </p:nvSpPr>
         <p:spPr>
           <a:xfrm>
-            <a:off x="3712463" y="2066543"/>
+            <a:off x="3712463" y="1920240"/>
             <a:ext cx="2322576" cy="566928"/>
           </a:xfrm>
           <a:prstGeom prst="rect">
@@ -3855,7 +3855,7 @@
         </p:nvSpPr>
         <p:spPr>
           <a:xfrm>
-            <a:off x="3712463" y="2542032"/>
+            <a:off x="3712463" y="2395728"/>
             <a:ext cx="2322576" cy="777240"/>
           </a:xfrm>
           <a:prstGeom prst="rect">
@@ -3894,7 +3894,7 @@
         </p:nvSpPr>
         <p:spPr>
           <a:xfrm>
-            <a:off x="3730752" y="3415284"/>
+            <a:off x="3730752" y="3268980"/>
             <a:ext cx="56692" cy="56692"/>
           </a:xfrm>
           <a:prstGeom prst="roundRect">
@@ -3940,7 +3940,7 @@
         </p:nvSpPr>
         <p:spPr>
           <a:xfrm>
-            <a:off x="3877056" y="3332988"/>
+            <a:off x="3877056" y="3186684"/>
             <a:ext cx="2157984" cy="658368"/>
           </a:xfrm>
           <a:prstGeom prst="rect">
@@ -3979,7 +3979,7 @@
         </p:nvSpPr>
         <p:spPr>
           <a:xfrm>
-            <a:off x="3730752" y="3872484"/>
+            <a:off x="3730752" y="3726180"/>
             <a:ext cx="56692" cy="56692"/>
           </a:xfrm>
           <a:prstGeom prst="roundRect">
@@ -4025,7 +4025,7 @@
         </p:nvSpPr>
         <p:spPr>
           <a:xfrm>
-            <a:off x="3877056" y="3790188"/>
+            <a:off x="3877056" y="3643884"/>
             <a:ext cx="2157984" cy="658368"/>
           </a:xfrm>
           <a:prstGeom prst="rect">
@@ -4051,7 +4051,7 @@
                 </a:solidFill>
                 <a:latin typeface="Segoe UI"/>
               </a:rPr>
-              <a:t>Client confirmations, settlement advices and B3 / CETIP files produced by the system</a:t>
+              <a:t>Client confirmations, settlement advices and B3 / CETIP files produced by the solution</a:t>
             </a:r>
           </a:p>
         </p:txBody>
@@ -4064,7 +4064,7 @@
         </p:nvSpPr>
         <p:spPr>
           <a:xfrm>
-            <a:off x="3730752" y="4329684"/>
+            <a:off x="3730752" y="4183380"/>
             <a:ext cx="56692" cy="56692"/>
           </a:xfrm>
           <a:prstGeom prst="roundRect">
@@ -4110,7 +4110,7 @@
         </p:nvSpPr>
         <p:spPr>
           <a:xfrm>
-            <a:off x="3877056" y="4247388"/>
+            <a:off x="3877056" y="4101084"/>
             <a:ext cx="2157984" cy="658368"/>
           </a:xfrm>
           <a:prstGeom prst="rect">
@@ -4136,7 +4136,7 @@
                 </a:solidFill>
                 <a:latin typeface="Segoe UI"/>
               </a:rPr>
-              <a:t>Daily routines e-mail each desk exactly what is still open, without anyone asking</a:t>
+              <a:t>Daily routines e-mail each user exactly what is still open, without anyone asking</a:t>
             </a:r>
           </a:p>
         </p:txBody>
@@ -4149,8 +4149,8 @@
         </p:nvSpPr>
         <p:spPr>
           <a:xfrm>
-            <a:off x="6455664" y="1627632"/>
-            <a:ext cx="2724912" cy="3310128"/>
+            <a:off x="6455664" y="1481328"/>
+            <a:ext cx="2724912" cy="3200400"/>
           </a:xfrm>
           <a:prstGeom prst="roundRect">
             <a:avLst>
@@ -4197,7 +4197,7 @@
         </p:nvSpPr>
         <p:spPr>
           <a:xfrm>
-            <a:off x="6656831" y="1883664"/>
+            <a:off x="6656831" y="1737360"/>
             <a:ext cx="475488" cy="68580"/>
           </a:xfrm>
           <a:prstGeom prst="roundRect">
@@ -4243,7 +4243,7 @@
         </p:nvSpPr>
         <p:spPr>
           <a:xfrm>
-            <a:off x="6656831" y="2066543"/>
+            <a:off x="6656831" y="1920240"/>
             <a:ext cx="2322576" cy="566928"/>
           </a:xfrm>
           <a:prstGeom prst="rect">
@@ -4282,7 +4282,7 @@
         </p:nvSpPr>
         <p:spPr>
           <a:xfrm>
-            <a:off x="6656831" y="2542032"/>
+            <a:off x="6656831" y="2395728"/>
             <a:ext cx="2322576" cy="777240"/>
           </a:xfrm>
           <a:prstGeom prst="rect">
@@ -4321,7 +4321,7 @@
         </p:nvSpPr>
         <p:spPr>
           <a:xfrm>
-            <a:off x="6675120" y="3415284"/>
+            <a:off x="6675120" y="3268980"/>
             <a:ext cx="56692" cy="56692"/>
           </a:xfrm>
           <a:prstGeom prst="roundRect">
@@ -4367,7 +4367,7 @@
         </p:nvSpPr>
         <p:spPr>
           <a:xfrm>
-            <a:off x="6821424" y="3332988"/>
+            <a:off x="6821424" y="3186684"/>
             <a:ext cx="2157984" cy="658368"/>
           </a:xfrm>
           <a:prstGeom prst="rect">
@@ -4393,7 +4393,7 @@
                 </a:solidFill>
                 <a:latin typeface="Segoe UI"/>
               </a:rPr>
-              <a:t>Confirmation trail OTC › MO / FO, with each stage signed only by its own desk</a:t>
+              <a:t>Confirmation trail OTC › MO / FO, with each stage signed only by its own users</a:t>
             </a:r>
           </a:p>
         </p:txBody>
@@ -4406,7 +4406,7 @@
         </p:nvSpPr>
         <p:spPr>
           <a:xfrm>
-            <a:off x="6675120" y="3872484"/>
+            <a:off x="6675120" y="3726180"/>
             <a:ext cx="56692" cy="56692"/>
           </a:xfrm>
           <a:prstGeom prst="roundRect">
@@ -4452,7 +4452,7 @@
         </p:nvSpPr>
         <p:spPr>
           <a:xfrm>
-            <a:off x="6821424" y="3790188"/>
+            <a:off x="6821424" y="3643884"/>
             <a:ext cx="2157984" cy="658368"/>
           </a:xfrm>
           <a:prstGeom prst="rect">
@@ -4491,7 +4491,7 @@
         </p:nvSpPr>
         <p:spPr>
           <a:xfrm>
-            <a:off x="6675120" y="4329684"/>
+            <a:off x="6675120" y="4183380"/>
             <a:ext cx="56692" cy="56692"/>
           </a:xfrm>
           <a:prstGeom prst="roundRect">
@@ -4537,7 +4537,7 @@
         </p:nvSpPr>
         <p:spPr>
           <a:xfrm>
-            <a:off x="6821424" y="4247388"/>
+            <a:off x="6821424" y="4101084"/>
             <a:ext cx="2157984" cy="658368"/>
           </a:xfrm>
           <a:prstGeom prst="rect">
@@ -4576,8 +4576,8 @@
         </p:nvSpPr>
         <p:spPr>
           <a:xfrm>
-            <a:off x="9400032" y="1627632"/>
-            <a:ext cx="2724912" cy="3310128"/>
+            <a:off x="9400032" y="1481328"/>
+            <a:ext cx="2724912" cy="3200400"/>
           </a:xfrm>
           <a:prstGeom prst="roundRect">
             <a:avLst>
@@ -4624,7 +4624,7 @@
         </p:nvSpPr>
         <p:spPr>
           <a:xfrm>
-            <a:off x="9601200" y="1883664"/>
+            <a:off x="9601200" y="1737360"/>
             <a:ext cx="475488" cy="68580"/>
           </a:xfrm>
           <a:prstGeom prst="roundRect">
@@ -4670,7 +4670,7 @@
         </p:nvSpPr>
         <p:spPr>
           <a:xfrm>
-            <a:off x="9601200" y="2066543"/>
+            <a:off x="9601200" y="1920240"/>
             <a:ext cx="2322576" cy="566928"/>
           </a:xfrm>
           <a:prstGeom prst="rect">
@@ -4709,7 +4709,7 @@
         </p:nvSpPr>
         <p:spPr>
           <a:xfrm>
-            <a:off x="9601200" y="2542032"/>
+            <a:off x="9601200" y="2395728"/>
             <a:ext cx="2322576" cy="777240"/>
           </a:xfrm>
           <a:prstGeom prst="rect">
@@ -4735,7 +4735,7 @@
                 </a:solidFill>
                 <a:latin typeface="Segoe UI"/>
               </a:rPr>
-              <a:t>The rules the desk owns are edited on screen and take effect on the next click — no code change, no deployment window.</a:t>
+              <a:t>The rules the users own are edited on screen and take effect on the next click — no code change, no deployment window.</a:t>
             </a:r>
           </a:p>
         </p:txBody>
@@ -4748,7 +4748,7 @@
         </p:nvSpPr>
         <p:spPr>
           <a:xfrm>
-            <a:off x="9619488" y="3415284"/>
+            <a:off x="9619488" y="3268980"/>
             <a:ext cx="56692" cy="56692"/>
           </a:xfrm>
           <a:prstGeom prst="roundRect">
@@ -4794,7 +4794,7 @@
         </p:nvSpPr>
         <p:spPr>
           <a:xfrm>
-            <a:off x="9765792" y="3332988"/>
+            <a:off x="9765792" y="3186684"/>
             <a:ext cx="2157984" cy="658368"/>
           </a:xfrm>
           <a:prstGeom prst="rect">
@@ -4833,7 +4833,7 @@
         </p:nvSpPr>
         <p:spPr>
           <a:xfrm>
-            <a:off x="9619488" y="3872484"/>
+            <a:off x="9619488" y="3726180"/>
             <a:ext cx="56692" cy="56692"/>
           </a:xfrm>
           <a:prstGeom prst="roundRect">
@@ -4879,7 +4879,7 @@
         </p:nvSpPr>
         <p:spPr>
           <a:xfrm>
-            <a:off x="9765792" y="3790188"/>
+            <a:off x="9765792" y="3643884"/>
             <a:ext cx="2157984" cy="658368"/>
           </a:xfrm>
           <a:prstGeom prst="rect">
@@ -4918,7 +4918,7 @@
         </p:nvSpPr>
         <p:spPr>
           <a:xfrm>
-            <a:off x="9619488" y="4329684"/>
+            <a:off x="9619488" y="4183380"/>
             <a:ext cx="56692" cy="56692"/>
           </a:xfrm>
           <a:prstGeom prst="roundRect">
@@ -4964,7 +4964,7 @@
         </p:nvSpPr>
         <p:spPr>
           <a:xfrm>
-            <a:off x="9765792" y="4247388"/>
+            <a:off x="9765792" y="4101084"/>
             <a:ext cx="2157984" cy="658368"/>
           </a:xfrm>
           <a:prstGeom prst="rect">
@@ -4990,7 +4990,7 @@
                 </a:solidFill>
                 <a:latin typeface="Segoe UI"/>
               </a:rPr>
-              <a:t>One code base serving the desk in English, Portuguese and Spanish</a:t>
+              <a:t>One code base serving users in English, Portuguese and Spanish</a:t>
             </a:r>
           </a:p>
         </p:txBody>
@@ -5003,12 +5003,12 @@
         </p:nvSpPr>
         <p:spPr>
           <a:xfrm>
-            <a:off x="566928" y="5193792"/>
-            <a:ext cx="11055096" cy="1060704"/>
+            <a:off x="566928" y="4791456"/>
+            <a:ext cx="11055096" cy="566928"/>
           </a:xfrm>
           <a:prstGeom prst="roundRect">
             <a:avLst>
-              <a:gd name="adj" fmla="val 14655"/>
+              <a:gd name="adj" fmla="val 27419"/>
             </a:avLst>
           </a:prstGeom>
           <a:solidFill>
@@ -5051,8 +5051,794 @@
         </p:nvSpPr>
         <p:spPr>
           <a:xfrm>
-            <a:off x="841247" y="5394959"/>
-            <a:ext cx="3182112" cy="274320"/>
+            <a:off x="841248" y="4901184"/>
+            <a:ext cx="1463040" cy="384048"/>
+          </a:xfrm>
+          <a:prstGeom prst="rect">
+            <a:avLst/>
+          </a:prstGeom>
+          <a:noFill/>
+        </p:spPr>
+        <p:txBody>
+          <a:bodyPr wrap="square" anchor="t" lIns="0" tIns="0" rIns="0" bIns="0">
+            <a:spAutoFit/>
+          </a:bodyPr>
+          <a:lstStyle/>
+          <a:p>
+            <a:pPr algn="l">
+              <a:lnSpc>
+                <a:spcPct val="100000"/>
+              </a:lnSpc>
+            </a:pPr>
+            <a:r>
+              <a:rPr sz="900" b="1">
+                <a:solidFill>
+                  <a:srgbClr val="0E112A"/>
+                </a:solidFill>
+                <a:latin typeface="Segoe UI"/>
+              </a:rPr>
+              <a:t>PROCESS COVERAGE</a:t>
+            </a:r>
+          </a:p>
+          <a:p>
+            <a:pPr algn="l">
+              <a:lnSpc>
+                <a:spcPct val="100000"/>
+              </a:lnSpc>
+              <a:spcBef>
+                <a:spcPts val="200"/>
+              </a:spcBef>
+            </a:pPr>
+            <a:r>
+              <a:rPr sz="800" b="0">
+                <a:solidFill>
+                  <a:srgbClr val="545A72"/>
+                </a:solidFill>
+                <a:latin typeface="Segoe UI"/>
+              </a:rPr>
+              <a:t>OTC Derivatives</a:t>
+            </a:r>
+          </a:p>
+        </p:txBody>
+      </p:sp>
+      <p:sp>
+        <p:nvSpPr>
+          <p:cNvPr id="48" name="TextBox 47"/>
+          <p:cNvSpPr txBox="1"/>
+          <p:nvPr/>
+        </p:nvSpPr>
+        <p:spPr>
+          <a:xfrm>
+            <a:off x="2350008" y="4882896"/>
+            <a:ext cx="2020824" cy="228600"/>
+          </a:xfrm>
+          <a:prstGeom prst="rect">
+            <a:avLst/>
+          </a:prstGeom>
+          <a:noFill/>
+        </p:spPr>
+        <p:txBody>
+          <a:bodyPr wrap="square" anchor="t" lIns="0" tIns="0" rIns="0" bIns="0">
+            <a:spAutoFit/>
+          </a:bodyPr>
+          <a:lstStyle/>
+          <a:p>
+            <a:pPr algn="l">
+              <a:lnSpc>
+                <a:spcPct val="100000"/>
+              </a:lnSpc>
+            </a:pPr>
+            <a:r>
+              <a:rPr sz="800" b="0">
+                <a:solidFill>
+                  <a:srgbClr val="0E112A"/>
+                </a:solidFill>
+                <a:latin typeface="Segoe UI"/>
+              </a:rPr>
+              <a:t>OTC Tracker — Full</a:t>
+            </a:r>
+          </a:p>
+        </p:txBody>
+      </p:sp>
+      <p:sp>
+        <p:nvSpPr>
+          <p:cNvPr id="49" name="Rounded Rectangle 48"/>
+          <p:cNvSpPr/>
+          <p:nvPr/>
+        </p:nvSpPr>
+        <p:spPr>
+          <a:xfrm>
+            <a:off x="2350008" y="5143500"/>
+            <a:ext cx="1536192" cy="77724"/>
+          </a:xfrm>
+          <a:prstGeom prst="roundRect">
+            <a:avLst>
+              <a:gd name="adj" fmla="val 49411"/>
+            </a:avLst>
+          </a:prstGeom>
+          <a:solidFill>
+            <a:srgbClr val="ECEEF5"/>
+          </a:solidFill>
+          <a:ln>
+            <a:noFill/>
+          </a:ln>
+          <a:effectLst/>
+        </p:spPr>
+        <p:style>
+          <a:lnRef idx="1">
+            <a:schemeClr val="accent1"/>
+          </a:lnRef>
+          <a:fillRef idx="3">
+            <a:schemeClr val="accent1"/>
+          </a:fillRef>
+          <a:effectRef idx="2">
+            <a:schemeClr val="accent1"/>
+          </a:effectRef>
+          <a:fontRef idx="minor">
+            <a:schemeClr val="lt1"/>
+          </a:fontRef>
+        </p:style>
+        <p:txBody>
+          <a:bodyPr rtlCol="0" anchor="ctr" wrap="square"/>
+          <a:lstStyle/>
+          <a:p>
+            <a:pPr algn="ctr"/>
+          </a:p>
+        </p:txBody>
+      </p:sp>
+      <p:sp>
+        <p:nvSpPr>
+          <p:cNvPr id="50" name="Rounded Rectangle 49"/>
+          <p:cNvSpPr/>
+          <p:nvPr/>
+        </p:nvSpPr>
+        <p:spPr>
+          <a:xfrm>
+            <a:off x="2350008" y="5143500"/>
+            <a:ext cx="954589" cy="77724"/>
+          </a:xfrm>
+          <a:prstGeom prst="roundRect">
+            <a:avLst>
+              <a:gd name="adj" fmla="val 49411"/>
+            </a:avLst>
+          </a:prstGeom>
+          <a:solidFill>
+            <a:srgbClr val="0066CC"/>
+          </a:solidFill>
+          <a:ln>
+            <a:noFill/>
+          </a:ln>
+          <a:effectLst/>
+        </p:spPr>
+        <p:style>
+          <a:lnRef idx="1">
+            <a:schemeClr val="accent1"/>
+          </a:lnRef>
+          <a:fillRef idx="3">
+            <a:schemeClr val="accent1"/>
+          </a:fillRef>
+          <a:effectRef idx="2">
+            <a:schemeClr val="accent1"/>
+          </a:effectRef>
+          <a:fontRef idx="minor">
+            <a:schemeClr val="lt1"/>
+          </a:fontRef>
+        </p:style>
+        <p:txBody>
+          <a:bodyPr rtlCol="0" anchor="ctr" wrap="square"/>
+          <a:lstStyle/>
+          <a:p>
+            <a:pPr algn="ctr"/>
+          </a:p>
+        </p:txBody>
+      </p:sp>
+      <p:sp>
+        <p:nvSpPr>
+          <p:cNvPr id="51" name="TextBox 50"/>
+          <p:cNvSpPr txBox="1"/>
+          <p:nvPr/>
+        </p:nvSpPr>
+        <p:spPr>
+          <a:xfrm>
+            <a:off x="3959352" y="5079492"/>
+            <a:ext cx="566928" cy="228600"/>
+          </a:xfrm>
+          <a:prstGeom prst="rect">
+            <a:avLst/>
+          </a:prstGeom>
+          <a:noFill/>
+        </p:spPr>
+        <p:txBody>
+          <a:bodyPr wrap="square" anchor="t" lIns="0" tIns="0" rIns="0" bIns="0">
+            <a:spAutoFit/>
+          </a:bodyPr>
+          <a:lstStyle/>
+          <a:p>
+            <a:pPr algn="l">
+              <a:lnSpc>
+                <a:spcPct val="100000"/>
+              </a:lnSpc>
+            </a:pPr>
+            <a:r>
+              <a:rPr sz="900" b="1">
+                <a:solidFill>
+                  <a:srgbClr val="0066CC"/>
+                </a:solidFill>
+                <a:latin typeface="Segoe UI"/>
+              </a:rPr>
+              <a:t>62.14%</a:t>
+            </a:r>
+          </a:p>
+        </p:txBody>
+      </p:sp>
+      <p:sp>
+        <p:nvSpPr>
+          <p:cNvPr id="52" name="TextBox 51"/>
+          <p:cNvSpPr txBox="1"/>
+          <p:nvPr/>
+        </p:nvSpPr>
+        <p:spPr>
+          <a:xfrm>
+            <a:off x="4599431" y="4882896"/>
+            <a:ext cx="2020824" cy="228600"/>
+          </a:xfrm>
+          <a:prstGeom prst="rect">
+            <a:avLst/>
+          </a:prstGeom>
+          <a:noFill/>
+        </p:spPr>
+        <p:txBody>
+          <a:bodyPr wrap="square" anchor="t" lIns="0" tIns="0" rIns="0" bIns="0">
+            <a:spAutoFit/>
+          </a:bodyPr>
+          <a:lstStyle/>
+          <a:p>
+            <a:pPr algn="l">
+              <a:lnSpc>
+                <a:spcPct val="100000"/>
+              </a:lnSpc>
+            </a:pPr>
+            <a:r>
+              <a:rPr sz="800" b="0">
+                <a:solidFill>
+                  <a:srgbClr val="0E112A"/>
+                </a:solidFill>
+                <a:latin typeface="Segoe UI"/>
+              </a:rPr>
+              <a:t>OTC Tracker — Today</a:t>
+            </a:r>
+          </a:p>
+        </p:txBody>
+      </p:sp>
+      <p:sp>
+        <p:nvSpPr>
+          <p:cNvPr id="53" name="Rounded Rectangle 52"/>
+          <p:cNvSpPr/>
+          <p:nvPr/>
+        </p:nvSpPr>
+        <p:spPr>
+          <a:xfrm>
+            <a:off x="4599431" y="5143500"/>
+            <a:ext cx="1536192" cy="77724"/>
+          </a:xfrm>
+          <a:prstGeom prst="roundRect">
+            <a:avLst>
+              <a:gd name="adj" fmla="val 49411"/>
+            </a:avLst>
+          </a:prstGeom>
+          <a:solidFill>
+            <a:srgbClr val="ECEEF5"/>
+          </a:solidFill>
+          <a:ln>
+            <a:noFill/>
+          </a:ln>
+          <a:effectLst/>
+        </p:spPr>
+        <p:style>
+          <a:lnRef idx="1">
+            <a:schemeClr val="accent1"/>
+          </a:lnRef>
+          <a:fillRef idx="3">
+            <a:schemeClr val="accent1"/>
+          </a:fillRef>
+          <a:effectRef idx="2">
+            <a:schemeClr val="accent1"/>
+          </a:effectRef>
+          <a:fontRef idx="minor">
+            <a:schemeClr val="lt1"/>
+          </a:fontRef>
+        </p:style>
+        <p:txBody>
+          <a:bodyPr rtlCol="0" anchor="ctr" wrap="square"/>
+          <a:lstStyle/>
+          <a:p>
+            <a:pPr algn="ctr"/>
+          </a:p>
+        </p:txBody>
+      </p:sp>
+      <p:sp>
+        <p:nvSpPr>
+          <p:cNvPr id="54" name="Rounded Rectangle 53"/>
+          <p:cNvSpPr/>
+          <p:nvPr/>
+        </p:nvSpPr>
+        <p:spPr>
+          <a:xfrm>
+            <a:off x="4599431" y="5143500"/>
+            <a:ext cx="507096" cy="77724"/>
+          </a:xfrm>
+          <a:prstGeom prst="roundRect">
+            <a:avLst>
+              <a:gd name="adj" fmla="val 49411"/>
+            </a:avLst>
+          </a:prstGeom>
+          <a:solidFill>
+            <a:srgbClr val="5E5CE6"/>
+          </a:solidFill>
+          <a:ln>
+            <a:noFill/>
+          </a:ln>
+          <a:effectLst/>
+        </p:spPr>
+        <p:style>
+          <a:lnRef idx="1">
+            <a:schemeClr val="accent1"/>
+          </a:lnRef>
+          <a:fillRef idx="3">
+            <a:schemeClr val="accent1"/>
+          </a:fillRef>
+          <a:effectRef idx="2">
+            <a:schemeClr val="accent1"/>
+          </a:effectRef>
+          <a:fontRef idx="minor">
+            <a:schemeClr val="lt1"/>
+          </a:fontRef>
+        </p:style>
+        <p:txBody>
+          <a:bodyPr rtlCol="0" anchor="ctr" wrap="square"/>
+          <a:lstStyle/>
+          <a:p>
+            <a:pPr algn="ctr"/>
+          </a:p>
+        </p:txBody>
+      </p:sp>
+      <p:sp>
+        <p:nvSpPr>
+          <p:cNvPr id="55" name="TextBox 54"/>
+          <p:cNvSpPr txBox="1"/>
+          <p:nvPr/>
+        </p:nvSpPr>
+        <p:spPr>
+          <a:xfrm>
+            <a:off x="6208775" y="5079492"/>
+            <a:ext cx="566928" cy="228600"/>
+          </a:xfrm>
+          <a:prstGeom prst="rect">
+            <a:avLst/>
+          </a:prstGeom>
+          <a:noFill/>
+        </p:spPr>
+        <p:txBody>
+          <a:bodyPr wrap="square" anchor="t" lIns="0" tIns="0" rIns="0" bIns="0">
+            <a:spAutoFit/>
+          </a:bodyPr>
+          <a:lstStyle/>
+          <a:p>
+            <a:pPr algn="l">
+              <a:lnSpc>
+                <a:spcPct val="100000"/>
+              </a:lnSpc>
+            </a:pPr>
+            <a:r>
+              <a:rPr sz="900" b="1">
+                <a:solidFill>
+                  <a:srgbClr val="5E5CE6"/>
+                </a:solidFill>
+                <a:latin typeface="Segoe UI"/>
+              </a:rPr>
+              <a:t>33.01%</a:t>
+            </a:r>
+          </a:p>
+        </p:txBody>
+      </p:sp>
+      <p:sp>
+        <p:nvSpPr>
+          <p:cNvPr id="56" name="TextBox 55"/>
+          <p:cNvSpPr txBox="1"/>
+          <p:nvPr/>
+        </p:nvSpPr>
+        <p:spPr>
+          <a:xfrm>
+            <a:off x="6848856" y="4882896"/>
+            <a:ext cx="2020824" cy="228600"/>
+          </a:xfrm>
+          <a:prstGeom prst="rect">
+            <a:avLst/>
+          </a:prstGeom>
+          <a:noFill/>
+        </p:spPr>
+        <p:txBody>
+          <a:bodyPr wrap="square" anchor="t" lIns="0" tIns="0" rIns="0" bIns="0">
+            <a:spAutoFit/>
+          </a:bodyPr>
+          <a:lstStyle/>
+          <a:p>
+            <a:pPr algn="l">
+              <a:lnSpc>
+                <a:spcPct val="100000"/>
+              </a:lnSpc>
+            </a:pPr>
+            <a:r>
+              <a:rPr sz="800" b="0">
+                <a:solidFill>
+                  <a:srgbClr val="0E112A"/>
+                </a:solidFill>
+                <a:latin typeface="Segoe UI"/>
+              </a:rPr>
+              <a:t>Cockpit + AEVO + Registration</a:t>
+            </a:r>
+          </a:p>
+        </p:txBody>
+      </p:sp>
+      <p:sp>
+        <p:nvSpPr>
+          <p:cNvPr id="57" name="Rounded Rectangle 56"/>
+          <p:cNvSpPr/>
+          <p:nvPr/>
+        </p:nvSpPr>
+        <p:spPr>
+          <a:xfrm>
+            <a:off x="6848856" y="5143500"/>
+            <a:ext cx="1536192" cy="77724"/>
+          </a:xfrm>
+          <a:prstGeom prst="roundRect">
+            <a:avLst>
+              <a:gd name="adj" fmla="val 49411"/>
+            </a:avLst>
+          </a:prstGeom>
+          <a:solidFill>
+            <a:srgbClr val="ECEEF5"/>
+          </a:solidFill>
+          <a:ln>
+            <a:noFill/>
+          </a:ln>
+          <a:effectLst/>
+        </p:spPr>
+        <p:style>
+          <a:lnRef idx="1">
+            <a:schemeClr val="accent1"/>
+          </a:lnRef>
+          <a:fillRef idx="3">
+            <a:schemeClr val="accent1"/>
+          </a:fillRef>
+          <a:effectRef idx="2">
+            <a:schemeClr val="accent1"/>
+          </a:effectRef>
+          <a:fontRef idx="minor">
+            <a:schemeClr val="lt1"/>
+          </a:fontRef>
+        </p:style>
+        <p:txBody>
+          <a:bodyPr rtlCol="0" anchor="ctr" wrap="square"/>
+          <a:lstStyle/>
+          <a:p>
+            <a:pPr algn="ctr"/>
+          </a:p>
+        </p:txBody>
+      </p:sp>
+      <p:sp>
+        <p:nvSpPr>
+          <p:cNvPr id="58" name="Rounded Rectangle 57"/>
+          <p:cNvSpPr/>
+          <p:nvPr/>
+        </p:nvSpPr>
+        <p:spPr>
+          <a:xfrm>
+            <a:off x="6848856" y="5143500"/>
+            <a:ext cx="223669" cy="77724"/>
+          </a:xfrm>
+          <a:prstGeom prst="roundRect">
+            <a:avLst>
+              <a:gd name="adj" fmla="val 49411"/>
+            </a:avLst>
+          </a:prstGeom>
+          <a:solidFill>
+            <a:srgbClr val="9AA3B8"/>
+          </a:solidFill>
+          <a:ln>
+            <a:noFill/>
+          </a:ln>
+          <a:effectLst/>
+        </p:spPr>
+        <p:style>
+          <a:lnRef idx="1">
+            <a:schemeClr val="accent1"/>
+          </a:lnRef>
+          <a:fillRef idx="3">
+            <a:schemeClr val="accent1"/>
+          </a:fillRef>
+          <a:effectRef idx="2">
+            <a:schemeClr val="accent1"/>
+          </a:effectRef>
+          <a:fontRef idx="minor">
+            <a:schemeClr val="lt1"/>
+          </a:fontRef>
+        </p:style>
+        <p:txBody>
+          <a:bodyPr rtlCol="0" anchor="ctr" wrap="square"/>
+          <a:lstStyle/>
+          <a:p>
+            <a:pPr algn="ctr"/>
+          </a:p>
+        </p:txBody>
+      </p:sp>
+      <p:sp>
+        <p:nvSpPr>
+          <p:cNvPr id="59" name="TextBox 58"/>
+          <p:cNvSpPr txBox="1"/>
+          <p:nvPr/>
+        </p:nvSpPr>
+        <p:spPr>
+          <a:xfrm>
+            <a:off x="8458200" y="5079492"/>
+            <a:ext cx="566928" cy="228600"/>
+          </a:xfrm>
+          <a:prstGeom prst="rect">
+            <a:avLst/>
+          </a:prstGeom>
+          <a:noFill/>
+        </p:spPr>
+        <p:txBody>
+          <a:bodyPr wrap="square" anchor="t" lIns="0" tIns="0" rIns="0" bIns="0">
+            <a:spAutoFit/>
+          </a:bodyPr>
+          <a:lstStyle/>
+          <a:p>
+            <a:pPr algn="l">
+              <a:lnSpc>
+                <a:spcPct val="100000"/>
+              </a:lnSpc>
+            </a:pPr>
+            <a:r>
+              <a:rPr sz="900" b="1">
+                <a:solidFill>
+                  <a:srgbClr val="9AA3B8"/>
+                </a:solidFill>
+                <a:latin typeface="Segoe UI"/>
+              </a:rPr>
+              <a:t>14.56%</a:t>
+            </a:r>
+          </a:p>
+        </p:txBody>
+      </p:sp>
+      <p:sp>
+        <p:nvSpPr>
+          <p:cNvPr id="60" name="TextBox 59"/>
+          <p:cNvSpPr txBox="1"/>
+          <p:nvPr/>
+        </p:nvSpPr>
+        <p:spPr>
+          <a:xfrm>
+            <a:off x="9098280" y="4882896"/>
+            <a:ext cx="2020824" cy="228600"/>
+          </a:xfrm>
+          <a:prstGeom prst="rect">
+            <a:avLst/>
+          </a:prstGeom>
+          <a:noFill/>
+        </p:spPr>
+        <p:txBody>
+          <a:bodyPr wrap="square" anchor="t" lIns="0" tIns="0" rIns="0" bIns="0">
+            <a:spAutoFit/>
+          </a:bodyPr>
+          <a:lstStyle/>
+          <a:p>
+            <a:pPr algn="l">
+              <a:lnSpc>
+                <a:spcPct val="100000"/>
+              </a:lnSpc>
+            </a:pPr>
+            <a:r>
+              <a:rPr sz="800" b="0">
+                <a:solidFill>
+                  <a:srgbClr val="0E112A"/>
+                </a:solidFill>
+                <a:latin typeface="Segoe UI"/>
+              </a:rPr>
+              <a:t>Cockpit</a:t>
+            </a:r>
+          </a:p>
+        </p:txBody>
+      </p:sp>
+      <p:sp>
+        <p:nvSpPr>
+          <p:cNvPr id="61" name="Rounded Rectangle 60"/>
+          <p:cNvSpPr/>
+          <p:nvPr/>
+        </p:nvSpPr>
+        <p:spPr>
+          <a:xfrm>
+            <a:off x="9098280" y="5143500"/>
+            <a:ext cx="1536192" cy="77724"/>
+          </a:xfrm>
+          <a:prstGeom prst="roundRect">
+            <a:avLst>
+              <a:gd name="adj" fmla="val 49411"/>
+            </a:avLst>
+          </a:prstGeom>
+          <a:solidFill>
+            <a:srgbClr val="ECEEF5"/>
+          </a:solidFill>
+          <a:ln>
+            <a:noFill/>
+          </a:ln>
+          <a:effectLst/>
+        </p:spPr>
+        <p:style>
+          <a:lnRef idx="1">
+            <a:schemeClr val="accent1"/>
+          </a:lnRef>
+          <a:fillRef idx="3">
+            <a:schemeClr val="accent1"/>
+          </a:fillRef>
+          <a:effectRef idx="2">
+            <a:schemeClr val="accent1"/>
+          </a:effectRef>
+          <a:fontRef idx="minor">
+            <a:schemeClr val="lt1"/>
+          </a:fontRef>
+        </p:style>
+        <p:txBody>
+          <a:bodyPr rtlCol="0" anchor="ctr" wrap="square"/>
+          <a:lstStyle/>
+          <a:p>
+            <a:pPr algn="ctr"/>
+          </a:p>
+        </p:txBody>
+      </p:sp>
+      <p:sp>
+        <p:nvSpPr>
+          <p:cNvPr id="62" name="Rounded Rectangle 61"/>
+          <p:cNvSpPr/>
+          <p:nvPr/>
+        </p:nvSpPr>
+        <p:spPr>
+          <a:xfrm>
+            <a:off x="9098280" y="5143500"/>
+            <a:ext cx="149164" cy="77724"/>
+          </a:xfrm>
+          <a:prstGeom prst="roundRect">
+            <a:avLst>
+              <a:gd name="adj" fmla="val 49411"/>
+            </a:avLst>
+          </a:prstGeom>
+          <a:solidFill>
+            <a:srgbClr val="9AA3B8"/>
+          </a:solidFill>
+          <a:ln>
+            <a:noFill/>
+          </a:ln>
+          <a:effectLst/>
+        </p:spPr>
+        <p:style>
+          <a:lnRef idx="1">
+            <a:schemeClr val="accent1"/>
+          </a:lnRef>
+          <a:fillRef idx="3">
+            <a:schemeClr val="accent1"/>
+          </a:fillRef>
+          <a:effectRef idx="2">
+            <a:schemeClr val="accent1"/>
+          </a:effectRef>
+          <a:fontRef idx="minor">
+            <a:schemeClr val="lt1"/>
+          </a:fontRef>
+        </p:style>
+        <p:txBody>
+          <a:bodyPr rtlCol="0" anchor="ctr" wrap="square"/>
+          <a:lstStyle/>
+          <a:p>
+            <a:pPr algn="ctr"/>
+          </a:p>
+        </p:txBody>
+      </p:sp>
+      <p:sp>
+        <p:nvSpPr>
+          <p:cNvPr id="63" name="TextBox 62"/>
+          <p:cNvSpPr txBox="1"/>
+          <p:nvPr/>
+        </p:nvSpPr>
+        <p:spPr>
+          <a:xfrm>
+            <a:off x="10707624" y="5079492"/>
+            <a:ext cx="566928" cy="228600"/>
+          </a:xfrm>
+          <a:prstGeom prst="rect">
+            <a:avLst/>
+          </a:prstGeom>
+          <a:noFill/>
+        </p:spPr>
+        <p:txBody>
+          <a:bodyPr wrap="square" anchor="t" lIns="0" tIns="0" rIns="0" bIns="0">
+            <a:spAutoFit/>
+          </a:bodyPr>
+          <a:lstStyle/>
+          <a:p>
+            <a:pPr algn="l">
+              <a:lnSpc>
+                <a:spcPct val="100000"/>
+              </a:lnSpc>
+            </a:pPr>
+            <a:r>
+              <a:rPr sz="900" b="1">
+                <a:solidFill>
+                  <a:srgbClr val="9AA3B8"/>
+                </a:solidFill>
+                <a:latin typeface="Segoe UI"/>
+              </a:rPr>
+              <a:t>9.71%</a:t>
+            </a:r>
+          </a:p>
+        </p:txBody>
+      </p:sp>
+      <p:sp>
+        <p:nvSpPr>
+          <p:cNvPr id="64" name="Rounded Rectangle 63"/>
+          <p:cNvSpPr/>
+          <p:nvPr/>
+        </p:nvSpPr>
+        <p:spPr>
+          <a:xfrm>
+            <a:off x="566928" y="5504688"/>
+            <a:ext cx="11055096" cy="969264"/>
+          </a:xfrm>
+          <a:prstGeom prst="roundRect">
+            <a:avLst>
+              <a:gd name="adj" fmla="val 16037"/>
+            </a:avLst>
+          </a:prstGeom>
+          <a:solidFill>
+            <a:srgbClr val="FFFFFF"/>
+          </a:solidFill>
+          <a:ln w="9525">
+            <a:solidFill>
+              <a:srgbClr val="E3E6EF"/>
+            </a:solidFill>
+          </a:ln>
+          <a:effectLst/>
+        </p:spPr>
+        <p:style>
+          <a:lnRef idx="1">
+            <a:schemeClr val="accent1"/>
+          </a:lnRef>
+          <a:fillRef idx="3">
+            <a:schemeClr val="accent1"/>
+          </a:fillRef>
+          <a:effectRef idx="2">
+            <a:schemeClr val="accent1"/>
+          </a:effectRef>
+          <a:fontRef idx="minor">
+            <a:schemeClr val="lt1"/>
+          </a:fontRef>
+        </p:style>
+        <p:txBody>
+          <a:bodyPr rtlCol="0" anchor="ctr" wrap="square"/>
+          <a:lstStyle/>
+          <a:p>
+            <a:pPr algn="ctr"/>
+          </a:p>
+        </p:txBody>
+      </p:sp>
+      <p:sp>
+        <p:nvSpPr>
+          <p:cNvPr id="65" name="TextBox 64"/>
+          <p:cNvSpPr txBox="1"/>
+          <p:nvPr/>
+        </p:nvSpPr>
+        <p:spPr>
+          <a:xfrm>
+            <a:off x="841247" y="5705855"/>
+            <a:ext cx="2260854" cy="274320"/>
           </a:xfrm>
           <a:prstGeom prst="rect">
             <a:avLst/>
@@ -5084,14 +5870,14 @@
       </p:sp>
       <p:sp>
         <p:nvSpPr>
-          <p:cNvPr id="48" name="TextBox 47"/>
+          <p:cNvPr id="66" name="TextBox 65"/>
           <p:cNvSpPr txBox="1"/>
           <p:nvPr/>
         </p:nvSpPr>
         <p:spPr>
           <a:xfrm>
-            <a:off x="841247" y="5669279"/>
-            <a:ext cx="3182112" cy="566928"/>
+            <a:off x="841247" y="5980175"/>
+            <a:ext cx="2260854" cy="566928"/>
           </a:xfrm>
           <a:prstGeom prst="rect">
             <a:avLst/>
@@ -5116,21 +5902,21 @@
                 </a:solidFill>
                 <a:latin typeface="Segoe UI"/>
               </a:rPr>
-              <a:t>Athena  ·  B3 / CETIP  ·  Reference Data  ·  Electronic Inventory  ·  Corporate directory (SSO + 2FA)  ·  E-mail and push</a:t>
-            </a:r>
-          </a:p>
-        </p:txBody>
-      </p:sp>
-      <p:sp>
-        <p:nvSpPr>
-          <p:cNvPr id="49" name="Rectangle 48"/>
+              <a:t>Athena  ·  B3 / CETIP  ·  Reference Data  ·  Electronic Inventory  ·  SSO + 2FA  ·  E-mail and push</a:t>
+            </a:r>
+          </a:p>
+        </p:txBody>
+      </p:sp>
+      <p:sp>
+        <p:nvSpPr>
+          <p:cNvPr id="67" name="Rectangle 66"/>
           <p:cNvSpPr/>
           <p:nvPr/>
         </p:nvSpPr>
         <p:spPr>
           <a:xfrm>
-            <a:off x="4251960" y="5394959"/>
-            <a:ext cx="7315" cy="658368"/>
+            <a:off x="3330702" y="5705855"/>
+            <a:ext cx="7315" cy="566928"/>
           </a:xfrm>
           <a:prstGeom prst="rect">
             <a:avLst/>
@@ -5167,14 +5953,14 @@
       </p:sp>
       <p:sp>
         <p:nvSpPr>
-          <p:cNvPr id="50" name="TextBox 49"/>
+          <p:cNvPr id="68" name="TextBox 67"/>
           <p:cNvSpPr txBox="1"/>
           <p:nvPr/>
         </p:nvSpPr>
         <p:spPr>
           <a:xfrm>
-            <a:off x="4526280" y="5394959"/>
-            <a:ext cx="3182112" cy="274320"/>
+            <a:off x="3605022" y="5705855"/>
+            <a:ext cx="2260854" cy="274320"/>
           </a:xfrm>
           <a:prstGeom prst="rect">
             <a:avLst/>
@@ -5206,14 +5992,14 @@
       </p:sp>
       <p:sp>
         <p:nvSpPr>
-          <p:cNvPr id="51" name="TextBox 50"/>
+          <p:cNvPr id="69" name="TextBox 68"/>
           <p:cNvSpPr txBox="1"/>
           <p:nvPr/>
         </p:nvSpPr>
         <p:spPr>
           <a:xfrm>
-            <a:off x="4526280" y="5669279"/>
-            <a:ext cx="3182112" cy="566928"/>
+            <a:off x="3605022" y="5980175"/>
+            <a:ext cx="2260854" cy="566928"/>
           </a:xfrm>
           <a:prstGeom prst="rect">
             <a:avLst/>
@@ -5238,21 +6024,21 @@
                 </a:solidFill>
                 <a:latin typeface="Segoe UI"/>
               </a:rPr>
-              <a:t>FX options: CETIP × Athena end-of-day  ·  Pay / Rec  ·  Comitente  ·  B3 return files, matched back to the trade</a:t>
-            </a:r>
-          </a:p>
-        </p:txBody>
-      </p:sp>
-      <p:sp>
-        <p:nvSpPr>
-          <p:cNvPr id="52" name="Rectangle 51"/>
+              <a:t>FX options: CETIP × Athena end-of-day  ·  Pay / Rec  ·  Comitente  ·  B3 return files</a:t>
+            </a:r>
+          </a:p>
+        </p:txBody>
+      </p:sp>
+      <p:sp>
+        <p:nvSpPr>
+          <p:cNvPr id="70" name="Rectangle 69"/>
           <p:cNvSpPr/>
           <p:nvPr/>
         </p:nvSpPr>
         <p:spPr>
           <a:xfrm>
-            <a:off x="7936992" y="5394959"/>
-            <a:ext cx="7315" cy="658368"/>
+            <a:off x="6094476" y="5705855"/>
+            <a:ext cx="7315" cy="566928"/>
           </a:xfrm>
           <a:prstGeom prst="rect">
             <a:avLst/>
@@ -5289,14 +6075,14 @@
       </p:sp>
       <p:sp>
         <p:nvSpPr>
-          <p:cNvPr id="53" name="TextBox 52"/>
+          <p:cNvPr id="71" name="TextBox 70"/>
           <p:cNvSpPr txBox="1"/>
           <p:nvPr/>
         </p:nvSpPr>
         <p:spPr>
           <a:xfrm>
-            <a:off x="8211312" y="5394959"/>
-            <a:ext cx="3182112" cy="274320"/>
+            <a:off x="6368796" y="5705855"/>
+            <a:ext cx="2260854" cy="274320"/>
           </a:xfrm>
           <a:prstGeom prst="rect">
             <a:avLst/>
@@ -5328,14 +6114,14 @@
       </p:sp>
       <p:sp>
         <p:nvSpPr>
-          <p:cNvPr id="54" name="TextBox 53"/>
+          <p:cNvPr id="72" name="TextBox 71"/>
           <p:cNvSpPr txBox="1"/>
           <p:nvPr/>
         </p:nvSpPr>
         <p:spPr>
           <a:xfrm>
-            <a:off x="8211312" y="5669279"/>
-            <a:ext cx="3182112" cy="566928"/>
+            <a:off x="6368796" y="5980175"/>
+            <a:ext cx="2260854" cy="566928"/>
           </a:xfrm>
           <a:prstGeom prst="rect">
             <a:avLst/>
@@ -5360,20 +6146,142 @@
                 </a:solidFill>
                 <a:latin typeface="Segoe UI"/>
               </a:rPr>
-              <a:t>New Deals Monitor  ·  Confirmations Monitor  ·  KPI and daily metrics  ·  Alerts when something is missing or late</a:t>
-            </a:r>
-          </a:p>
-        </p:txBody>
-      </p:sp>
-      <p:sp>
-        <p:nvSpPr>
-          <p:cNvPr id="55" name="TextBox 54"/>
+              <a:t>New Deals and Confirmations Monitors  ·  KPI and daily metrics  ·  Alerts when something is late</a:t>
+            </a:r>
+          </a:p>
+        </p:txBody>
+      </p:sp>
+      <p:sp>
+        <p:nvSpPr>
+          <p:cNvPr id="73" name="Rectangle 72"/>
+          <p:cNvSpPr/>
+          <p:nvPr/>
+        </p:nvSpPr>
+        <p:spPr>
+          <a:xfrm>
+            <a:off x="8858249" y="5705855"/>
+            <a:ext cx="7315" cy="566928"/>
+          </a:xfrm>
+          <a:prstGeom prst="rect">
+            <a:avLst/>
+          </a:prstGeom>
+          <a:solidFill>
+            <a:srgbClr val="ECEEF5"/>
+          </a:solidFill>
+          <a:ln>
+            <a:noFill/>
+          </a:ln>
+          <a:effectLst/>
+        </p:spPr>
+        <p:style>
+          <a:lnRef idx="1">
+            <a:schemeClr val="accent1"/>
+          </a:lnRef>
+          <a:fillRef idx="3">
+            <a:schemeClr val="accent1"/>
+          </a:fillRef>
+          <a:effectRef idx="2">
+            <a:schemeClr val="accent1"/>
+          </a:effectRef>
+          <a:fontRef idx="minor">
+            <a:schemeClr val="lt1"/>
+          </a:fontRef>
+        </p:style>
+        <p:txBody>
+          <a:bodyPr rtlCol="0" anchor="ctr" wrap="square"/>
+          <a:lstStyle/>
+          <a:p>
+            <a:pPr algn="ctr"/>
+          </a:p>
+        </p:txBody>
+      </p:sp>
+      <p:sp>
+        <p:nvSpPr>
+          <p:cNvPr id="74" name="TextBox 73"/>
           <p:cNvSpPr txBox="1"/>
           <p:nvPr/>
         </p:nvSpPr>
         <p:spPr>
           <a:xfrm>
-            <a:off x="566928" y="6419088"/>
+            <a:off x="9132569" y="5705855"/>
+            <a:ext cx="2260854" cy="274320"/>
+          </a:xfrm>
+          <a:prstGeom prst="rect">
+            <a:avLst/>
+          </a:prstGeom>
+          <a:noFill/>
+        </p:spPr>
+        <p:txBody>
+          <a:bodyPr wrap="square" anchor="t" lIns="0" tIns="0" rIns="0" bIns="0">
+            <a:spAutoFit/>
+          </a:bodyPr>
+          <a:lstStyle/>
+          <a:p>
+            <a:pPr algn="l">
+              <a:lnSpc>
+                <a:spcPct val="100000"/>
+              </a:lnSpc>
+            </a:pPr>
+            <a:r>
+              <a:rPr sz="900" b="1">
+                <a:solidFill>
+                  <a:srgbClr val="D946EF"/>
+                </a:solidFill>
+                <a:latin typeface="Segoe UI"/>
+              </a:rPr>
+              <a:t>BENEFITS DELIVERED</a:t>
+            </a:r>
+          </a:p>
+        </p:txBody>
+      </p:sp>
+      <p:sp>
+        <p:nvSpPr>
+          <p:cNvPr id="75" name="TextBox 74"/>
+          <p:cNvSpPr txBox="1"/>
+          <p:nvPr/>
+        </p:nvSpPr>
+        <p:spPr>
+          <a:xfrm>
+            <a:off x="9132569" y="5980175"/>
+            <a:ext cx="2260854" cy="566928"/>
+          </a:xfrm>
+          <a:prstGeom prst="rect">
+            <a:avLst/>
+          </a:prstGeom>
+          <a:noFill/>
+        </p:spPr>
+        <p:txBody>
+          <a:bodyPr wrap="square" anchor="t" lIns="0" tIns="0" rIns="0" bIns="0">
+            <a:spAutoFit/>
+          </a:bodyPr>
+          <a:lstStyle/>
+          <a:p>
+            <a:pPr algn="l">
+              <a:lnSpc>
+                <a:spcPct val="122000"/>
+              </a:lnSpc>
+            </a:pPr>
+            <a:r>
+              <a:rPr sz="950" b="0">
+                <a:solidFill>
+                  <a:srgbClr val="545A72"/>
+                </a:solidFill>
+                <a:latin typeface="Segoe UI"/>
+              </a:rPr>
+              <a:t>Several Intelligent Solutions consolidated in one place  ·  0.5 FTE reduction already delivered</a:t>
+            </a:r>
+          </a:p>
+        </p:txBody>
+      </p:sp>
+      <p:sp>
+        <p:nvSpPr>
+          <p:cNvPr id="76" name="TextBox 75"/>
+          <p:cNvSpPr txBox="1"/>
+          <p:nvPr/>
+        </p:nvSpPr>
+        <p:spPr>
+          <a:xfrm>
+            <a:off x="566928" y="6565392"/>
             <a:ext cx="11055096" cy="274320"/>
           </a:xfrm>
           <a:prstGeom prst="rect">

--- a/OTC_Tracker_One_Pager.pptx
+++ b/OTC_Tracker_One_Pager.pptx
@@ -6,6 +6,7 @@
   </p:sldMasterIdLst>
   <p:sldIdLst>
     <p:sldId id="256" r:id="rId7"/>
+    <p:sldId id="257" r:id="rId8"/>
   </p:sldIdLst>
   <p:sldSz cx="12191695" cy="6858000" type="screen4x3"/>
   <p:notesSz cx="6858000" cy="9144000"/>
@@ -5003,12 +5004,12 @@
         </p:nvSpPr>
         <p:spPr>
           <a:xfrm>
-            <a:off x="566928" y="4791456"/>
-            <a:ext cx="11055096" cy="566928"/>
-          </a:xfrm>
-          <a:prstGeom prst="roundRect">
-            <a:avLst>
-              <a:gd name="adj" fmla="val 27419"/>
+            <a:off x="566928" y="4773168"/>
+            <a:ext cx="11055096" cy="713232"/>
+          </a:xfrm>
+          <a:prstGeom prst="roundRect">
+            <a:avLst>
+              <a:gd name="adj" fmla="val 21794"/>
             </a:avLst>
           </a:prstGeom>
           <a:solidFill>
@@ -5051,8 +5052,8 @@
         </p:nvSpPr>
         <p:spPr>
           <a:xfrm>
-            <a:off x="841248" y="4901184"/>
-            <a:ext cx="1463040" cy="384048"/>
+            <a:off x="841248" y="4882896"/>
+            <a:ext cx="1280160" cy="384048"/>
           </a:xfrm>
           <a:prstGeom prst="rect">
             <a:avLst/>
@@ -5109,8 +5110,139 @@
         </p:nvSpPr>
         <p:spPr>
           <a:xfrm>
-            <a:off x="2350008" y="4882896"/>
-            <a:ext cx="2020824" cy="228600"/>
+            <a:off x="2167128" y="4846320"/>
+            <a:ext cx="1735531" cy="292608"/>
+          </a:xfrm>
+          <a:prstGeom prst="rect">
+            <a:avLst/>
+          </a:prstGeom>
+          <a:noFill/>
+        </p:spPr>
+        <p:txBody>
+          <a:bodyPr wrap="square" anchor="t" lIns="0" tIns="0" rIns="0" bIns="0">
+            <a:spAutoFit/>
+          </a:bodyPr>
+          <a:lstStyle/>
+          <a:p>
+            <a:pPr algn="l">
+              <a:lnSpc>
+                <a:spcPct val="105000"/>
+              </a:lnSpc>
+            </a:pPr>
+            <a:r>
+              <a:rPr sz="750" b="0">
+                <a:solidFill>
+                  <a:srgbClr val="0E112A"/>
+                </a:solidFill>
+                <a:latin typeface="Segoe UI"/>
+              </a:rPr>
+              <a:t>OTC Tracker — Target</a:t>
+            </a:r>
+          </a:p>
+        </p:txBody>
+      </p:sp>
+      <p:sp>
+        <p:nvSpPr>
+          <p:cNvPr id="49" name="Rounded Rectangle 48"/>
+          <p:cNvSpPr/>
+          <p:nvPr/>
+        </p:nvSpPr>
+        <p:spPr>
+          <a:xfrm>
+            <a:off x="2167128" y="5157216"/>
+            <a:ext cx="1205179" cy="77724"/>
+          </a:xfrm>
+          <a:prstGeom prst="roundRect">
+            <a:avLst>
+              <a:gd name="adj" fmla="val 49411"/>
+            </a:avLst>
+          </a:prstGeom>
+          <a:solidFill>
+            <a:srgbClr val="ECEEF5"/>
+          </a:solidFill>
+          <a:ln>
+            <a:noFill/>
+          </a:ln>
+          <a:effectLst/>
+        </p:spPr>
+        <p:style>
+          <a:lnRef idx="1">
+            <a:schemeClr val="accent1"/>
+          </a:lnRef>
+          <a:fillRef idx="3">
+            <a:schemeClr val="accent1"/>
+          </a:fillRef>
+          <a:effectRef idx="2">
+            <a:schemeClr val="accent1"/>
+          </a:effectRef>
+          <a:fontRef idx="minor">
+            <a:schemeClr val="lt1"/>
+          </a:fontRef>
+        </p:style>
+        <p:txBody>
+          <a:bodyPr rtlCol="0" anchor="ctr" wrap="square"/>
+          <a:lstStyle/>
+          <a:p>
+            <a:pPr algn="ctr"/>
+          </a:p>
+        </p:txBody>
+      </p:sp>
+      <p:sp>
+        <p:nvSpPr>
+          <p:cNvPr id="50" name="Rounded Rectangle 49"/>
+          <p:cNvSpPr/>
+          <p:nvPr/>
+        </p:nvSpPr>
+        <p:spPr>
+          <a:xfrm>
+            <a:off x="2167128" y="5157216"/>
+            <a:ext cx="1049711" cy="77724"/>
+          </a:xfrm>
+          <a:prstGeom prst="roundRect">
+            <a:avLst>
+              <a:gd name="adj" fmla="val 49411"/>
+            </a:avLst>
+          </a:prstGeom>
+          <a:solidFill>
+            <a:srgbClr val="5E5CE6"/>
+          </a:solidFill>
+          <a:ln>
+            <a:noFill/>
+          </a:ln>
+          <a:effectLst/>
+        </p:spPr>
+        <p:style>
+          <a:lnRef idx="1">
+            <a:schemeClr val="accent1"/>
+          </a:lnRef>
+          <a:fillRef idx="3">
+            <a:schemeClr val="accent1"/>
+          </a:fillRef>
+          <a:effectRef idx="2">
+            <a:schemeClr val="accent1"/>
+          </a:effectRef>
+          <a:fontRef idx="minor">
+            <a:schemeClr val="lt1"/>
+          </a:fontRef>
+        </p:style>
+        <p:txBody>
+          <a:bodyPr rtlCol="0" anchor="ctr" wrap="square"/>
+          <a:lstStyle/>
+          <a:p>
+            <a:pPr algn="ctr"/>
+          </a:p>
+        </p:txBody>
+      </p:sp>
+      <p:sp>
+        <p:nvSpPr>
+          <p:cNvPr id="51" name="TextBox 50"/>
+          <p:cNvSpPr txBox="1"/>
+          <p:nvPr/>
+        </p:nvSpPr>
+        <p:spPr>
+          <a:xfrm>
+            <a:off x="3427171" y="5093207"/>
+            <a:ext cx="530352" cy="228600"/>
           </a:xfrm>
           <a:prstGeom prst="rect">
             <a:avLst/>
@@ -5129,119 +5261,27 @@
               </a:lnSpc>
             </a:pPr>
             <a:r>
-              <a:rPr sz="800" b="0">
+              <a:rPr sz="850" b="1">
                 <a:solidFill>
-                  <a:srgbClr val="0E112A"/>
+                  <a:srgbClr val="5E5CE6"/>
                 </a:solidFill>
                 <a:latin typeface="Segoe UI"/>
               </a:rPr>
-              <a:t>OTC Tracker — Full</a:t>
+              <a:t>87.10%</a:t>
             </a:r>
           </a:p>
         </p:txBody>
       </p:sp>
       <p:sp>
         <p:nvSpPr>
-          <p:cNvPr id="49" name="Rounded Rectangle 48"/>
-          <p:cNvSpPr/>
-          <p:nvPr/>
-        </p:nvSpPr>
-        <p:spPr>
-          <a:xfrm>
-            <a:off x="2350008" y="5143500"/>
-            <a:ext cx="1536192" cy="77724"/>
-          </a:xfrm>
-          <a:prstGeom prst="roundRect">
-            <a:avLst>
-              <a:gd name="adj" fmla="val 49411"/>
-            </a:avLst>
-          </a:prstGeom>
-          <a:solidFill>
-            <a:srgbClr val="ECEEF5"/>
-          </a:solidFill>
-          <a:ln>
-            <a:noFill/>
-          </a:ln>
-          <a:effectLst/>
-        </p:spPr>
-        <p:style>
-          <a:lnRef idx="1">
-            <a:schemeClr val="accent1"/>
-          </a:lnRef>
-          <a:fillRef idx="3">
-            <a:schemeClr val="accent1"/>
-          </a:fillRef>
-          <a:effectRef idx="2">
-            <a:schemeClr val="accent1"/>
-          </a:effectRef>
-          <a:fontRef idx="minor">
-            <a:schemeClr val="lt1"/>
-          </a:fontRef>
-        </p:style>
-        <p:txBody>
-          <a:bodyPr rtlCol="0" anchor="ctr" wrap="square"/>
-          <a:lstStyle/>
-          <a:p>
-            <a:pPr algn="ctr"/>
-          </a:p>
-        </p:txBody>
-      </p:sp>
-      <p:sp>
-        <p:nvSpPr>
-          <p:cNvPr id="50" name="Rounded Rectangle 49"/>
-          <p:cNvSpPr/>
-          <p:nvPr/>
-        </p:nvSpPr>
-        <p:spPr>
-          <a:xfrm>
-            <a:off x="2350008" y="5143500"/>
-            <a:ext cx="954589" cy="77724"/>
-          </a:xfrm>
-          <a:prstGeom prst="roundRect">
-            <a:avLst>
-              <a:gd name="adj" fmla="val 49411"/>
-            </a:avLst>
-          </a:prstGeom>
-          <a:solidFill>
-            <a:srgbClr val="0066CC"/>
-          </a:solidFill>
-          <a:ln>
-            <a:noFill/>
-          </a:ln>
-          <a:effectLst/>
-        </p:spPr>
-        <p:style>
-          <a:lnRef idx="1">
-            <a:schemeClr val="accent1"/>
-          </a:lnRef>
-          <a:fillRef idx="3">
-            <a:schemeClr val="accent1"/>
-          </a:fillRef>
-          <a:effectRef idx="2">
-            <a:schemeClr val="accent1"/>
-          </a:effectRef>
-          <a:fontRef idx="minor">
-            <a:schemeClr val="lt1"/>
-          </a:fontRef>
-        </p:style>
-        <p:txBody>
-          <a:bodyPr rtlCol="0" anchor="ctr" wrap="square"/>
-          <a:lstStyle/>
-          <a:p>
-            <a:pPr algn="ctr"/>
-          </a:p>
-        </p:txBody>
-      </p:sp>
-      <p:sp>
-        <p:nvSpPr>
-          <p:cNvPr id="51" name="TextBox 50"/>
+          <p:cNvPr id="52" name="TextBox 51"/>
           <p:cNvSpPr txBox="1"/>
           <p:nvPr/>
         </p:nvSpPr>
         <p:spPr>
           <a:xfrm>
-            <a:off x="3959352" y="5079492"/>
-            <a:ext cx="566928" cy="228600"/>
+            <a:off x="4012387" y="4846320"/>
+            <a:ext cx="1735531" cy="292608"/>
           </a:xfrm>
           <a:prstGeom prst="rect">
             <a:avLst/>
@@ -5256,50 +5296,11 @@
           <a:p>
             <a:pPr algn="l">
               <a:lnSpc>
-                <a:spcPct val="100000"/>
+                <a:spcPct val="105000"/>
               </a:lnSpc>
             </a:pPr>
             <a:r>
-              <a:rPr sz="900" b="1">
-                <a:solidFill>
-                  <a:srgbClr val="0066CC"/>
-                </a:solidFill>
-                <a:latin typeface="Segoe UI"/>
-              </a:rPr>
-              <a:t>62.14%</a:t>
-            </a:r>
-          </a:p>
-        </p:txBody>
-      </p:sp>
-      <p:sp>
-        <p:nvSpPr>
-          <p:cNvPr id="52" name="TextBox 51"/>
-          <p:cNvSpPr txBox="1"/>
-          <p:nvPr/>
-        </p:nvSpPr>
-        <p:spPr>
-          <a:xfrm>
-            <a:off x="4599431" y="4882896"/>
-            <a:ext cx="2020824" cy="228600"/>
-          </a:xfrm>
-          <a:prstGeom prst="rect">
-            <a:avLst/>
-          </a:prstGeom>
-          <a:noFill/>
-        </p:spPr>
-        <p:txBody>
-          <a:bodyPr wrap="square" anchor="t" lIns="0" tIns="0" rIns="0" bIns="0">
-            <a:spAutoFit/>
-          </a:bodyPr>
-          <a:lstStyle/>
-          <a:p>
-            <a:pPr algn="l">
-              <a:lnSpc>
-                <a:spcPct val="100000"/>
-              </a:lnSpc>
-            </a:pPr>
-            <a:r>
-              <a:rPr sz="800" b="0">
+              <a:rPr sz="750" b="0">
                 <a:solidFill>
                   <a:srgbClr val="0E112A"/>
                 </a:solidFill>
@@ -5318,8 +5319,8 @@
         </p:nvSpPr>
         <p:spPr>
           <a:xfrm>
-            <a:off x="4599431" y="5143500"/>
-            <a:ext cx="1536192" cy="77724"/>
+            <a:off x="4012387" y="5157216"/>
+            <a:ext cx="1205179" cy="77724"/>
           </a:xfrm>
           <a:prstGeom prst="roundRect">
             <a:avLst>
@@ -5364,8 +5365,8 @@
         </p:nvSpPr>
         <p:spPr>
           <a:xfrm>
-            <a:off x="4599431" y="5143500"/>
-            <a:ext cx="507096" cy="77724"/>
+            <a:off x="4012387" y="5157216"/>
+            <a:ext cx="330460" cy="77724"/>
           </a:xfrm>
           <a:prstGeom prst="roundRect">
             <a:avLst>
@@ -5373,7 +5374,7 @@
             </a:avLst>
           </a:prstGeom>
           <a:solidFill>
-            <a:srgbClr val="5E5CE6"/>
+            <a:srgbClr val="0066CC"/>
           </a:solidFill>
           <a:ln>
             <a:noFill/>
@@ -5410,8 +5411,8 @@
         </p:nvSpPr>
         <p:spPr>
           <a:xfrm>
-            <a:off x="6208775" y="5079492"/>
-            <a:ext cx="566928" cy="228600"/>
+            <a:off x="5272430" y="5093207"/>
+            <a:ext cx="530352" cy="228600"/>
           </a:xfrm>
           <a:prstGeom prst="rect">
             <a:avLst/>
@@ -5430,13 +5431,13 @@
               </a:lnSpc>
             </a:pPr>
             <a:r>
-              <a:rPr sz="900" b="1">
+              <a:rPr sz="850" b="1">
                 <a:solidFill>
-                  <a:srgbClr val="5E5CE6"/>
+                  <a:srgbClr val="0066CC"/>
                 </a:solidFill>
                 <a:latin typeface="Segoe UI"/>
               </a:rPr>
-              <a:t>33.01%</a:t>
+              <a:t>27.42%</a:t>
             </a:r>
           </a:p>
         </p:txBody>
@@ -5449,8 +5450,139 @@
         </p:nvSpPr>
         <p:spPr>
           <a:xfrm>
-            <a:off x="6848856" y="4882896"/>
-            <a:ext cx="2020824" cy="228600"/>
+            <a:off x="5857646" y="4846320"/>
+            <a:ext cx="1735531" cy="292608"/>
+          </a:xfrm>
+          <a:prstGeom prst="rect">
+            <a:avLst/>
+          </a:prstGeom>
+          <a:noFill/>
+        </p:spPr>
+        <p:txBody>
+          <a:bodyPr wrap="square" anchor="t" lIns="0" tIns="0" rIns="0" bIns="0">
+            <a:spAutoFit/>
+          </a:bodyPr>
+          <a:lstStyle/>
+          <a:p>
+            <a:pPr algn="l">
+              <a:lnSpc>
+                <a:spcPct val="105000"/>
+              </a:lnSpc>
+            </a:pPr>
+            <a:r>
+              <a:rPr sz="750" b="0">
+                <a:solidFill>
+                  <a:srgbClr val="0E112A"/>
+                </a:solidFill>
+                <a:latin typeface="Segoe UI"/>
+              </a:rPr>
+              <a:t>Inoa</a:t>
+            </a:r>
+          </a:p>
+        </p:txBody>
+      </p:sp>
+      <p:sp>
+        <p:nvSpPr>
+          <p:cNvPr id="57" name="Rounded Rectangle 56"/>
+          <p:cNvSpPr/>
+          <p:nvPr/>
+        </p:nvSpPr>
+        <p:spPr>
+          <a:xfrm>
+            <a:off x="5857646" y="5157216"/>
+            <a:ext cx="1205179" cy="77724"/>
+          </a:xfrm>
+          <a:prstGeom prst="roundRect">
+            <a:avLst>
+              <a:gd name="adj" fmla="val 49411"/>
+            </a:avLst>
+          </a:prstGeom>
+          <a:solidFill>
+            <a:srgbClr val="ECEEF5"/>
+          </a:solidFill>
+          <a:ln>
+            <a:noFill/>
+          </a:ln>
+          <a:effectLst/>
+        </p:spPr>
+        <p:style>
+          <a:lnRef idx="1">
+            <a:schemeClr val="accent1"/>
+          </a:lnRef>
+          <a:fillRef idx="3">
+            <a:schemeClr val="accent1"/>
+          </a:fillRef>
+          <a:effectRef idx="2">
+            <a:schemeClr val="accent1"/>
+          </a:effectRef>
+          <a:fontRef idx="minor">
+            <a:schemeClr val="lt1"/>
+          </a:fontRef>
+        </p:style>
+        <p:txBody>
+          <a:bodyPr rtlCol="0" anchor="ctr" wrap="square"/>
+          <a:lstStyle/>
+          <a:p>
+            <a:pPr algn="ctr"/>
+          </a:p>
+        </p:txBody>
+      </p:sp>
+      <p:sp>
+        <p:nvSpPr>
+          <p:cNvPr id="58" name="Rounded Rectangle 57"/>
+          <p:cNvSpPr/>
+          <p:nvPr/>
+        </p:nvSpPr>
+        <p:spPr>
+          <a:xfrm>
+            <a:off x="5857646" y="5157216"/>
+            <a:ext cx="174992" cy="77724"/>
+          </a:xfrm>
+          <a:prstGeom prst="roundRect">
+            <a:avLst>
+              <a:gd name="adj" fmla="val 49411"/>
+            </a:avLst>
+          </a:prstGeom>
+          <a:solidFill>
+            <a:srgbClr val="9AA3B8"/>
+          </a:solidFill>
+          <a:ln>
+            <a:noFill/>
+          </a:ln>
+          <a:effectLst/>
+        </p:spPr>
+        <p:style>
+          <a:lnRef idx="1">
+            <a:schemeClr val="accent1"/>
+          </a:lnRef>
+          <a:fillRef idx="3">
+            <a:schemeClr val="accent1"/>
+          </a:fillRef>
+          <a:effectRef idx="2">
+            <a:schemeClr val="accent1"/>
+          </a:effectRef>
+          <a:fontRef idx="minor">
+            <a:schemeClr val="lt1"/>
+          </a:fontRef>
+        </p:style>
+        <p:txBody>
+          <a:bodyPr rtlCol="0" anchor="ctr" wrap="square"/>
+          <a:lstStyle/>
+          <a:p>
+            <a:pPr algn="ctr"/>
+          </a:p>
+        </p:txBody>
+      </p:sp>
+      <p:sp>
+        <p:nvSpPr>
+          <p:cNvPr id="59" name="TextBox 58"/>
+          <p:cNvSpPr txBox="1"/>
+          <p:nvPr/>
+        </p:nvSpPr>
+        <p:spPr>
+          <a:xfrm>
+            <a:off x="7117689" y="5093207"/>
+            <a:ext cx="530352" cy="228600"/>
           </a:xfrm>
           <a:prstGeom prst="rect">
             <a:avLst/>
@@ -5469,7 +5601,46 @@
               </a:lnSpc>
             </a:pPr>
             <a:r>
-              <a:rPr sz="800" b="0">
+              <a:rPr sz="850" b="1">
+                <a:solidFill>
+                  <a:srgbClr val="9AA3B8"/>
+                </a:solidFill>
+                <a:latin typeface="Segoe UI"/>
+              </a:rPr>
+              <a:t>14.52%</a:t>
+            </a:r>
+          </a:p>
+        </p:txBody>
+      </p:sp>
+      <p:sp>
+        <p:nvSpPr>
+          <p:cNvPr id="60" name="TextBox 59"/>
+          <p:cNvSpPr txBox="1"/>
+          <p:nvPr/>
+        </p:nvSpPr>
+        <p:spPr>
+          <a:xfrm>
+            <a:off x="7702905" y="4846320"/>
+            <a:ext cx="1735531" cy="292608"/>
+          </a:xfrm>
+          <a:prstGeom prst="rect">
+            <a:avLst/>
+          </a:prstGeom>
+          <a:noFill/>
+        </p:spPr>
+        <p:txBody>
+          <a:bodyPr wrap="square" anchor="t" lIns="0" tIns="0" rIns="0" bIns="0">
+            <a:spAutoFit/>
+          </a:bodyPr>
+          <a:lstStyle/>
+          <a:p>
+            <a:pPr algn="l">
+              <a:lnSpc>
+                <a:spcPct val="105000"/>
+              </a:lnSpc>
+            </a:pPr>
+            <a:r>
+              <a:rPr sz="750" b="0">
                 <a:solidFill>
                   <a:srgbClr val="0E112A"/>
                 </a:solidFill>
@@ -5482,14 +5653,14 @@
       </p:sp>
       <p:sp>
         <p:nvSpPr>
-          <p:cNvPr id="57" name="Rounded Rectangle 56"/>
-          <p:cNvSpPr/>
-          <p:nvPr/>
-        </p:nvSpPr>
-        <p:spPr>
-          <a:xfrm>
-            <a:off x="6848856" y="5143500"/>
-            <a:ext cx="1536192" cy="77724"/>
+          <p:cNvPr id="61" name="Rounded Rectangle 60"/>
+          <p:cNvSpPr/>
+          <p:nvPr/>
+        </p:nvSpPr>
+        <p:spPr>
+          <a:xfrm>
+            <a:off x="7702905" y="5157216"/>
+            <a:ext cx="1205179" cy="77724"/>
           </a:xfrm>
           <a:prstGeom prst="roundRect">
             <a:avLst>
@@ -5528,14 +5699,14 @@
       </p:sp>
       <p:sp>
         <p:nvSpPr>
-          <p:cNvPr id="58" name="Rounded Rectangle 57"/>
-          <p:cNvSpPr/>
-          <p:nvPr/>
-        </p:nvSpPr>
-        <p:spPr>
-          <a:xfrm>
-            <a:off x="6848856" y="5143500"/>
-            <a:ext cx="223669" cy="77724"/>
+          <p:cNvPr id="62" name="Rounded Rectangle 61"/>
+          <p:cNvSpPr/>
+          <p:nvPr/>
+        </p:nvSpPr>
+        <p:spPr>
+          <a:xfrm>
+            <a:off x="7702905" y="5157216"/>
+            <a:ext cx="145826" cy="77724"/>
           </a:xfrm>
           <a:prstGeom prst="roundRect">
             <a:avLst>
@@ -5574,14 +5745,14 @@
       </p:sp>
       <p:sp>
         <p:nvSpPr>
-          <p:cNvPr id="59" name="TextBox 58"/>
+          <p:cNvPr id="63" name="TextBox 62"/>
           <p:cNvSpPr txBox="1"/>
           <p:nvPr/>
         </p:nvSpPr>
         <p:spPr>
           <a:xfrm>
-            <a:off x="8458200" y="5079492"/>
-            <a:ext cx="566928" cy="228600"/>
+            <a:off x="8962948" y="5093207"/>
+            <a:ext cx="530352" cy="228600"/>
           </a:xfrm>
           <a:prstGeom prst="rect">
             <a:avLst/>
@@ -5600,27 +5771,27 @@
               </a:lnSpc>
             </a:pPr>
             <a:r>
-              <a:rPr sz="900" b="1">
+              <a:rPr sz="850" b="1">
                 <a:solidFill>
                   <a:srgbClr val="9AA3B8"/>
                 </a:solidFill>
                 <a:latin typeface="Segoe UI"/>
               </a:rPr>
-              <a:t>14.56%</a:t>
+              <a:t>12.10%</a:t>
             </a:r>
           </a:p>
         </p:txBody>
       </p:sp>
       <p:sp>
         <p:nvSpPr>
-          <p:cNvPr id="60" name="TextBox 59"/>
+          <p:cNvPr id="64" name="TextBox 63"/>
           <p:cNvSpPr txBox="1"/>
           <p:nvPr/>
         </p:nvSpPr>
         <p:spPr>
           <a:xfrm>
-            <a:off x="9098280" y="4882896"/>
-            <a:ext cx="2020824" cy="228600"/>
+            <a:off x="9548164" y="4846320"/>
+            <a:ext cx="1735531" cy="292608"/>
           </a:xfrm>
           <a:prstGeom prst="rect">
             <a:avLst/>
@@ -5635,11 +5806,11 @@
           <a:p>
             <a:pPr algn="l">
               <a:lnSpc>
-                <a:spcPct val="100000"/>
+                <a:spcPct val="105000"/>
               </a:lnSpc>
             </a:pPr>
             <a:r>
-              <a:rPr sz="800" b="0">
+              <a:rPr sz="750" b="0">
                 <a:solidFill>
                   <a:srgbClr val="0E112A"/>
                 </a:solidFill>
@@ -5652,14 +5823,14 @@
       </p:sp>
       <p:sp>
         <p:nvSpPr>
-          <p:cNvPr id="61" name="Rounded Rectangle 60"/>
-          <p:cNvSpPr/>
-          <p:nvPr/>
-        </p:nvSpPr>
-        <p:spPr>
-          <a:xfrm>
-            <a:off x="9098280" y="5143500"/>
-            <a:ext cx="1536192" cy="77724"/>
+          <p:cNvPr id="65" name="Rounded Rectangle 64"/>
+          <p:cNvSpPr/>
+          <p:nvPr/>
+        </p:nvSpPr>
+        <p:spPr>
+          <a:xfrm>
+            <a:off x="9548164" y="5157216"/>
+            <a:ext cx="1205179" cy="77724"/>
           </a:xfrm>
           <a:prstGeom prst="roundRect">
             <a:avLst>
@@ -5698,14 +5869,14 @@
       </p:sp>
       <p:sp>
         <p:nvSpPr>
-          <p:cNvPr id="62" name="Rounded Rectangle 61"/>
-          <p:cNvSpPr/>
-          <p:nvPr/>
-        </p:nvSpPr>
-        <p:spPr>
-          <a:xfrm>
-            <a:off x="9098280" y="5143500"/>
-            <a:ext cx="149164" cy="77724"/>
+          <p:cNvPr id="66" name="Rounded Rectangle 65"/>
+          <p:cNvSpPr/>
+          <p:nvPr/>
+        </p:nvSpPr>
+        <p:spPr>
+          <a:xfrm>
+            <a:off x="9548164" y="5157216"/>
+            <a:ext cx="97137" cy="77724"/>
           </a:xfrm>
           <a:prstGeom prst="roundRect">
             <a:avLst>
@@ -5744,14 +5915,14 @@
       </p:sp>
       <p:sp>
         <p:nvSpPr>
-          <p:cNvPr id="63" name="TextBox 62"/>
+          <p:cNvPr id="67" name="TextBox 66"/>
           <p:cNvSpPr txBox="1"/>
           <p:nvPr/>
         </p:nvSpPr>
         <p:spPr>
           <a:xfrm>
-            <a:off x="10707624" y="5079492"/>
-            <a:ext cx="566928" cy="228600"/>
+            <a:off x="10808208" y="5093207"/>
+            <a:ext cx="530352" cy="228600"/>
           </a:xfrm>
           <a:prstGeom prst="rect">
             <a:avLst/>
@@ -5770,31 +5941,70 @@
               </a:lnSpc>
             </a:pPr>
             <a:r>
-              <a:rPr sz="900" b="1">
+              <a:rPr sz="850" b="1">
                 <a:solidFill>
                   <a:srgbClr val="9AA3B8"/>
                 </a:solidFill>
                 <a:latin typeface="Segoe UI"/>
               </a:rPr>
-              <a:t>9.71%</a:t>
+              <a:t>8.06%</a:t>
             </a:r>
           </a:p>
         </p:txBody>
       </p:sp>
       <p:sp>
         <p:nvSpPr>
-          <p:cNvPr id="64" name="Rounded Rectangle 63"/>
-          <p:cNvSpPr/>
-          <p:nvPr/>
-        </p:nvSpPr>
-        <p:spPr>
-          <a:xfrm>
-            <a:off x="566928" y="5504688"/>
-            <a:ext cx="11055096" cy="969264"/>
-          </a:xfrm>
-          <a:prstGeom prst="roundRect">
-            <a:avLst>
-              <a:gd name="adj" fmla="val 16037"/>
+          <p:cNvPr id="68" name="TextBox 67"/>
+          <p:cNvSpPr txBox="1"/>
+          <p:nvPr/>
+        </p:nvSpPr>
+        <p:spPr>
+          <a:xfrm>
+            <a:off x="841248" y="5308092"/>
+            <a:ext cx="10515600" cy="164592"/>
+          </a:xfrm>
+          <a:prstGeom prst="rect">
+            <a:avLst/>
+          </a:prstGeom>
+          <a:noFill/>
+        </p:spPr>
+        <p:txBody>
+          <a:bodyPr wrap="square" anchor="t" lIns="0" tIns="0" rIns="0" bIns="0">
+            <a:spAutoFit/>
+          </a:bodyPr>
+          <a:lstStyle/>
+          <a:p>
+            <a:pPr algn="l">
+              <a:lnSpc>
+                <a:spcPct val="100000"/>
+              </a:lnSpc>
+            </a:pPr>
+            <a:r>
+              <a:rPr sz="750" b="0">
+                <a:solidFill>
+                  <a:srgbClr val="7B8299"/>
+                </a:solidFill>
+                <a:latin typeface="Segoe UI"/>
+              </a:rPr>
+              <a:t>The % is the share of the 124-point OTC Derivatives process universe each tool automates end-to-end (or nearly so) — everything outside it is still a manual process.</a:t>
+            </a:r>
+          </a:p>
+        </p:txBody>
+      </p:sp>
+      <p:sp>
+        <p:nvSpPr>
+          <p:cNvPr id="69" name="Rounded Rectangle 68"/>
+          <p:cNvSpPr/>
+          <p:nvPr/>
+        </p:nvSpPr>
+        <p:spPr>
+          <a:xfrm>
+            <a:off x="566928" y="5559552"/>
+            <a:ext cx="11055096" cy="914400"/>
+          </a:xfrm>
+          <a:prstGeom prst="roundRect">
+            <a:avLst>
+              <a:gd name="adj" fmla="val 17000"/>
             </a:avLst>
           </a:prstGeom>
           <a:solidFill>
@@ -5831,13 +6041,13 @@
       </p:sp>
       <p:sp>
         <p:nvSpPr>
-          <p:cNvPr id="65" name="TextBox 64"/>
+          <p:cNvPr id="70" name="TextBox 69"/>
           <p:cNvSpPr txBox="1"/>
           <p:nvPr/>
         </p:nvSpPr>
         <p:spPr>
           <a:xfrm>
-            <a:off x="841247" y="5705855"/>
+            <a:off x="841247" y="5760720"/>
             <a:ext cx="2260854" cy="274320"/>
           </a:xfrm>
           <a:prstGeom prst="rect">
@@ -5870,13 +6080,13 @@
       </p:sp>
       <p:sp>
         <p:nvSpPr>
-          <p:cNvPr id="66" name="TextBox 65"/>
+          <p:cNvPr id="71" name="TextBox 70"/>
           <p:cNvSpPr txBox="1"/>
           <p:nvPr/>
         </p:nvSpPr>
         <p:spPr>
           <a:xfrm>
-            <a:off x="841247" y="5980175"/>
+            <a:off x="841247" y="6035040"/>
             <a:ext cx="2260854" cy="566928"/>
           </a:xfrm>
           <a:prstGeom prst="rect">
@@ -5909,14 +6119,14 @@
       </p:sp>
       <p:sp>
         <p:nvSpPr>
-          <p:cNvPr id="67" name="Rectangle 66"/>
-          <p:cNvSpPr/>
-          <p:nvPr/>
-        </p:nvSpPr>
-        <p:spPr>
-          <a:xfrm>
-            <a:off x="3330702" y="5705855"/>
-            <a:ext cx="7315" cy="566928"/>
+          <p:cNvPr id="72" name="Rectangle 71"/>
+          <p:cNvSpPr/>
+          <p:nvPr/>
+        </p:nvSpPr>
+        <p:spPr>
+          <a:xfrm>
+            <a:off x="3330702" y="5760720"/>
+            <a:ext cx="7315" cy="512064"/>
           </a:xfrm>
           <a:prstGeom prst="rect">
             <a:avLst/>
@@ -5953,13 +6163,13 @@
       </p:sp>
       <p:sp>
         <p:nvSpPr>
-          <p:cNvPr id="68" name="TextBox 67"/>
+          <p:cNvPr id="73" name="TextBox 72"/>
           <p:cNvSpPr txBox="1"/>
           <p:nvPr/>
         </p:nvSpPr>
         <p:spPr>
           <a:xfrm>
-            <a:off x="3605022" y="5705855"/>
+            <a:off x="3605022" y="5760720"/>
             <a:ext cx="2260854" cy="274320"/>
           </a:xfrm>
           <a:prstGeom prst="rect">
@@ -5992,13 +6202,13 @@
       </p:sp>
       <p:sp>
         <p:nvSpPr>
-          <p:cNvPr id="69" name="TextBox 68"/>
+          <p:cNvPr id="74" name="TextBox 73"/>
           <p:cNvSpPr txBox="1"/>
           <p:nvPr/>
         </p:nvSpPr>
         <p:spPr>
           <a:xfrm>
-            <a:off x="3605022" y="5980175"/>
+            <a:off x="3605022" y="6035040"/>
             <a:ext cx="2260854" cy="566928"/>
           </a:xfrm>
           <a:prstGeom prst="rect">
@@ -6031,14 +6241,14 @@
       </p:sp>
       <p:sp>
         <p:nvSpPr>
-          <p:cNvPr id="70" name="Rectangle 69"/>
-          <p:cNvSpPr/>
-          <p:nvPr/>
-        </p:nvSpPr>
-        <p:spPr>
-          <a:xfrm>
-            <a:off x="6094476" y="5705855"/>
-            <a:ext cx="7315" cy="566928"/>
+          <p:cNvPr id="75" name="Rectangle 74"/>
+          <p:cNvSpPr/>
+          <p:nvPr/>
+        </p:nvSpPr>
+        <p:spPr>
+          <a:xfrm>
+            <a:off x="6094476" y="5760720"/>
+            <a:ext cx="7315" cy="512064"/>
           </a:xfrm>
           <a:prstGeom prst="rect">
             <a:avLst/>
@@ -6075,13 +6285,13 @@
       </p:sp>
       <p:sp>
         <p:nvSpPr>
-          <p:cNvPr id="71" name="TextBox 70"/>
+          <p:cNvPr id="76" name="TextBox 75"/>
           <p:cNvSpPr txBox="1"/>
           <p:nvPr/>
         </p:nvSpPr>
         <p:spPr>
           <a:xfrm>
-            <a:off x="6368796" y="5705855"/>
+            <a:off x="6368796" y="5760720"/>
             <a:ext cx="2260854" cy="274320"/>
           </a:xfrm>
           <a:prstGeom prst="rect">
@@ -6114,13 +6324,13 @@
       </p:sp>
       <p:sp>
         <p:nvSpPr>
-          <p:cNvPr id="72" name="TextBox 71"/>
+          <p:cNvPr id="77" name="TextBox 76"/>
           <p:cNvSpPr txBox="1"/>
           <p:nvPr/>
         </p:nvSpPr>
         <p:spPr>
           <a:xfrm>
-            <a:off x="6368796" y="5980175"/>
+            <a:off x="6368796" y="6035040"/>
             <a:ext cx="2260854" cy="566928"/>
           </a:xfrm>
           <a:prstGeom prst="rect">
@@ -6153,14 +6363,14 @@
       </p:sp>
       <p:sp>
         <p:nvSpPr>
-          <p:cNvPr id="73" name="Rectangle 72"/>
-          <p:cNvSpPr/>
-          <p:nvPr/>
-        </p:nvSpPr>
-        <p:spPr>
-          <a:xfrm>
-            <a:off x="8858249" y="5705855"/>
-            <a:ext cx="7315" cy="566928"/>
+          <p:cNvPr id="78" name="Rectangle 77"/>
+          <p:cNvSpPr/>
+          <p:nvPr/>
+        </p:nvSpPr>
+        <p:spPr>
+          <a:xfrm>
+            <a:off x="8858249" y="5760720"/>
+            <a:ext cx="7315" cy="512064"/>
           </a:xfrm>
           <a:prstGeom prst="rect">
             <a:avLst/>
@@ -6197,13 +6407,13 @@
       </p:sp>
       <p:sp>
         <p:nvSpPr>
-          <p:cNvPr id="74" name="TextBox 73"/>
+          <p:cNvPr id="79" name="TextBox 78"/>
           <p:cNvSpPr txBox="1"/>
           <p:nvPr/>
         </p:nvSpPr>
         <p:spPr>
           <a:xfrm>
-            <a:off x="9132569" y="5705855"/>
+            <a:off x="9132569" y="5760720"/>
             <a:ext cx="2260854" cy="274320"/>
           </a:xfrm>
           <a:prstGeom prst="rect">
@@ -6236,13 +6446,13 @@
       </p:sp>
       <p:sp>
         <p:nvSpPr>
-          <p:cNvPr id="75" name="TextBox 74"/>
+          <p:cNvPr id="80" name="TextBox 79"/>
           <p:cNvSpPr txBox="1"/>
           <p:nvPr/>
         </p:nvSpPr>
         <p:spPr>
           <a:xfrm>
-            <a:off x="9132569" y="5980175"/>
+            <a:off x="9132569" y="6035040"/>
             <a:ext cx="2260854" cy="566928"/>
           </a:xfrm>
           <a:prstGeom prst="rect">
@@ -6275,7 +6485,8860 @@
       </p:sp>
       <p:sp>
         <p:nvSpPr>
-          <p:cNvPr id="76" name="TextBox 75"/>
+          <p:cNvPr id="81" name="TextBox 80"/>
+          <p:cNvSpPr txBox="1"/>
+          <p:nvPr/>
+        </p:nvSpPr>
+        <p:spPr>
+          <a:xfrm>
+            <a:off x="566928" y="6565392"/>
+            <a:ext cx="11055096" cy="274320"/>
+          </a:xfrm>
+          <a:prstGeom prst="rect">
+            <a:avLst/>
+          </a:prstGeom>
+          <a:noFill/>
+        </p:spPr>
+        <p:txBody>
+          <a:bodyPr wrap="square" anchor="t" lIns="0" tIns="0" rIns="0" bIns="0">
+            <a:spAutoFit/>
+          </a:bodyPr>
+          <a:lstStyle/>
+          <a:p>
+            <a:pPr algn="l">
+              <a:lnSpc>
+                <a:spcPct val="100000"/>
+              </a:lnSpc>
+            </a:pPr>
+            <a:r>
+              <a:rPr sz="850" b="0">
+                <a:solidFill>
+                  <a:srgbClr val="7B8299"/>
+                </a:solidFill>
+                <a:latin typeface="Segoe UI"/>
+              </a:rPr>
+              <a:t>Internal use — Brazil OTC Operations, J.P. Morgan</a:t>
+            </a:r>
+          </a:p>
+        </p:txBody>
+      </p:sp>
+    </p:spTree>
+  </p:cSld>
+  <p:clrMapOvr>
+    <a:masterClrMapping/>
+  </p:clrMapOvr>
+</p:sld>
+</file>
+
+<file path=ppt/slides/slide2.xml><?xml version="1.0" encoding="utf-8"?>
+<p:sld xmlns:a="http://schemas.openxmlformats.org/drawingml/2006/main" xmlns:p="http://schemas.openxmlformats.org/presentationml/2006/main" xmlns:r="http://schemas.openxmlformats.org/officeDocument/2006/relationships">
+  <p:cSld>
+    <p:spTree>
+      <p:nvGrpSpPr>
+        <p:cNvPr id="1" name=""/>
+        <p:cNvGrpSpPr/>
+        <p:nvPr/>
+      </p:nvGrpSpPr>
+      <p:grpSpPr/>
+      <p:sp>
+        <p:nvSpPr>
+          <p:cNvPr id="2" name="Rectangle 1"/>
+          <p:cNvSpPr/>
+          <p:nvPr/>
+        </p:nvSpPr>
+        <p:spPr>
+          <a:xfrm>
+            <a:off x="0" y="0"/>
+            <a:ext cx="12191695" cy="6858000"/>
+          </a:xfrm>
+          <a:prstGeom prst="rect">
+            <a:avLst/>
+          </a:prstGeom>
+          <a:solidFill>
+            <a:srgbClr val="F6F7FB"/>
+          </a:solidFill>
+          <a:ln>
+            <a:noFill/>
+          </a:ln>
+          <a:effectLst/>
+        </p:spPr>
+        <p:style>
+          <a:lnRef idx="1">
+            <a:schemeClr val="accent1"/>
+          </a:lnRef>
+          <a:fillRef idx="3">
+            <a:schemeClr val="accent1"/>
+          </a:fillRef>
+          <a:effectRef idx="2">
+            <a:schemeClr val="accent1"/>
+          </a:effectRef>
+          <a:fontRef idx="minor">
+            <a:schemeClr val="lt1"/>
+          </a:fontRef>
+        </p:style>
+        <p:txBody>
+          <a:bodyPr rtlCol="0" anchor="ctr" wrap="square"/>
+          <a:lstStyle/>
+          <a:p>
+            <a:pPr algn="ctr"/>
+          </a:p>
+        </p:txBody>
+      </p:sp>
+      <p:sp>
+        <p:nvSpPr>
+          <p:cNvPr id="3" name="Rectangle 2"/>
+          <p:cNvSpPr/>
+          <p:nvPr/>
+        </p:nvSpPr>
+        <p:spPr>
+          <a:xfrm>
+            <a:off x="0" y="0"/>
+            <a:ext cx="12191695" cy="1298448"/>
+          </a:xfrm>
+          <a:prstGeom prst="rect">
+            <a:avLst/>
+          </a:prstGeom>
+          <a:gradFill rotWithShape="1">
+            <a:gsLst>
+              <a:gs pos="0">
+                <a:srgbClr val="0066CC"/>
+              </a:gs>
+              <a:gs pos="500">
+                <a:srgbClr val="5E5CE6"/>
+              </a:gs>
+              <a:gs pos="800">
+                <a:srgbClr val="8B5CF6"/>
+              </a:gs>
+              <a:gs pos="1000">
+                <a:srgbClr val="D946EF"/>
+              </a:gs>
+            </a:gsLst>
+            <a:lin ang="6000000" scaled="0"/>
+          </a:gradFill>
+          <a:ln>
+            <a:noFill/>
+          </a:ln>
+          <a:effectLst/>
+        </p:spPr>
+        <p:style>
+          <a:lnRef idx="1">
+            <a:schemeClr val="accent1"/>
+          </a:lnRef>
+          <a:fillRef idx="3">
+            <a:schemeClr val="accent1"/>
+          </a:fillRef>
+          <a:effectRef idx="2">
+            <a:schemeClr val="accent1"/>
+          </a:effectRef>
+          <a:fontRef idx="minor">
+            <a:schemeClr val="lt1"/>
+          </a:fontRef>
+        </p:style>
+        <p:txBody>
+          <a:bodyPr rtlCol="0" anchor="ctr" wrap="square"/>
+          <a:lstStyle/>
+          <a:p>
+            <a:pPr algn="ctr"/>
+          </a:p>
+        </p:txBody>
+      </p:sp>
+      <p:sp>
+        <p:nvSpPr>
+          <p:cNvPr id="4" name="TextBox 3"/>
+          <p:cNvSpPr txBox="1"/>
+          <p:nvPr/>
+        </p:nvSpPr>
+        <p:spPr>
+          <a:xfrm>
+            <a:off x="566928" y="219456"/>
+            <a:ext cx="7863840" cy="868680"/>
+          </a:xfrm>
+          <a:prstGeom prst="rect">
+            <a:avLst/>
+          </a:prstGeom>
+          <a:noFill/>
+        </p:spPr>
+        <p:txBody>
+          <a:bodyPr wrap="square" anchor="t" lIns="0" tIns="0" rIns="0" bIns="0">
+            <a:spAutoFit/>
+          </a:bodyPr>
+          <a:lstStyle/>
+          <a:p>
+            <a:pPr algn="l">
+              <a:lnSpc>
+                <a:spcPct val="100000"/>
+              </a:lnSpc>
+            </a:pPr>
+            <a:r>
+              <a:rPr sz="3000" b="1">
+                <a:solidFill>
+                  <a:srgbClr val="FFFFFF"/>
+                </a:solidFill>
+                <a:latin typeface="Segoe UI"/>
+              </a:rPr>
+              <a:t>Process Coverage Map</a:t>
+            </a:r>
+          </a:p>
+          <a:p>
+            <a:pPr algn="l">
+              <a:lnSpc>
+                <a:spcPct val="100000"/>
+              </a:lnSpc>
+              <a:spcBef>
+                <a:spcPts val="300"/>
+              </a:spcBef>
+            </a:pPr>
+            <a:r>
+              <a:rPr sz="1400" b="0">
+                <a:solidFill>
+                  <a:srgbClr val="E4ECFF"/>
+                </a:solidFill>
+                <a:latin typeface="Segoe UI"/>
+              </a:rPr>
+              <a:t>OTC Derivatives — who automates each process, product by product</a:t>
+            </a:r>
+          </a:p>
+        </p:txBody>
+      </p:sp>
+      <p:sp>
+        <p:nvSpPr>
+          <p:cNvPr id="5" name="TextBox 4"/>
+          <p:cNvSpPr txBox="1"/>
+          <p:nvPr/>
+        </p:nvSpPr>
+        <p:spPr>
+          <a:xfrm>
+            <a:off x="6629400" y="512064"/>
+            <a:ext cx="4983480" cy="365760"/>
+          </a:xfrm>
+          <a:prstGeom prst="rect">
+            <a:avLst/>
+          </a:prstGeom>
+          <a:noFill/>
+        </p:spPr>
+        <p:txBody>
+          <a:bodyPr wrap="square" anchor="t" lIns="0" tIns="0" rIns="0" bIns="0">
+            <a:spAutoFit/>
+          </a:bodyPr>
+          <a:lstStyle/>
+          <a:p>
+            <a:pPr algn="r">
+              <a:lnSpc>
+                <a:spcPct val="100000"/>
+              </a:lnSpc>
+            </a:pPr>
+            <a:r>
+              <a:rPr sz="950" b="1">
+                <a:solidFill>
+                  <a:srgbClr val="EBF1FF"/>
+                </a:solidFill>
+                <a:latin typeface="Segoe UI"/>
+              </a:rPr>
+              <a:t>Onshore  ·  Offshore   ›   124 process points</a:t>
+            </a:r>
+          </a:p>
+        </p:txBody>
+      </p:sp>
+      <p:sp>
+        <p:nvSpPr>
+          <p:cNvPr id="6" name="Rounded Rectangle 5"/>
+          <p:cNvSpPr/>
+          <p:nvPr/>
+        </p:nvSpPr>
+        <p:spPr>
+          <a:xfrm>
+            <a:off x="566928" y="1481328"/>
+            <a:ext cx="11055096" cy="4315968"/>
+          </a:xfrm>
+          <a:prstGeom prst="roundRect">
+            <a:avLst>
+              <a:gd name="adj" fmla="val 3601"/>
+            </a:avLst>
+          </a:prstGeom>
+          <a:solidFill>
+            <a:srgbClr val="FFFFFF"/>
+          </a:solidFill>
+          <a:ln w="9525">
+            <a:solidFill>
+              <a:srgbClr val="E3E6EF"/>
+            </a:solidFill>
+          </a:ln>
+          <a:effectLst/>
+        </p:spPr>
+        <p:style>
+          <a:lnRef idx="1">
+            <a:schemeClr val="accent1"/>
+          </a:lnRef>
+          <a:fillRef idx="3">
+            <a:schemeClr val="accent1"/>
+          </a:fillRef>
+          <a:effectRef idx="2">
+            <a:schemeClr val="accent1"/>
+          </a:effectRef>
+          <a:fontRef idx="minor">
+            <a:schemeClr val="lt1"/>
+          </a:fontRef>
+        </p:style>
+        <p:txBody>
+          <a:bodyPr rtlCol="0" anchor="ctr" wrap="square"/>
+          <a:lstStyle/>
+          <a:p>
+            <a:pPr algn="ctr"/>
+          </a:p>
+        </p:txBody>
+      </p:sp>
+      <p:sp>
+        <p:nvSpPr>
+          <p:cNvPr id="7" name="TextBox 6"/>
+          <p:cNvSpPr txBox="1"/>
+          <p:nvPr/>
+        </p:nvSpPr>
+        <p:spPr>
+          <a:xfrm>
+            <a:off x="2450592" y="1572768"/>
+            <a:ext cx="4721191" cy="365760"/>
+          </a:xfrm>
+          <a:prstGeom prst="rect">
+            <a:avLst/>
+          </a:prstGeom>
+          <a:noFill/>
+        </p:spPr>
+        <p:txBody>
+          <a:bodyPr wrap="square" anchor="t" lIns="0" tIns="0" rIns="0" bIns="0">
+            <a:spAutoFit/>
+          </a:bodyPr>
+          <a:lstStyle/>
+          <a:p>
+            <a:pPr algn="ctr">
+              <a:lnSpc>
+                <a:spcPct val="100000"/>
+              </a:lnSpc>
+            </a:pPr>
+            <a:r>
+              <a:rPr sz="750" b="1">
+                <a:solidFill>
+                  <a:srgbClr val="545A72"/>
+                </a:solidFill>
+                <a:latin typeface="Segoe UI"/>
+              </a:rPr>
+              <a:t>ONSHORE</a:t>
+            </a:r>
+          </a:p>
+        </p:txBody>
+      </p:sp>
+      <p:sp>
+        <p:nvSpPr>
+          <p:cNvPr id="8" name="Rounded Rectangle 7"/>
+          <p:cNvSpPr/>
+          <p:nvPr/>
+        </p:nvSpPr>
+        <p:spPr>
+          <a:xfrm>
+            <a:off x="2487168" y="1737360"/>
+            <a:ext cx="4648039" cy="14630"/>
+          </a:xfrm>
+          <a:prstGeom prst="roundRect">
+            <a:avLst>
+              <a:gd name="adj" fmla="val 50000"/>
+            </a:avLst>
+          </a:prstGeom>
+          <a:solidFill>
+            <a:srgbClr val="0066CC"/>
+          </a:solidFill>
+          <a:ln>
+            <a:noFill/>
+          </a:ln>
+          <a:effectLst/>
+        </p:spPr>
+        <p:style>
+          <a:lnRef idx="1">
+            <a:schemeClr val="accent1"/>
+          </a:lnRef>
+          <a:fillRef idx="3">
+            <a:schemeClr val="accent1"/>
+          </a:fillRef>
+          <a:effectRef idx="2">
+            <a:schemeClr val="accent1"/>
+          </a:effectRef>
+          <a:fontRef idx="minor">
+            <a:schemeClr val="lt1"/>
+          </a:fontRef>
+        </p:style>
+        <p:txBody>
+          <a:bodyPr rtlCol="0" anchor="ctr" wrap="square"/>
+          <a:lstStyle/>
+          <a:p>
+            <a:pPr algn="ctr"/>
+          </a:p>
+        </p:txBody>
+      </p:sp>
+      <p:sp>
+        <p:nvSpPr>
+          <p:cNvPr id="9" name="TextBox 8"/>
+          <p:cNvSpPr txBox="1"/>
+          <p:nvPr/>
+        </p:nvSpPr>
+        <p:spPr>
+          <a:xfrm>
+            <a:off x="7171783" y="1572768"/>
+            <a:ext cx="4249072" cy="365760"/>
+          </a:xfrm>
+          <a:prstGeom prst="rect">
+            <a:avLst/>
+          </a:prstGeom>
+          <a:noFill/>
+        </p:spPr>
+        <p:txBody>
+          <a:bodyPr wrap="square" anchor="t" lIns="0" tIns="0" rIns="0" bIns="0">
+            <a:spAutoFit/>
+          </a:bodyPr>
+          <a:lstStyle/>
+          <a:p>
+            <a:pPr algn="ctr">
+              <a:lnSpc>
+                <a:spcPct val="100000"/>
+              </a:lnSpc>
+            </a:pPr>
+            <a:r>
+              <a:rPr sz="750" b="1">
+                <a:solidFill>
+                  <a:srgbClr val="545A72"/>
+                </a:solidFill>
+                <a:latin typeface="Segoe UI"/>
+              </a:rPr>
+              <a:t>OFFSHORE</a:t>
+            </a:r>
+          </a:p>
+        </p:txBody>
+      </p:sp>
+      <p:sp>
+        <p:nvSpPr>
+          <p:cNvPr id="10" name="Rounded Rectangle 9"/>
+          <p:cNvSpPr/>
+          <p:nvPr/>
+        </p:nvSpPr>
+        <p:spPr>
+          <a:xfrm>
+            <a:off x="7208359" y="1737360"/>
+            <a:ext cx="4175920" cy="14630"/>
+          </a:xfrm>
+          <a:prstGeom prst="roundRect">
+            <a:avLst>
+              <a:gd name="adj" fmla="val 50000"/>
+            </a:avLst>
+          </a:prstGeom>
+          <a:solidFill>
+            <a:srgbClr val="8B5CF6"/>
+          </a:solidFill>
+          <a:ln>
+            <a:noFill/>
+          </a:ln>
+          <a:effectLst/>
+        </p:spPr>
+        <p:style>
+          <a:lnRef idx="1">
+            <a:schemeClr val="accent1"/>
+          </a:lnRef>
+          <a:fillRef idx="3">
+            <a:schemeClr val="accent1"/>
+          </a:fillRef>
+          <a:effectRef idx="2">
+            <a:schemeClr val="accent1"/>
+          </a:effectRef>
+          <a:fontRef idx="minor">
+            <a:schemeClr val="lt1"/>
+          </a:fontRef>
+        </p:style>
+        <p:txBody>
+          <a:bodyPr rtlCol="0" anchor="ctr" wrap="square"/>
+          <a:lstStyle/>
+          <a:p>
+            <a:pPr algn="ctr"/>
+          </a:p>
+        </p:txBody>
+      </p:sp>
+      <p:sp>
+        <p:nvSpPr>
+          <p:cNvPr id="11" name="TextBox 10"/>
+          <p:cNvSpPr txBox="1"/>
+          <p:nvPr/>
+        </p:nvSpPr>
+        <p:spPr>
+          <a:xfrm>
+            <a:off x="2450592" y="1787652"/>
+            <a:ext cx="944238" cy="365760"/>
+          </a:xfrm>
+          <a:prstGeom prst="rect">
+            <a:avLst/>
+          </a:prstGeom>
+          <a:noFill/>
+        </p:spPr>
+        <p:txBody>
+          <a:bodyPr wrap="square" anchor="t" lIns="0" tIns="0" rIns="0" bIns="0">
+            <a:spAutoFit/>
+          </a:bodyPr>
+          <a:lstStyle/>
+          <a:p>
+            <a:pPr algn="ctr">
+              <a:lnSpc>
+                <a:spcPct val="100000"/>
+              </a:lnSpc>
+            </a:pPr>
+            <a:r>
+              <a:rPr sz="650" b="1">
+                <a:solidFill>
+                  <a:srgbClr val="0E112A"/>
+                </a:solidFill>
+                <a:latin typeface="Segoe UI"/>
+              </a:rPr>
+              <a:t>Swap</a:t>
+            </a:r>
+          </a:p>
+        </p:txBody>
+      </p:sp>
+      <p:sp>
+        <p:nvSpPr>
+          <p:cNvPr id="12" name="Rectangle 11"/>
+          <p:cNvSpPr/>
+          <p:nvPr/>
+        </p:nvSpPr>
+        <p:spPr>
+          <a:xfrm>
+            <a:off x="2496312" y="1938528"/>
+            <a:ext cx="852798" cy="9144"/>
+          </a:xfrm>
+          <a:prstGeom prst="rect">
+            <a:avLst/>
+          </a:prstGeom>
+          <a:solidFill>
+            <a:srgbClr val="D9DDE8"/>
+          </a:solidFill>
+          <a:ln>
+            <a:noFill/>
+          </a:ln>
+          <a:effectLst/>
+        </p:spPr>
+        <p:style>
+          <a:lnRef idx="1">
+            <a:schemeClr val="accent1"/>
+          </a:lnRef>
+          <a:fillRef idx="3">
+            <a:schemeClr val="accent1"/>
+          </a:fillRef>
+          <a:effectRef idx="2">
+            <a:schemeClr val="accent1"/>
+          </a:effectRef>
+          <a:fontRef idx="minor">
+            <a:schemeClr val="lt1"/>
+          </a:fontRef>
+        </p:style>
+        <p:txBody>
+          <a:bodyPr rtlCol="0" anchor="ctr" wrap="square"/>
+          <a:lstStyle/>
+          <a:p>
+            <a:pPr algn="ctr"/>
+          </a:p>
+        </p:txBody>
+      </p:sp>
+      <p:sp>
+        <p:nvSpPr>
+          <p:cNvPr id="13" name="TextBox 12"/>
+          <p:cNvSpPr txBox="1"/>
+          <p:nvPr/>
+        </p:nvSpPr>
+        <p:spPr>
+          <a:xfrm>
+            <a:off x="3394830" y="1787652"/>
+            <a:ext cx="1888476" cy="365760"/>
+          </a:xfrm>
+          <a:prstGeom prst="rect">
+            <a:avLst/>
+          </a:prstGeom>
+          <a:noFill/>
+        </p:spPr>
+        <p:txBody>
+          <a:bodyPr wrap="square" anchor="t" lIns="0" tIns="0" rIns="0" bIns="0">
+            <a:spAutoFit/>
+          </a:bodyPr>
+          <a:lstStyle/>
+          <a:p>
+            <a:pPr algn="ctr">
+              <a:lnSpc>
+                <a:spcPct val="100000"/>
+              </a:lnSpc>
+            </a:pPr>
+            <a:r>
+              <a:rPr sz="650" b="1">
+                <a:solidFill>
+                  <a:srgbClr val="0E112A"/>
+                </a:solidFill>
+                <a:latin typeface="Segoe UI"/>
+              </a:rPr>
+              <a:t>NDF</a:t>
+            </a:r>
+          </a:p>
+        </p:txBody>
+      </p:sp>
+      <p:sp>
+        <p:nvSpPr>
+          <p:cNvPr id="14" name="Rectangle 13"/>
+          <p:cNvSpPr/>
+          <p:nvPr/>
+        </p:nvSpPr>
+        <p:spPr>
+          <a:xfrm>
+            <a:off x="3440550" y="1938528"/>
+            <a:ext cx="1797036" cy="9144"/>
+          </a:xfrm>
+          <a:prstGeom prst="rect">
+            <a:avLst/>
+          </a:prstGeom>
+          <a:solidFill>
+            <a:srgbClr val="D9DDE8"/>
+          </a:solidFill>
+          <a:ln>
+            <a:noFill/>
+          </a:ln>
+          <a:effectLst/>
+        </p:spPr>
+        <p:style>
+          <a:lnRef idx="1">
+            <a:schemeClr val="accent1"/>
+          </a:lnRef>
+          <a:fillRef idx="3">
+            <a:schemeClr val="accent1"/>
+          </a:fillRef>
+          <a:effectRef idx="2">
+            <a:schemeClr val="accent1"/>
+          </a:effectRef>
+          <a:fontRef idx="minor">
+            <a:schemeClr val="lt1"/>
+          </a:fontRef>
+        </p:style>
+        <p:txBody>
+          <a:bodyPr rtlCol="0" anchor="ctr" wrap="square"/>
+          <a:lstStyle/>
+          <a:p>
+            <a:pPr algn="ctr"/>
+          </a:p>
+        </p:txBody>
+      </p:sp>
+      <p:sp>
+        <p:nvSpPr>
+          <p:cNvPr id="15" name="TextBox 14"/>
+          <p:cNvSpPr txBox="1"/>
+          <p:nvPr/>
+        </p:nvSpPr>
+        <p:spPr>
+          <a:xfrm>
+            <a:off x="5283306" y="1787652"/>
+            <a:ext cx="1416357" cy="365760"/>
+          </a:xfrm>
+          <a:prstGeom prst="rect">
+            <a:avLst/>
+          </a:prstGeom>
+          <a:noFill/>
+        </p:spPr>
+        <p:txBody>
+          <a:bodyPr wrap="square" anchor="t" lIns="0" tIns="0" rIns="0" bIns="0">
+            <a:spAutoFit/>
+          </a:bodyPr>
+          <a:lstStyle/>
+          <a:p>
+            <a:pPr algn="ctr">
+              <a:lnSpc>
+                <a:spcPct val="100000"/>
+              </a:lnSpc>
+            </a:pPr>
+            <a:r>
+              <a:rPr sz="650" b="1">
+                <a:solidFill>
+                  <a:srgbClr val="0E112A"/>
+                </a:solidFill>
+                <a:latin typeface="Segoe UI"/>
+              </a:rPr>
+              <a:t>Opção</a:t>
+            </a:r>
+          </a:p>
+        </p:txBody>
+      </p:sp>
+      <p:sp>
+        <p:nvSpPr>
+          <p:cNvPr id="16" name="Rectangle 15"/>
+          <p:cNvSpPr/>
+          <p:nvPr/>
+        </p:nvSpPr>
+        <p:spPr>
+          <a:xfrm>
+            <a:off x="5329026" y="1938528"/>
+            <a:ext cx="1324917" cy="9144"/>
+          </a:xfrm>
+          <a:prstGeom prst="rect">
+            <a:avLst/>
+          </a:prstGeom>
+          <a:solidFill>
+            <a:srgbClr val="D9DDE8"/>
+          </a:solidFill>
+          <a:ln>
+            <a:noFill/>
+          </a:ln>
+          <a:effectLst/>
+        </p:spPr>
+        <p:style>
+          <a:lnRef idx="1">
+            <a:schemeClr val="accent1"/>
+          </a:lnRef>
+          <a:fillRef idx="3">
+            <a:schemeClr val="accent1"/>
+          </a:fillRef>
+          <a:effectRef idx="2">
+            <a:schemeClr val="accent1"/>
+          </a:effectRef>
+          <a:fontRef idx="minor">
+            <a:schemeClr val="lt1"/>
+          </a:fontRef>
+        </p:style>
+        <p:txBody>
+          <a:bodyPr rtlCol="0" anchor="ctr" wrap="square"/>
+          <a:lstStyle/>
+          <a:p>
+            <a:pPr algn="ctr"/>
+          </a:p>
+        </p:txBody>
+      </p:sp>
+      <p:sp>
+        <p:nvSpPr>
+          <p:cNvPr id="17" name="TextBox 16"/>
+          <p:cNvSpPr txBox="1"/>
+          <p:nvPr/>
+        </p:nvSpPr>
+        <p:spPr>
+          <a:xfrm>
+            <a:off x="6699664" y="1787652"/>
+            <a:ext cx="472119" cy="365760"/>
+          </a:xfrm>
+          <a:prstGeom prst="rect">
+            <a:avLst/>
+          </a:prstGeom>
+          <a:noFill/>
+        </p:spPr>
+        <p:txBody>
+          <a:bodyPr wrap="square" anchor="t" lIns="0" tIns="0" rIns="0" bIns="0">
+            <a:spAutoFit/>
+          </a:bodyPr>
+          <a:lstStyle/>
+          <a:p>
+            <a:pPr algn="ctr">
+              <a:lnSpc>
+                <a:spcPct val="100000"/>
+              </a:lnSpc>
+            </a:pPr>
+            <a:r>
+              <a:rPr sz="650" b="1">
+                <a:solidFill>
+                  <a:srgbClr val="0E112A"/>
+                </a:solidFill>
+                <a:latin typeface="Segoe UI"/>
+              </a:rPr>
+              <a:t>Others</a:t>
+            </a:r>
+          </a:p>
+        </p:txBody>
+      </p:sp>
+      <p:sp>
+        <p:nvSpPr>
+          <p:cNvPr id="18" name="Rectangle 17"/>
+          <p:cNvSpPr/>
+          <p:nvPr/>
+        </p:nvSpPr>
+        <p:spPr>
+          <a:xfrm>
+            <a:off x="6745384" y="1938528"/>
+            <a:ext cx="380679" cy="9144"/>
+          </a:xfrm>
+          <a:prstGeom prst="rect">
+            <a:avLst/>
+          </a:prstGeom>
+          <a:solidFill>
+            <a:srgbClr val="D9DDE8"/>
+          </a:solidFill>
+          <a:ln>
+            <a:noFill/>
+          </a:ln>
+          <a:effectLst/>
+        </p:spPr>
+        <p:style>
+          <a:lnRef idx="1">
+            <a:schemeClr val="accent1"/>
+          </a:lnRef>
+          <a:fillRef idx="3">
+            <a:schemeClr val="accent1"/>
+          </a:fillRef>
+          <a:effectRef idx="2">
+            <a:schemeClr val="accent1"/>
+          </a:effectRef>
+          <a:fontRef idx="minor">
+            <a:schemeClr val="lt1"/>
+          </a:fontRef>
+        </p:style>
+        <p:txBody>
+          <a:bodyPr rtlCol="0" anchor="ctr" wrap="square"/>
+          <a:lstStyle/>
+          <a:p>
+            <a:pPr algn="ctr"/>
+          </a:p>
+        </p:txBody>
+      </p:sp>
+      <p:sp>
+        <p:nvSpPr>
+          <p:cNvPr id="19" name="TextBox 18"/>
+          <p:cNvSpPr txBox="1"/>
+          <p:nvPr/>
+        </p:nvSpPr>
+        <p:spPr>
+          <a:xfrm>
+            <a:off x="7171783" y="1787652"/>
+            <a:ext cx="944238" cy="365760"/>
+          </a:xfrm>
+          <a:prstGeom prst="rect">
+            <a:avLst/>
+          </a:prstGeom>
+          <a:noFill/>
+        </p:spPr>
+        <p:txBody>
+          <a:bodyPr wrap="square" anchor="t" lIns="0" tIns="0" rIns="0" bIns="0">
+            <a:spAutoFit/>
+          </a:bodyPr>
+          <a:lstStyle/>
+          <a:p>
+            <a:pPr algn="ctr">
+              <a:lnSpc>
+                <a:spcPct val="100000"/>
+              </a:lnSpc>
+            </a:pPr>
+            <a:r>
+              <a:rPr sz="650" b="1">
+                <a:solidFill>
+                  <a:srgbClr val="0E112A"/>
+                </a:solidFill>
+                <a:latin typeface="Segoe UI"/>
+              </a:rPr>
+              <a:t>Swap</a:t>
+            </a:r>
+          </a:p>
+        </p:txBody>
+      </p:sp>
+      <p:sp>
+        <p:nvSpPr>
+          <p:cNvPr id="20" name="Rectangle 19"/>
+          <p:cNvSpPr/>
+          <p:nvPr/>
+        </p:nvSpPr>
+        <p:spPr>
+          <a:xfrm>
+            <a:off x="7217503" y="1938528"/>
+            <a:ext cx="852798" cy="9144"/>
+          </a:xfrm>
+          <a:prstGeom prst="rect">
+            <a:avLst/>
+          </a:prstGeom>
+          <a:solidFill>
+            <a:srgbClr val="D9DDE8"/>
+          </a:solidFill>
+          <a:ln>
+            <a:noFill/>
+          </a:ln>
+          <a:effectLst/>
+        </p:spPr>
+        <p:style>
+          <a:lnRef idx="1">
+            <a:schemeClr val="accent1"/>
+          </a:lnRef>
+          <a:fillRef idx="3">
+            <a:schemeClr val="accent1"/>
+          </a:fillRef>
+          <a:effectRef idx="2">
+            <a:schemeClr val="accent1"/>
+          </a:effectRef>
+          <a:fontRef idx="minor">
+            <a:schemeClr val="lt1"/>
+          </a:fontRef>
+        </p:style>
+        <p:txBody>
+          <a:bodyPr rtlCol="0" anchor="ctr" wrap="square"/>
+          <a:lstStyle/>
+          <a:p>
+            <a:pPr algn="ctr"/>
+          </a:p>
+        </p:txBody>
+      </p:sp>
+      <p:sp>
+        <p:nvSpPr>
+          <p:cNvPr id="21" name="TextBox 20"/>
+          <p:cNvSpPr txBox="1"/>
+          <p:nvPr/>
+        </p:nvSpPr>
+        <p:spPr>
+          <a:xfrm>
+            <a:off x="8116021" y="1787652"/>
+            <a:ext cx="1888476" cy="365760"/>
+          </a:xfrm>
+          <a:prstGeom prst="rect">
+            <a:avLst/>
+          </a:prstGeom>
+          <a:noFill/>
+        </p:spPr>
+        <p:txBody>
+          <a:bodyPr wrap="square" anchor="t" lIns="0" tIns="0" rIns="0" bIns="0">
+            <a:spAutoFit/>
+          </a:bodyPr>
+          <a:lstStyle/>
+          <a:p>
+            <a:pPr algn="ctr">
+              <a:lnSpc>
+                <a:spcPct val="100000"/>
+              </a:lnSpc>
+            </a:pPr>
+            <a:r>
+              <a:rPr sz="650" b="1">
+                <a:solidFill>
+                  <a:srgbClr val="0E112A"/>
+                </a:solidFill>
+                <a:latin typeface="Segoe UI"/>
+              </a:rPr>
+              <a:t>FXCash</a:t>
+            </a:r>
+          </a:p>
+        </p:txBody>
+      </p:sp>
+      <p:sp>
+        <p:nvSpPr>
+          <p:cNvPr id="22" name="Rectangle 21"/>
+          <p:cNvSpPr/>
+          <p:nvPr/>
+        </p:nvSpPr>
+        <p:spPr>
+          <a:xfrm>
+            <a:off x="8161741" y="1938528"/>
+            <a:ext cx="1797036" cy="9144"/>
+          </a:xfrm>
+          <a:prstGeom prst="rect">
+            <a:avLst/>
+          </a:prstGeom>
+          <a:solidFill>
+            <a:srgbClr val="D9DDE8"/>
+          </a:solidFill>
+          <a:ln>
+            <a:noFill/>
+          </a:ln>
+          <a:effectLst/>
+        </p:spPr>
+        <p:style>
+          <a:lnRef idx="1">
+            <a:schemeClr val="accent1"/>
+          </a:lnRef>
+          <a:fillRef idx="3">
+            <a:schemeClr val="accent1"/>
+          </a:fillRef>
+          <a:effectRef idx="2">
+            <a:schemeClr val="accent1"/>
+          </a:effectRef>
+          <a:fontRef idx="minor">
+            <a:schemeClr val="lt1"/>
+          </a:fontRef>
+        </p:style>
+        <p:txBody>
+          <a:bodyPr rtlCol="0" anchor="ctr" wrap="square"/>
+          <a:lstStyle/>
+          <a:p>
+            <a:pPr algn="ctr"/>
+          </a:p>
+        </p:txBody>
+      </p:sp>
+      <p:sp>
+        <p:nvSpPr>
+          <p:cNvPr id="23" name="TextBox 22"/>
+          <p:cNvSpPr txBox="1"/>
+          <p:nvPr/>
+        </p:nvSpPr>
+        <p:spPr>
+          <a:xfrm>
+            <a:off x="10004498" y="1787652"/>
+            <a:ext cx="1416357" cy="365760"/>
+          </a:xfrm>
+          <a:prstGeom prst="rect">
+            <a:avLst/>
+          </a:prstGeom>
+          <a:noFill/>
+        </p:spPr>
+        <p:txBody>
+          <a:bodyPr wrap="square" anchor="t" lIns="0" tIns="0" rIns="0" bIns="0">
+            <a:spAutoFit/>
+          </a:bodyPr>
+          <a:lstStyle/>
+          <a:p>
+            <a:pPr algn="ctr">
+              <a:lnSpc>
+                <a:spcPct val="100000"/>
+              </a:lnSpc>
+            </a:pPr>
+            <a:r>
+              <a:rPr sz="650" b="1">
+                <a:solidFill>
+                  <a:srgbClr val="0E112A"/>
+                </a:solidFill>
+                <a:latin typeface="Segoe UI"/>
+              </a:rPr>
+              <a:t>Opção</a:t>
+            </a:r>
+          </a:p>
+        </p:txBody>
+      </p:sp>
+      <p:sp>
+        <p:nvSpPr>
+          <p:cNvPr id="24" name="Rectangle 23"/>
+          <p:cNvSpPr/>
+          <p:nvPr/>
+        </p:nvSpPr>
+        <p:spPr>
+          <a:xfrm>
+            <a:off x="10050218" y="1938528"/>
+            <a:ext cx="1324917" cy="9144"/>
+          </a:xfrm>
+          <a:prstGeom prst="rect">
+            <a:avLst/>
+          </a:prstGeom>
+          <a:solidFill>
+            <a:srgbClr val="D9DDE8"/>
+          </a:solidFill>
+          <a:ln>
+            <a:noFill/>
+          </a:ln>
+          <a:effectLst/>
+        </p:spPr>
+        <p:style>
+          <a:lnRef idx="1">
+            <a:schemeClr val="accent1"/>
+          </a:lnRef>
+          <a:fillRef idx="3">
+            <a:schemeClr val="accent1"/>
+          </a:fillRef>
+          <a:effectRef idx="2">
+            <a:schemeClr val="accent1"/>
+          </a:effectRef>
+          <a:fontRef idx="minor">
+            <a:schemeClr val="lt1"/>
+          </a:fontRef>
+        </p:style>
+        <p:txBody>
+          <a:bodyPr rtlCol="0" anchor="ctr" wrap="square"/>
+          <a:lstStyle/>
+          <a:p>
+            <a:pPr algn="ctr"/>
+          </a:p>
+        </p:txBody>
+      </p:sp>
+      <p:sp>
+        <p:nvSpPr>
+          <p:cNvPr id="25" name="TextBox 24"/>
+          <p:cNvSpPr txBox="1"/>
+          <p:nvPr/>
+        </p:nvSpPr>
+        <p:spPr>
+          <a:xfrm>
+            <a:off x="2450592" y="1979676"/>
+            <a:ext cx="472119" cy="365760"/>
+          </a:xfrm>
+          <a:prstGeom prst="rect">
+            <a:avLst/>
+          </a:prstGeom>
+          <a:noFill/>
+        </p:spPr>
+        <p:txBody>
+          <a:bodyPr wrap="square" anchor="t" lIns="0" tIns="0" rIns="0" bIns="0">
+            <a:spAutoFit/>
+          </a:bodyPr>
+          <a:lstStyle/>
+          <a:p>
+            <a:pPr algn="ctr">
+              <a:lnSpc>
+                <a:spcPct val="95000"/>
+              </a:lnSpc>
+            </a:pPr>
+            <a:r>
+              <a:rPr sz="600" b="0">
+                <a:solidFill>
+                  <a:srgbClr val="545A72"/>
+                </a:solidFill>
+                <a:latin typeface="Segoe UI"/>
+              </a:rPr>
+              <a:t>EDG</a:t>
+            </a:r>
+          </a:p>
+        </p:txBody>
+      </p:sp>
+      <p:sp>
+        <p:nvSpPr>
+          <p:cNvPr id="26" name="TextBox 25"/>
+          <p:cNvSpPr txBox="1"/>
+          <p:nvPr/>
+        </p:nvSpPr>
+        <p:spPr>
+          <a:xfrm>
+            <a:off x="2922711" y="1979676"/>
+            <a:ext cx="472119" cy="365760"/>
+          </a:xfrm>
+          <a:prstGeom prst="rect">
+            <a:avLst/>
+          </a:prstGeom>
+          <a:noFill/>
+        </p:spPr>
+        <p:txBody>
+          <a:bodyPr wrap="square" anchor="t" lIns="0" tIns="0" rIns="0" bIns="0">
+            <a:spAutoFit/>
+          </a:bodyPr>
+          <a:lstStyle/>
+          <a:p>
+            <a:pPr algn="ctr">
+              <a:lnSpc>
+                <a:spcPct val="95000"/>
+              </a:lnSpc>
+            </a:pPr>
+            <a:r>
+              <a:rPr sz="600" b="0">
+                <a:solidFill>
+                  <a:srgbClr val="545A72"/>
+                </a:solidFill>
+                <a:latin typeface="Segoe UI"/>
+              </a:rPr>
+              <a:t>CEM</a:t>
+            </a:r>
+          </a:p>
+        </p:txBody>
+      </p:sp>
+      <p:sp>
+        <p:nvSpPr>
+          <p:cNvPr id="27" name="TextBox 26"/>
+          <p:cNvSpPr txBox="1"/>
+          <p:nvPr/>
+        </p:nvSpPr>
+        <p:spPr>
+          <a:xfrm>
+            <a:off x="3394830" y="1979676"/>
+            <a:ext cx="472119" cy="365760"/>
+          </a:xfrm>
+          <a:prstGeom prst="rect">
+            <a:avLst/>
+          </a:prstGeom>
+          <a:noFill/>
+        </p:spPr>
+        <p:txBody>
+          <a:bodyPr wrap="square" anchor="t" lIns="0" tIns="0" rIns="0" bIns="0">
+            <a:spAutoFit/>
+          </a:bodyPr>
+          <a:lstStyle/>
+          <a:p>
+            <a:pPr algn="ctr">
+              <a:lnSpc>
+                <a:spcPct val="95000"/>
+              </a:lnSpc>
+            </a:pPr>
+            <a:r>
+              <a:rPr sz="600" b="0">
+                <a:solidFill>
+                  <a:srgbClr val="545A72"/>
+                </a:solidFill>
+                <a:latin typeface="Segoe UI"/>
+              </a:rPr>
+              <a:t>Vanilla</a:t>
+            </a:r>
+          </a:p>
+        </p:txBody>
+      </p:sp>
+      <p:sp>
+        <p:nvSpPr>
+          <p:cNvPr id="28" name="TextBox 27"/>
+          <p:cNvSpPr txBox="1"/>
+          <p:nvPr/>
+        </p:nvSpPr>
+        <p:spPr>
+          <a:xfrm>
+            <a:off x="3866949" y="1979676"/>
+            <a:ext cx="472119" cy="365760"/>
+          </a:xfrm>
+          <a:prstGeom prst="rect">
+            <a:avLst/>
+          </a:prstGeom>
+          <a:noFill/>
+        </p:spPr>
+        <p:txBody>
+          <a:bodyPr wrap="square" anchor="t" lIns="0" tIns="0" rIns="0" bIns="0">
+            <a:spAutoFit/>
+          </a:bodyPr>
+          <a:lstStyle/>
+          <a:p>
+            <a:pPr algn="ctr">
+              <a:lnSpc>
+                <a:spcPct val="95000"/>
+              </a:lnSpc>
+            </a:pPr>
+            <a:r>
+              <a:rPr sz="600" b="0">
+                <a:solidFill>
+                  <a:srgbClr val="545A72"/>
+                </a:solidFill>
+                <a:latin typeface="Segoe UI"/>
+              </a:rPr>
+              <a:t>FWD Start</a:t>
+            </a:r>
+          </a:p>
+        </p:txBody>
+      </p:sp>
+      <p:sp>
+        <p:nvSpPr>
+          <p:cNvPr id="29" name="TextBox 28"/>
+          <p:cNvSpPr txBox="1"/>
+          <p:nvPr/>
+        </p:nvSpPr>
+        <p:spPr>
+          <a:xfrm>
+            <a:off x="4339068" y="1979676"/>
+            <a:ext cx="472119" cy="365760"/>
+          </a:xfrm>
+          <a:prstGeom prst="rect">
+            <a:avLst/>
+          </a:prstGeom>
+          <a:noFill/>
+        </p:spPr>
+        <p:txBody>
+          <a:bodyPr wrap="square" anchor="t" lIns="0" tIns="0" rIns="0" bIns="0">
+            <a:spAutoFit/>
+          </a:bodyPr>
+          <a:lstStyle/>
+          <a:p>
+            <a:pPr algn="ctr">
+              <a:lnSpc>
+                <a:spcPct val="95000"/>
+              </a:lnSpc>
+            </a:pPr>
+            <a:r>
+              <a:rPr sz="600" b="0">
+                <a:solidFill>
+                  <a:srgbClr val="545A72"/>
+                </a:solidFill>
+                <a:latin typeface="Segoe UI"/>
+              </a:rPr>
+              <a:t>Other Publisher</a:t>
+            </a:r>
+          </a:p>
+        </p:txBody>
+      </p:sp>
+      <p:sp>
+        <p:nvSpPr>
+          <p:cNvPr id="30" name="TextBox 29"/>
+          <p:cNvSpPr txBox="1"/>
+          <p:nvPr/>
+        </p:nvSpPr>
+        <p:spPr>
+          <a:xfrm>
+            <a:off x="4811187" y="1979676"/>
+            <a:ext cx="472119" cy="365760"/>
+          </a:xfrm>
+          <a:prstGeom prst="rect">
+            <a:avLst/>
+          </a:prstGeom>
+          <a:noFill/>
+        </p:spPr>
+        <p:txBody>
+          <a:bodyPr wrap="square" anchor="t" lIns="0" tIns="0" rIns="0" bIns="0">
+            <a:spAutoFit/>
+          </a:bodyPr>
+          <a:lstStyle/>
+          <a:p>
+            <a:pPr algn="ctr">
+              <a:lnSpc>
+                <a:spcPct val="95000"/>
+              </a:lnSpc>
+            </a:pPr>
+            <a:r>
+              <a:rPr sz="600" b="0">
+                <a:solidFill>
+                  <a:srgbClr val="545A72"/>
+                </a:solidFill>
+                <a:latin typeface="Segoe UI"/>
+              </a:rPr>
+              <a:t>Commodities</a:t>
+            </a:r>
+          </a:p>
+        </p:txBody>
+      </p:sp>
+      <p:sp>
+        <p:nvSpPr>
+          <p:cNvPr id="31" name="TextBox 30"/>
+          <p:cNvSpPr txBox="1"/>
+          <p:nvPr/>
+        </p:nvSpPr>
+        <p:spPr>
+          <a:xfrm>
+            <a:off x="5283306" y="1979676"/>
+            <a:ext cx="472119" cy="365760"/>
+          </a:xfrm>
+          <a:prstGeom prst="rect">
+            <a:avLst/>
+          </a:prstGeom>
+          <a:noFill/>
+        </p:spPr>
+        <p:txBody>
+          <a:bodyPr wrap="square" anchor="t" lIns="0" tIns="0" rIns="0" bIns="0">
+            <a:spAutoFit/>
+          </a:bodyPr>
+          <a:lstStyle/>
+          <a:p>
+            <a:pPr algn="ctr">
+              <a:lnSpc>
+                <a:spcPct val="95000"/>
+              </a:lnSpc>
+            </a:pPr>
+            <a:r>
+              <a:rPr sz="600" b="0">
+                <a:solidFill>
+                  <a:srgbClr val="545A72"/>
+                </a:solidFill>
+                <a:latin typeface="Segoe UI"/>
+              </a:rPr>
+              <a:t>EDG</a:t>
+            </a:r>
+          </a:p>
+        </p:txBody>
+      </p:sp>
+      <p:sp>
+        <p:nvSpPr>
+          <p:cNvPr id="32" name="TextBox 31"/>
+          <p:cNvSpPr txBox="1"/>
+          <p:nvPr/>
+        </p:nvSpPr>
+        <p:spPr>
+          <a:xfrm>
+            <a:off x="5755426" y="1979676"/>
+            <a:ext cx="472119" cy="365760"/>
+          </a:xfrm>
+          <a:prstGeom prst="rect">
+            <a:avLst/>
+          </a:prstGeom>
+          <a:noFill/>
+        </p:spPr>
+        <p:txBody>
+          <a:bodyPr wrap="square" anchor="t" lIns="0" tIns="0" rIns="0" bIns="0">
+            <a:spAutoFit/>
+          </a:bodyPr>
+          <a:lstStyle/>
+          <a:p>
+            <a:pPr algn="ctr">
+              <a:lnSpc>
+                <a:spcPct val="95000"/>
+              </a:lnSpc>
+            </a:pPr>
+            <a:r>
+              <a:rPr sz="600" b="0">
+                <a:solidFill>
+                  <a:srgbClr val="545A72"/>
+                </a:solidFill>
+                <a:latin typeface="Segoe UI"/>
+              </a:rPr>
+              <a:t>CEM</a:t>
+            </a:r>
+          </a:p>
+        </p:txBody>
+      </p:sp>
+      <p:sp>
+        <p:nvSpPr>
+          <p:cNvPr id="33" name="TextBox 32"/>
+          <p:cNvSpPr txBox="1"/>
+          <p:nvPr/>
+        </p:nvSpPr>
+        <p:spPr>
+          <a:xfrm>
+            <a:off x="6227545" y="1979676"/>
+            <a:ext cx="472119" cy="365760"/>
+          </a:xfrm>
+          <a:prstGeom prst="rect">
+            <a:avLst/>
+          </a:prstGeom>
+          <a:noFill/>
+        </p:spPr>
+        <p:txBody>
+          <a:bodyPr wrap="square" anchor="t" lIns="0" tIns="0" rIns="0" bIns="0">
+            <a:spAutoFit/>
+          </a:bodyPr>
+          <a:lstStyle/>
+          <a:p>
+            <a:pPr algn="ctr">
+              <a:lnSpc>
+                <a:spcPct val="95000"/>
+              </a:lnSpc>
+            </a:pPr>
+            <a:r>
+              <a:rPr sz="600" b="0">
+                <a:solidFill>
+                  <a:srgbClr val="545A72"/>
+                </a:solidFill>
+                <a:latin typeface="Segoe UI"/>
+              </a:rPr>
+              <a:t>Commodities</a:t>
+            </a:r>
+          </a:p>
+        </p:txBody>
+      </p:sp>
+      <p:sp>
+        <p:nvSpPr>
+          <p:cNvPr id="34" name="TextBox 33"/>
+          <p:cNvSpPr txBox="1"/>
+          <p:nvPr/>
+        </p:nvSpPr>
+        <p:spPr>
+          <a:xfrm>
+            <a:off x="7171783" y="1979676"/>
+            <a:ext cx="472119" cy="365760"/>
+          </a:xfrm>
+          <a:prstGeom prst="rect">
+            <a:avLst/>
+          </a:prstGeom>
+          <a:noFill/>
+        </p:spPr>
+        <p:txBody>
+          <a:bodyPr wrap="square" anchor="t" lIns="0" tIns="0" rIns="0" bIns="0">
+            <a:spAutoFit/>
+          </a:bodyPr>
+          <a:lstStyle/>
+          <a:p>
+            <a:pPr algn="ctr">
+              <a:lnSpc>
+                <a:spcPct val="95000"/>
+              </a:lnSpc>
+            </a:pPr>
+            <a:r>
+              <a:rPr sz="600" b="0">
+                <a:solidFill>
+                  <a:srgbClr val="545A72"/>
+                </a:solidFill>
+                <a:latin typeface="Segoe UI"/>
+              </a:rPr>
+              <a:t>EDG</a:t>
+            </a:r>
+          </a:p>
+        </p:txBody>
+      </p:sp>
+      <p:sp>
+        <p:nvSpPr>
+          <p:cNvPr id="35" name="TextBox 34"/>
+          <p:cNvSpPr txBox="1"/>
+          <p:nvPr/>
+        </p:nvSpPr>
+        <p:spPr>
+          <a:xfrm>
+            <a:off x="7643902" y="1979676"/>
+            <a:ext cx="472119" cy="365760"/>
+          </a:xfrm>
+          <a:prstGeom prst="rect">
+            <a:avLst/>
+          </a:prstGeom>
+          <a:noFill/>
+        </p:spPr>
+        <p:txBody>
+          <a:bodyPr wrap="square" anchor="t" lIns="0" tIns="0" rIns="0" bIns="0">
+            <a:spAutoFit/>
+          </a:bodyPr>
+          <a:lstStyle/>
+          <a:p>
+            <a:pPr algn="ctr">
+              <a:lnSpc>
+                <a:spcPct val="95000"/>
+              </a:lnSpc>
+            </a:pPr>
+            <a:r>
+              <a:rPr sz="600" b="0">
+                <a:solidFill>
+                  <a:srgbClr val="545A72"/>
+                </a:solidFill>
+                <a:latin typeface="Segoe UI"/>
+              </a:rPr>
+              <a:t>CEM</a:t>
+            </a:r>
+          </a:p>
+        </p:txBody>
+      </p:sp>
+      <p:sp>
+        <p:nvSpPr>
+          <p:cNvPr id="36" name="TextBox 35"/>
+          <p:cNvSpPr txBox="1"/>
+          <p:nvPr/>
+        </p:nvSpPr>
+        <p:spPr>
+          <a:xfrm>
+            <a:off x="8116021" y="1979676"/>
+            <a:ext cx="472119" cy="365760"/>
+          </a:xfrm>
+          <a:prstGeom prst="rect">
+            <a:avLst/>
+          </a:prstGeom>
+          <a:noFill/>
+        </p:spPr>
+        <p:txBody>
+          <a:bodyPr wrap="square" anchor="t" lIns="0" tIns="0" rIns="0" bIns="0">
+            <a:spAutoFit/>
+          </a:bodyPr>
+          <a:lstStyle/>
+          <a:p>
+            <a:pPr algn="ctr">
+              <a:lnSpc>
+                <a:spcPct val="95000"/>
+              </a:lnSpc>
+            </a:pPr>
+            <a:r>
+              <a:rPr sz="600" b="0">
+                <a:solidFill>
+                  <a:srgbClr val="545A72"/>
+                </a:solidFill>
+                <a:latin typeface="Segoe UI"/>
+              </a:rPr>
+              <a:t>NDF</a:t>
+            </a:r>
+          </a:p>
+        </p:txBody>
+      </p:sp>
+      <p:sp>
+        <p:nvSpPr>
+          <p:cNvPr id="37" name="TextBox 36"/>
+          <p:cNvSpPr txBox="1"/>
+          <p:nvPr/>
+        </p:nvSpPr>
+        <p:spPr>
+          <a:xfrm>
+            <a:off x="8588141" y="1979676"/>
+            <a:ext cx="472119" cy="365760"/>
+          </a:xfrm>
+          <a:prstGeom prst="rect">
+            <a:avLst/>
+          </a:prstGeom>
+          <a:noFill/>
+        </p:spPr>
+        <p:txBody>
+          <a:bodyPr wrap="square" anchor="t" lIns="0" tIns="0" rIns="0" bIns="0">
+            <a:spAutoFit/>
+          </a:bodyPr>
+          <a:lstStyle/>
+          <a:p>
+            <a:pPr algn="ctr">
+              <a:lnSpc>
+                <a:spcPct val="95000"/>
+              </a:lnSpc>
+            </a:pPr>
+            <a:r>
+              <a:rPr sz="600" b="0">
+                <a:solidFill>
+                  <a:srgbClr val="545A72"/>
+                </a:solidFill>
+                <a:latin typeface="Segoe UI"/>
+              </a:rPr>
+              <a:t>DFW</a:t>
+            </a:r>
+          </a:p>
+        </p:txBody>
+      </p:sp>
+      <p:sp>
+        <p:nvSpPr>
+          <p:cNvPr id="38" name="TextBox 37"/>
+          <p:cNvSpPr txBox="1"/>
+          <p:nvPr/>
+        </p:nvSpPr>
+        <p:spPr>
+          <a:xfrm>
+            <a:off x="9060260" y="1979676"/>
+            <a:ext cx="472119" cy="365760"/>
+          </a:xfrm>
+          <a:prstGeom prst="rect">
+            <a:avLst/>
+          </a:prstGeom>
+          <a:noFill/>
+        </p:spPr>
+        <p:txBody>
+          <a:bodyPr wrap="square" anchor="t" lIns="0" tIns="0" rIns="0" bIns="0">
+            <a:spAutoFit/>
+          </a:bodyPr>
+          <a:lstStyle/>
+          <a:p>
+            <a:pPr algn="ctr">
+              <a:lnSpc>
+                <a:spcPct val="95000"/>
+              </a:lnSpc>
+            </a:pPr>
+            <a:r>
+              <a:rPr sz="600" b="0">
+                <a:solidFill>
+                  <a:srgbClr val="545A72"/>
+                </a:solidFill>
+                <a:latin typeface="Segoe UI"/>
+              </a:rPr>
+              <a:t>FX Swap</a:t>
+            </a:r>
+          </a:p>
+        </p:txBody>
+      </p:sp>
+      <p:sp>
+        <p:nvSpPr>
+          <p:cNvPr id="39" name="TextBox 38"/>
+          <p:cNvSpPr txBox="1"/>
+          <p:nvPr/>
+        </p:nvSpPr>
+        <p:spPr>
+          <a:xfrm>
+            <a:off x="9532379" y="1979676"/>
+            <a:ext cx="472119" cy="365760"/>
+          </a:xfrm>
+          <a:prstGeom prst="rect">
+            <a:avLst/>
+          </a:prstGeom>
+          <a:noFill/>
+        </p:spPr>
+        <p:txBody>
+          <a:bodyPr wrap="square" anchor="t" lIns="0" tIns="0" rIns="0" bIns="0">
+            <a:spAutoFit/>
+          </a:bodyPr>
+          <a:lstStyle/>
+          <a:p>
+            <a:pPr algn="ctr">
+              <a:lnSpc>
+                <a:spcPct val="95000"/>
+              </a:lnSpc>
+            </a:pPr>
+            <a:r>
+              <a:rPr sz="600" b="0">
+                <a:solidFill>
+                  <a:srgbClr val="545A72"/>
+                </a:solidFill>
+                <a:latin typeface="Segoe UI"/>
+              </a:rPr>
+              <a:t>Commodities</a:t>
+            </a:r>
+          </a:p>
+        </p:txBody>
+      </p:sp>
+      <p:sp>
+        <p:nvSpPr>
+          <p:cNvPr id="40" name="TextBox 39"/>
+          <p:cNvSpPr txBox="1"/>
+          <p:nvPr/>
+        </p:nvSpPr>
+        <p:spPr>
+          <a:xfrm>
+            <a:off x="10004498" y="1979676"/>
+            <a:ext cx="472119" cy="365760"/>
+          </a:xfrm>
+          <a:prstGeom prst="rect">
+            <a:avLst/>
+          </a:prstGeom>
+          <a:noFill/>
+        </p:spPr>
+        <p:txBody>
+          <a:bodyPr wrap="square" anchor="t" lIns="0" tIns="0" rIns="0" bIns="0">
+            <a:spAutoFit/>
+          </a:bodyPr>
+          <a:lstStyle/>
+          <a:p>
+            <a:pPr algn="ctr">
+              <a:lnSpc>
+                <a:spcPct val="95000"/>
+              </a:lnSpc>
+            </a:pPr>
+            <a:r>
+              <a:rPr sz="600" b="0">
+                <a:solidFill>
+                  <a:srgbClr val="545A72"/>
+                </a:solidFill>
+                <a:latin typeface="Segoe UI"/>
+              </a:rPr>
+              <a:t>EDG</a:t>
+            </a:r>
+          </a:p>
+        </p:txBody>
+      </p:sp>
+      <p:sp>
+        <p:nvSpPr>
+          <p:cNvPr id="41" name="TextBox 40"/>
+          <p:cNvSpPr txBox="1"/>
+          <p:nvPr/>
+        </p:nvSpPr>
+        <p:spPr>
+          <a:xfrm>
+            <a:off x="10476617" y="1979676"/>
+            <a:ext cx="472119" cy="365760"/>
+          </a:xfrm>
+          <a:prstGeom prst="rect">
+            <a:avLst/>
+          </a:prstGeom>
+          <a:noFill/>
+        </p:spPr>
+        <p:txBody>
+          <a:bodyPr wrap="square" anchor="t" lIns="0" tIns="0" rIns="0" bIns="0">
+            <a:spAutoFit/>
+          </a:bodyPr>
+          <a:lstStyle/>
+          <a:p>
+            <a:pPr algn="ctr">
+              <a:lnSpc>
+                <a:spcPct val="95000"/>
+              </a:lnSpc>
+            </a:pPr>
+            <a:r>
+              <a:rPr sz="600" b="0">
+                <a:solidFill>
+                  <a:srgbClr val="545A72"/>
+                </a:solidFill>
+                <a:latin typeface="Segoe UI"/>
+              </a:rPr>
+              <a:t>CEM</a:t>
+            </a:r>
+          </a:p>
+        </p:txBody>
+      </p:sp>
+      <p:sp>
+        <p:nvSpPr>
+          <p:cNvPr id="42" name="TextBox 41"/>
+          <p:cNvSpPr txBox="1"/>
+          <p:nvPr/>
+        </p:nvSpPr>
+        <p:spPr>
+          <a:xfrm>
+            <a:off x="10948736" y="1979676"/>
+            <a:ext cx="472119" cy="365760"/>
+          </a:xfrm>
+          <a:prstGeom prst="rect">
+            <a:avLst/>
+          </a:prstGeom>
+          <a:noFill/>
+        </p:spPr>
+        <p:txBody>
+          <a:bodyPr wrap="square" anchor="t" lIns="0" tIns="0" rIns="0" bIns="0">
+            <a:spAutoFit/>
+          </a:bodyPr>
+          <a:lstStyle/>
+          <a:p>
+            <a:pPr algn="ctr">
+              <a:lnSpc>
+                <a:spcPct val="95000"/>
+              </a:lnSpc>
+            </a:pPr>
+            <a:r>
+              <a:rPr sz="600" b="0">
+                <a:solidFill>
+                  <a:srgbClr val="545A72"/>
+                </a:solidFill>
+                <a:latin typeface="Segoe UI"/>
+              </a:rPr>
+              <a:t>Commodities</a:t>
+            </a:r>
+          </a:p>
+        </p:txBody>
+      </p:sp>
+      <p:sp>
+        <p:nvSpPr>
+          <p:cNvPr id="43" name="Rounded Rectangle 42"/>
+          <p:cNvSpPr/>
+          <p:nvPr/>
+        </p:nvSpPr>
+        <p:spPr>
+          <a:xfrm>
+            <a:off x="749808" y="2304288"/>
+            <a:ext cx="10671048" cy="260603"/>
+          </a:xfrm>
+          <a:prstGeom prst="roundRect">
+            <a:avLst>
+              <a:gd name="adj" fmla="val 17543"/>
+            </a:avLst>
+          </a:prstGeom>
+          <a:solidFill>
+            <a:srgbClr val="F3F5FA"/>
+          </a:solidFill>
+          <a:ln>
+            <a:noFill/>
+          </a:ln>
+          <a:effectLst/>
+        </p:spPr>
+        <p:style>
+          <a:lnRef idx="1">
+            <a:schemeClr val="accent1"/>
+          </a:lnRef>
+          <a:fillRef idx="3">
+            <a:schemeClr val="accent1"/>
+          </a:fillRef>
+          <a:effectRef idx="2">
+            <a:schemeClr val="accent1"/>
+          </a:effectRef>
+          <a:fontRef idx="minor">
+            <a:schemeClr val="lt1"/>
+          </a:fontRef>
+        </p:style>
+        <p:txBody>
+          <a:bodyPr rtlCol="0" anchor="ctr" wrap="square"/>
+          <a:lstStyle/>
+          <a:p>
+            <a:pPr algn="ctr"/>
+          </a:p>
+        </p:txBody>
+      </p:sp>
+      <p:sp>
+        <p:nvSpPr>
+          <p:cNvPr id="44" name="TextBox 43"/>
+          <p:cNvSpPr txBox="1"/>
+          <p:nvPr/>
+        </p:nvSpPr>
+        <p:spPr>
+          <a:xfrm>
+            <a:off x="822960" y="2345436"/>
+            <a:ext cx="1572768" cy="365760"/>
+          </a:xfrm>
+          <a:prstGeom prst="rect">
+            <a:avLst/>
+          </a:prstGeom>
+          <a:noFill/>
+        </p:spPr>
+        <p:txBody>
+          <a:bodyPr wrap="square" anchor="t" lIns="0" tIns="0" rIns="0" bIns="0">
+            <a:spAutoFit/>
+          </a:bodyPr>
+          <a:lstStyle/>
+          <a:p>
+            <a:pPr algn="l">
+              <a:lnSpc>
+                <a:spcPct val="100000"/>
+              </a:lnSpc>
+            </a:pPr>
+            <a:r>
+              <a:rPr sz="750" b="0">
+                <a:solidFill>
+                  <a:srgbClr val="0E112A"/>
+                </a:solidFill>
+                <a:latin typeface="Segoe UI"/>
+              </a:rPr>
+              <a:t>Registro</a:t>
+            </a:r>
+          </a:p>
+        </p:txBody>
+      </p:sp>
+      <p:sp>
+        <p:nvSpPr>
+          <p:cNvPr id="45" name="Rounded Rectangle 44"/>
+          <p:cNvSpPr/>
+          <p:nvPr/>
+        </p:nvSpPr>
+        <p:spPr>
+          <a:xfrm>
+            <a:off x="2608927" y="2356866"/>
+            <a:ext cx="155448" cy="155448"/>
+          </a:xfrm>
+          <a:prstGeom prst="roundRect">
+            <a:avLst>
+              <a:gd name="adj" fmla="val 29411"/>
+            </a:avLst>
+          </a:prstGeom>
+          <a:solidFill>
+            <a:srgbClr val="B9C0D0"/>
+          </a:solidFill>
+          <a:ln>
+            <a:noFill/>
+          </a:ln>
+          <a:effectLst/>
+        </p:spPr>
+        <p:style>
+          <a:lnRef idx="1">
+            <a:schemeClr val="accent1"/>
+          </a:lnRef>
+          <a:fillRef idx="3">
+            <a:schemeClr val="accent1"/>
+          </a:fillRef>
+          <a:effectRef idx="2">
+            <a:schemeClr val="accent1"/>
+          </a:effectRef>
+          <a:fontRef idx="minor">
+            <a:schemeClr val="lt1"/>
+          </a:fontRef>
+        </p:style>
+        <p:txBody>
+          <a:bodyPr rtlCol="0" anchor="ctr" wrap="square"/>
+          <a:lstStyle/>
+          <a:p>
+            <a:pPr algn="ctr"/>
+          </a:p>
+        </p:txBody>
+      </p:sp>
+      <p:sp>
+        <p:nvSpPr>
+          <p:cNvPr id="46" name="Rounded Rectangle 45"/>
+          <p:cNvSpPr/>
+          <p:nvPr/>
+        </p:nvSpPr>
+        <p:spPr>
+          <a:xfrm>
+            <a:off x="3081046" y="2356866"/>
+            <a:ext cx="155448" cy="155448"/>
+          </a:xfrm>
+          <a:prstGeom prst="roundRect">
+            <a:avLst>
+              <a:gd name="adj" fmla="val 29411"/>
+            </a:avLst>
+          </a:prstGeom>
+          <a:solidFill>
+            <a:srgbClr val="B9C0D0"/>
+          </a:solidFill>
+          <a:ln>
+            <a:noFill/>
+          </a:ln>
+          <a:effectLst/>
+        </p:spPr>
+        <p:style>
+          <a:lnRef idx="1">
+            <a:schemeClr val="accent1"/>
+          </a:lnRef>
+          <a:fillRef idx="3">
+            <a:schemeClr val="accent1"/>
+          </a:fillRef>
+          <a:effectRef idx="2">
+            <a:schemeClr val="accent1"/>
+          </a:effectRef>
+          <a:fontRef idx="minor">
+            <a:schemeClr val="lt1"/>
+          </a:fontRef>
+        </p:style>
+        <p:txBody>
+          <a:bodyPr rtlCol="0" anchor="ctr" wrap="square"/>
+          <a:lstStyle/>
+          <a:p>
+            <a:pPr algn="ctr"/>
+          </a:p>
+        </p:txBody>
+      </p:sp>
+      <p:sp>
+        <p:nvSpPr>
+          <p:cNvPr id="47" name="Rounded Rectangle 46"/>
+          <p:cNvSpPr/>
+          <p:nvPr/>
+        </p:nvSpPr>
+        <p:spPr>
+          <a:xfrm>
+            <a:off x="3553165" y="2356866"/>
+            <a:ext cx="155448" cy="155448"/>
+          </a:xfrm>
+          <a:prstGeom prst="roundRect">
+            <a:avLst>
+              <a:gd name="adj" fmla="val 29411"/>
+            </a:avLst>
+          </a:prstGeom>
+          <a:solidFill>
+            <a:srgbClr val="0066CC"/>
+          </a:solidFill>
+          <a:ln>
+            <a:noFill/>
+          </a:ln>
+          <a:effectLst/>
+        </p:spPr>
+        <p:style>
+          <a:lnRef idx="1">
+            <a:schemeClr val="accent1"/>
+          </a:lnRef>
+          <a:fillRef idx="3">
+            <a:schemeClr val="accent1"/>
+          </a:fillRef>
+          <a:effectRef idx="2">
+            <a:schemeClr val="accent1"/>
+          </a:effectRef>
+          <a:fontRef idx="minor">
+            <a:schemeClr val="lt1"/>
+          </a:fontRef>
+        </p:style>
+        <p:txBody>
+          <a:bodyPr rtlCol="0" anchor="ctr" wrap="square"/>
+          <a:lstStyle/>
+          <a:p>
+            <a:pPr algn="ctr"/>
+          </a:p>
+        </p:txBody>
+      </p:sp>
+      <p:sp>
+        <p:nvSpPr>
+          <p:cNvPr id="48" name="Rounded Rectangle 47"/>
+          <p:cNvSpPr/>
+          <p:nvPr/>
+        </p:nvSpPr>
+        <p:spPr>
+          <a:xfrm>
+            <a:off x="4025285" y="2356866"/>
+            <a:ext cx="155448" cy="155448"/>
+          </a:xfrm>
+          <a:prstGeom prst="roundRect">
+            <a:avLst>
+              <a:gd name="adj" fmla="val 29411"/>
+            </a:avLst>
+          </a:prstGeom>
+          <a:solidFill>
+            <a:srgbClr val="0066CC"/>
+          </a:solidFill>
+          <a:ln>
+            <a:noFill/>
+          </a:ln>
+          <a:effectLst/>
+        </p:spPr>
+        <p:style>
+          <a:lnRef idx="1">
+            <a:schemeClr val="accent1"/>
+          </a:lnRef>
+          <a:fillRef idx="3">
+            <a:schemeClr val="accent1"/>
+          </a:fillRef>
+          <a:effectRef idx="2">
+            <a:schemeClr val="accent1"/>
+          </a:effectRef>
+          <a:fontRef idx="minor">
+            <a:schemeClr val="lt1"/>
+          </a:fontRef>
+        </p:style>
+        <p:txBody>
+          <a:bodyPr rtlCol="0" anchor="ctr" wrap="square"/>
+          <a:lstStyle/>
+          <a:p>
+            <a:pPr algn="ctr"/>
+          </a:p>
+        </p:txBody>
+      </p:sp>
+      <p:sp>
+        <p:nvSpPr>
+          <p:cNvPr id="49" name="Rounded Rectangle 48"/>
+          <p:cNvSpPr/>
+          <p:nvPr/>
+        </p:nvSpPr>
+        <p:spPr>
+          <a:xfrm>
+            <a:off x="4497404" y="2356866"/>
+            <a:ext cx="155448" cy="155448"/>
+          </a:xfrm>
+          <a:prstGeom prst="roundRect">
+            <a:avLst>
+              <a:gd name="adj" fmla="val 29411"/>
+            </a:avLst>
+          </a:prstGeom>
+          <a:solidFill>
+            <a:srgbClr val="0066CC"/>
+          </a:solidFill>
+          <a:ln>
+            <a:noFill/>
+          </a:ln>
+          <a:effectLst/>
+        </p:spPr>
+        <p:style>
+          <a:lnRef idx="1">
+            <a:schemeClr val="accent1"/>
+          </a:lnRef>
+          <a:fillRef idx="3">
+            <a:schemeClr val="accent1"/>
+          </a:fillRef>
+          <a:effectRef idx="2">
+            <a:schemeClr val="accent1"/>
+          </a:effectRef>
+          <a:fontRef idx="minor">
+            <a:schemeClr val="lt1"/>
+          </a:fontRef>
+        </p:style>
+        <p:txBody>
+          <a:bodyPr rtlCol="0" anchor="ctr" wrap="square"/>
+          <a:lstStyle/>
+          <a:p>
+            <a:pPr algn="ctr"/>
+          </a:p>
+        </p:txBody>
+      </p:sp>
+      <p:sp>
+        <p:nvSpPr>
+          <p:cNvPr id="50" name="Rounded Rectangle 49"/>
+          <p:cNvSpPr/>
+          <p:nvPr/>
+        </p:nvSpPr>
+        <p:spPr>
+          <a:xfrm>
+            <a:off x="4969523" y="2356866"/>
+            <a:ext cx="155448" cy="155448"/>
+          </a:xfrm>
+          <a:prstGeom prst="roundRect">
+            <a:avLst>
+              <a:gd name="adj" fmla="val 29411"/>
+            </a:avLst>
+          </a:prstGeom>
+          <a:solidFill>
+            <a:srgbClr val="0066CC"/>
+          </a:solidFill>
+          <a:ln>
+            <a:noFill/>
+          </a:ln>
+          <a:effectLst/>
+        </p:spPr>
+        <p:style>
+          <a:lnRef idx="1">
+            <a:schemeClr val="accent1"/>
+          </a:lnRef>
+          <a:fillRef idx="3">
+            <a:schemeClr val="accent1"/>
+          </a:fillRef>
+          <a:effectRef idx="2">
+            <a:schemeClr val="accent1"/>
+          </a:effectRef>
+          <a:fontRef idx="minor">
+            <a:schemeClr val="lt1"/>
+          </a:fontRef>
+        </p:style>
+        <p:txBody>
+          <a:bodyPr rtlCol="0" anchor="ctr" wrap="square"/>
+          <a:lstStyle/>
+          <a:p>
+            <a:pPr algn="ctr"/>
+          </a:p>
+        </p:txBody>
+      </p:sp>
+      <p:sp>
+        <p:nvSpPr>
+          <p:cNvPr id="51" name="Rounded Rectangle 50"/>
+          <p:cNvSpPr/>
+          <p:nvPr/>
+        </p:nvSpPr>
+        <p:spPr>
+          <a:xfrm>
+            <a:off x="5441642" y="2356866"/>
+            <a:ext cx="155448" cy="155448"/>
+          </a:xfrm>
+          <a:prstGeom prst="roundRect">
+            <a:avLst>
+              <a:gd name="adj" fmla="val 29411"/>
+            </a:avLst>
+          </a:prstGeom>
+          <a:solidFill>
+            <a:srgbClr val="B9C0D0"/>
+          </a:solidFill>
+          <a:ln>
+            <a:noFill/>
+          </a:ln>
+          <a:effectLst/>
+        </p:spPr>
+        <p:style>
+          <a:lnRef idx="1">
+            <a:schemeClr val="accent1"/>
+          </a:lnRef>
+          <a:fillRef idx="3">
+            <a:schemeClr val="accent1"/>
+          </a:fillRef>
+          <a:effectRef idx="2">
+            <a:schemeClr val="accent1"/>
+          </a:effectRef>
+          <a:fontRef idx="minor">
+            <a:schemeClr val="lt1"/>
+          </a:fontRef>
+        </p:style>
+        <p:txBody>
+          <a:bodyPr rtlCol="0" anchor="ctr" wrap="square"/>
+          <a:lstStyle/>
+          <a:p>
+            <a:pPr algn="ctr"/>
+          </a:p>
+        </p:txBody>
+      </p:sp>
+      <p:sp>
+        <p:nvSpPr>
+          <p:cNvPr id="52" name="Rounded Rectangle 51"/>
+          <p:cNvSpPr/>
+          <p:nvPr/>
+        </p:nvSpPr>
+        <p:spPr>
+          <a:xfrm>
+            <a:off x="5913761" y="2356866"/>
+            <a:ext cx="155448" cy="155448"/>
+          </a:xfrm>
+          <a:prstGeom prst="roundRect">
+            <a:avLst>
+              <a:gd name="adj" fmla="val 29411"/>
+            </a:avLst>
+          </a:prstGeom>
+          <a:solidFill>
+            <a:srgbClr val="0066CC"/>
+          </a:solidFill>
+          <a:ln>
+            <a:noFill/>
+          </a:ln>
+          <a:effectLst/>
+        </p:spPr>
+        <p:style>
+          <a:lnRef idx="1">
+            <a:schemeClr val="accent1"/>
+          </a:lnRef>
+          <a:fillRef idx="3">
+            <a:schemeClr val="accent1"/>
+          </a:fillRef>
+          <a:effectRef idx="2">
+            <a:schemeClr val="accent1"/>
+          </a:effectRef>
+          <a:fontRef idx="minor">
+            <a:schemeClr val="lt1"/>
+          </a:fontRef>
+        </p:style>
+        <p:txBody>
+          <a:bodyPr rtlCol="0" anchor="ctr" wrap="square"/>
+          <a:lstStyle/>
+          <a:p>
+            <a:pPr algn="ctr"/>
+          </a:p>
+        </p:txBody>
+      </p:sp>
+      <p:sp>
+        <p:nvSpPr>
+          <p:cNvPr id="53" name="Rounded Rectangle 52"/>
+          <p:cNvSpPr/>
+          <p:nvPr/>
+        </p:nvSpPr>
+        <p:spPr>
+          <a:xfrm>
+            <a:off x="6385880" y="2356866"/>
+            <a:ext cx="155448" cy="155448"/>
+          </a:xfrm>
+          <a:prstGeom prst="roundRect">
+            <a:avLst>
+              <a:gd name="adj" fmla="val 29411"/>
+            </a:avLst>
+          </a:prstGeom>
+          <a:solidFill>
+            <a:srgbClr val="0066CC"/>
+          </a:solidFill>
+          <a:ln>
+            <a:noFill/>
+          </a:ln>
+          <a:effectLst/>
+        </p:spPr>
+        <p:style>
+          <a:lnRef idx="1">
+            <a:schemeClr val="accent1"/>
+          </a:lnRef>
+          <a:fillRef idx="3">
+            <a:schemeClr val="accent1"/>
+          </a:fillRef>
+          <a:effectRef idx="2">
+            <a:schemeClr val="accent1"/>
+          </a:effectRef>
+          <a:fontRef idx="minor">
+            <a:schemeClr val="lt1"/>
+          </a:fontRef>
+        </p:style>
+        <p:txBody>
+          <a:bodyPr rtlCol="0" anchor="ctr" wrap="square"/>
+          <a:lstStyle/>
+          <a:p>
+            <a:pPr algn="ctr"/>
+          </a:p>
+        </p:txBody>
+      </p:sp>
+      <p:sp>
+        <p:nvSpPr>
+          <p:cNvPr id="54" name="Rounded Rectangle 53"/>
+          <p:cNvSpPr/>
+          <p:nvPr/>
+        </p:nvSpPr>
+        <p:spPr>
+          <a:xfrm>
+            <a:off x="7802238" y="2356866"/>
+            <a:ext cx="155448" cy="155448"/>
+          </a:xfrm>
+          <a:prstGeom prst="roundRect">
+            <a:avLst>
+              <a:gd name="adj" fmla="val 29411"/>
+            </a:avLst>
+          </a:prstGeom>
+          <a:solidFill>
+            <a:srgbClr val="CBBCF6"/>
+          </a:solidFill>
+          <a:ln>
+            <a:noFill/>
+          </a:ln>
+          <a:effectLst/>
+        </p:spPr>
+        <p:style>
+          <a:lnRef idx="1">
+            <a:schemeClr val="accent1"/>
+          </a:lnRef>
+          <a:fillRef idx="3">
+            <a:schemeClr val="accent1"/>
+          </a:fillRef>
+          <a:effectRef idx="2">
+            <a:schemeClr val="accent1"/>
+          </a:effectRef>
+          <a:fontRef idx="minor">
+            <a:schemeClr val="lt1"/>
+          </a:fontRef>
+        </p:style>
+        <p:txBody>
+          <a:bodyPr rtlCol="0" anchor="ctr" wrap="square"/>
+          <a:lstStyle/>
+          <a:p>
+            <a:pPr algn="ctr"/>
+          </a:p>
+        </p:txBody>
+      </p:sp>
+      <p:sp>
+        <p:nvSpPr>
+          <p:cNvPr id="55" name="Rounded Rectangle 54"/>
+          <p:cNvSpPr/>
+          <p:nvPr/>
+        </p:nvSpPr>
+        <p:spPr>
+          <a:xfrm>
+            <a:off x="8274357" y="2356866"/>
+            <a:ext cx="155448" cy="155448"/>
+          </a:xfrm>
+          <a:prstGeom prst="roundRect">
+            <a:avLst>
+              <a:gd name="adj" fmla="val 29411"/>
+            </a:avLst>
+          </a:prstGeom>
+          <a:solidFill>
+            <a:srgbClr val="CBBCF6"/>
+          </a:solidFill>
+          <a:ln>
+            <a:noFill/>
+          </a:ln>
+          <a:effectLst/>
+        </p:spPr>
+        <p:style>
+          <a:lnRef idx="1">
+            <a:schemeClr val="accent1"/>
+          </a:lnRef>
+          <a:fillRef idx="3">
+            <a:schemeClr val="accent1"/>
+          </a:fillRef>
+          <a:effectRef idx="2">
+            <a:schemeClr val="accent1"/>
+          </a:effectRef>
+          <a:fontRef idx="minor">
+            <a:schemeClr val="lt1"/>
+          </a:fontRef>
+        </p:style>
+        <p:txBody>
+          <a:bodyPr rtlCol="0" anchor="ctr" wrap="square"/>
+          <a:lstStyle/>
+          <a:p>
+            <a:pPr algn="ctr"/>
+          </a:p>
+        </p:txBody>
+      </p:sp>
+      <p:sp>
+        <p:nvSpPr>
+          <p:cNvPr id="56" name="Rounded Rectangle 55"/>
+          <p:cNvSpPr/>
+          <p:nvPr/>
+        </p:nvSpPr>
+        <p:spPr>
+          <a:xfrm>
+            <a:off x="8746476" y="2356866"/>
+            <a:ext cx="155448" cy="155448"/>
+          </a:xfrm>
+          <a:prstGeom prst="roundRect">
+            <a:avLst>
+              <a:gd name="adj" fmla="val 29411"/>
+            </a:avLst>
+          </a:prstGeom>
+          <a:solidFill>
+            <a:srgbClr val="CBBCF6"/>
+          </a:solidFill>
+          <a:ln>
+            <a:noFill/>
+          </a:ln>
+          <a:effectLst/>
+        </p:spPr>
+        <p:style>
+          <a:lnRef idx="1">
+            <a:schemeClr val="accent1"/>
+          </a:lnRef>
+          <a:fillRef idx="3">
+            <a:schemeClr val="accent1"/>
+          </a:fillRef>
+          <a:effectRef idx="2">
+            <a:schemeClr val="accent1"/>
+          </a:effectRef>
+          <a:fontRef idx="minor">
+            <a:schemeClr val="lt1"/>
+          </a:fontRef>
+        </p:style>
+        <p:txBody>
+          <a:bodyPr rtlCol="0" anchor="ctr" wrap="square"/>
+          <a:lstStyle/>
+          <a:p>
+            <a:pPr algn="ctr"/>
+          </a:p>
+        </p:txBody>
+      </p:sp>
+      <p:sp>
+        <p:nvSpPr>
+          <p:cNvPr id="57" name="Rounded Rectangle 56"/>
+          <p:cNvSpPr/>
+          <p:nvPr/>
+        </p:nvSpPr>
+        <p:spPr>
+          <a:xfrm>
+            <a:off x="9218595" y="2356866"/>
+            <a:ext cx="155448" cy="155448"/>
+          </a:xfrm>
+          <a:prstGeom prst="roundRect">
+            <a:avLst>
+              <a:gd name="adj" fmla="val 29411"/>
+            </a:avLst>
+          </a:prstGeom>
+          <a:solidFill>
+            <a:srgbClr val="CBBCF6"/>
+          </a:solidFill>
+          <a:ln>
+            <a:noFill/>
+          </a:ln>
+          <a:effectLst/>
+        </p:spPr>
+        <p:style>
+          <a:lnRef idx="1">
+            <a:schemeClr val="accent1"/>
+          </a:lnRef>
+          <a:fillRef idx="3">
+            <a:schemeClr val="accent1"/>
+          </a:fillRef>
+          <a:effectRef idx="2">
+            <a:schemeClr val="accent1"/>
+          </a:effectRef>
+          <a:fontRef idx="minor">
+            <a:schemeClr val="lt1"/>
+          </a:fontRef>
+        </p:style>
+        <p:txBody>
+          <a:bodyPr rtlCol="0" anchor="ctr" wrap="square"/>
+          <a:lstStyle/>
+          <a:p>
+            <a:pPr algn="ctr"/>
+          </a:p>
+        </p:txBody>
+      </p:sp>
+      <p:sp>
+        <p:nvSpPr>
+          <p:cNvPr id="58" name="Rounded Rectangle 57"/>
+          <p:cNvSpPr/>
+          <p:nvPr/>
+        </p:nvSpPr>
+        <p:spPr>
+          <a:xfrm>
+            <a:off x="9690714" y="2356866"/>
+            <a:ext cx="155448" cy="155448"/>
+          </a:xfrm>
+          <a:prstGeom prst="roundRect">
+            <a:avLst>
+              <a:gd name="adj" fmla="val 29411"/>
+            </a:avLst>
+          </a:prstGeom>
+          <a:solidFill>
+            <a:srgbClr val="CBBCF6"/>
+          </a:solidFill>
+          <a:ln>
+            <a:noFill/>
+          </a:ln>
+          <a:effectLst/>
+        </p:spPr>
+        <p:style>
+          <a:lnRef idx="1">
+            <a:schemeClr val="accent1"/>
+          </a:lnRef>
+          <a:fillRef idx="3">
+            <a:schemeClr val="accent1"/>
+          </a:fillRef>
+          <a:effectRef idx="2">
+            <a:schemeClr val="accent1"/>
+          </a:effectRef>
+          <a:fontRef idx="minor">
+            <a:schemeClr val="lt1"/>
+          </a:fontRef>
+        </p:style>
+        <p:txBody>
+          <a:bodyPr rtlCol="0" anchor="ctr" wrap="square"/>
+          <a:lstStyle/>
+          <a:p>
+            <a:pPr algn="ctr"/>
+          </a:p>
+        </p:txBody>
+      </p:sp>
+      <p:sp>
+        <p:nvSpPr>
+          <p:cNvPr id="59" name="Rounded Rectangle 58"/>
+          <p:cNvSpPr/>
+          <p:nvPr/>
+        </p:nvSpPr>
+        <p:spPr>
+          <a:xfrm>
+            <a:off x="10634953" y="2356866"/>
+            <a:ext cx="155448" cy="155448"/>
+          </a:xfrm>
+          <a:prstGeom prst="roundRect">
+            <a:avLst>
+              <a:gd name="adj" fmla="val 29411"/>
+            </a:avLst>
+          </a:prstGeom>
+          <a:solidFill>
+            <a:srgbClr val="CBBCF6"/>
+          </a:solidFill>
+          <a:ln>
+            <a:noFill/>
+          </a:ln>
+          <a:effectLst/>
+        </p:spPr>
+        <p:style>
+          <a:lnRef idx="1">
+            <a:schemeClr val="accent1"/>
+          </a:lnRef>
+          <a:fillRef idx="3">
+            <a:schemeClr val="accent1"/>
+          </a:fillRef>
+          <a:effectRef idx="2">
+            <a:schemeClr val="accent1"/>
+          </a:effectRef>
+          <a:fontRef idx="minor">
+            <a:schemeClr val="lt1"/>
+          </a:fontRef>
+        </p:style>
+        <p:txBody>
+          <a:bodyPr rtlCol="0" anchor="ctr" wrap="square"/>
+          <a:lstStyle/>
+          <a:p>
+            <a:pPr algn="ctr"/>
+          </a:p>
+        </p:txBody>
+      </p:sp>
+      <p:sp>
+        <p:nvSpPr>
+          <p:cNvPr id="60" name="Rounded Rectangle 59"/>
+          <p:cNvSpPr/>
+          <p:nvPr/>
+        </p:nvSpPr>
+        <p:spPr>
+          <a:xfrm>
+            <a:off x="11107072" y="2356866"/>
+            <a:ext cx="155448" cy="155448"/>
+          </a:xfrm>
+          <a:prstGeom prst="roundRect">
+            <a:avLst>
+              <a:gd name="adj" fmla="val 29411"/>
+            </a:avLst>
+          </a:prstGeom>
+          <a:solidFill>
+            <a:srgbClr val="CBBCF6"/>
+          </a:solidFill>
+          <a:ln>
+            <a:noFill/>
+          </a:ln>
+          <a:effectLst/>
+        </p:spPr>
+        <p:style>
+          <a:lnRef idx="1">
+            <a:schemeClr val="accent1"/>
+          </a:lnRef>
+          <a:fillRef idx="3">
+            <a:schemeClr val="accent1"/>
+          </a:fillRef>
+          <a:effectRef idx="2">
+            <a:schemeClr val="accent1"/>
+          </a:effectRef>
+          <a:fontRef idx="minor">
+            <a:schemeClr val="lt1"/>
+          </a:fontRef>
+        </p:style>
+        <p:txBody>
+          <a:bodyPr rtlCol="0" anchor="ctr" wrap="square"/>
+          <a:lstStyle/>
+          <a:p>
+            <a:pPr algn="ctr"/>
+          </a:p>
+        </p:txBody>
+      </p:sp>
+      <p:sp>
+        <p:nvSpPr>
+          <p:cNvPr id="61" name="TextBox 60"/>
+          <p:cNvSpPr txBox="1"/>
+          <p:nvPr/>
+        </p:nvSpPr>
+        <p:spPr>
+          <a:xfrm>
+            <a:off x="822960" y="2606040"/>
+            <a:ext cx="1572768" cy="365760"/>
+          </a:xfrm>
+          <a:prstGeom prst="rect">
+            <a:avLst/>
+          </a:prstGeom>
+          <a:noFill/>
+        </p:spPr>
+        <p:txBody>
+          <a:bodyPr wrap="square" anchor="t" lIns="0" tIns="0" rIns="0" bIns="0">
+            <a:spAutoFit/>
+          </a:bodyPr>
+          <a:lstStyle/>
+          <a:p>
+            <a:pPr algn="l">
+              <a:lnSpc>
+                <a:spcPct val="100000"/>
+              </a:lnSpc>
+            </a:pPr>
+            <a:r>
+              <a:rPr sz="750" b="0">
+                <a:solidFill>
+                  <a:srgbClr val="0E112A"/>
+                </a:solidFill>
+                <a:latin typeface="Segoe UI"/>
+              </a:rPr>
+              <a:t>Aviso Liquidação</a:t>
+            </a:r>
+          </a:p>
+        </p:txBody>
+      </p:sp>
+      <p:sp>
+        <p:nvSpPr>
+          <p:cNvPr id="62" name="Rounded Rectangle 61"/>
+          <p:cNvSpPr/>
+          <p:nvPr/>
+        </p:nvSpPr>
+        <p:spPr>
+          <a:xfrm>
+            <a:off x="2608927" y="2617470"/>
+            <a:ext cx="155448" cy="155448"/>
+          </a:xfrm>
+          <a:prstGeom prst="roundRect">
+            <a:avLst>
+              <a:gd name="adj" fmla="val 29411"/>
+            </a:avLst>
+          </a:prstGeom>
+          <a:solidFill>
+            <a:srgbClr val="0066CC"/>
+          </a:solidFill>
+          <a:ln>
+            <a:noFill/>
+          </a:ln>
+          <a:effectLst/>
+        </p:spPr>
+        <p:style>
+          <a:lnRef idx="1">
+            <a:schemeClr val="accent1"/>
+          </a:lnRef>
+          <a:fillRef idx="3">
+            <a:schemeClr val="accent1"/>
+          </a:fillRef>
+          <a:effectRef idx="2">
+            <a:schemeClr val="accent1"/>
+          </a:effectRef>
+          <a:fontRef idx="minor">
+            <a:schemeClr val="lt1"/>
+          </a:fontRef>
+        </p:style>
+        <p:txBody>
+          <a:bodyPr rtlCol="0" anchor="ctr" wrap="square"/>
+          <a:lstStyle/>
+          <a:p>
+            <a:pPr algn="ctr"/>
+          </a:p>
+        </p:txBody>
+      </p:sp>
+      <p:sp>
+        <p:nvSpPr>
+          <p:cNvPr id="63" name="Rounded Rectangle 62"/>
+          <p:cNvSpPr/>
+          <p:nvPr/>
+        </p:nvSpPr>
+        <p:spPr>
+          <a:xfrm>
+            <a:off x="3081046" y="2617470"/>
+            <a:ext cx="155448" cy="155448"/>
+          </a:xfrm>
+          <a:prstGeom prst="roundRect">
+            <a:avLst>
+              <a:gd name="adj" fmla="val 29411"/>
+            </a:avLst>
+          </a:prstGeom>
+          <a:solidFill>
+            <a:srgbClr val="0066CC"/>
+          </a:solidFill>
+          <a:ln>
+            <a:noFill/>
+          </a:ln>
+          <a:effectLst/>
+        </p:spPr>
+        <p:style>
+          <a:lnRef idx="1">
+            <a:schemeClr val="accent1"/>
+          </a:lnRef>
+          <a:fillRef idx="3">
+            <a:schemeClr val="accent1"/>
+          </a:fillRef>
+          <a:effectRef idx="2">
+            <a:schemeClr val="accent1"/>
+          </a:effectRef>
+          <a:fontRef idx="minor">
+            <a:schemeClr val="lt1"/>
+          </a:fontRef>
+        </p:style>
+        <p:txBody>
+          <a:bodyPr rtlCol="0" anchor="ctr" wrap="square"/>
+          <a:lstStyle/>
+          <a:p>
+            <a:pPr algn="ctr"/>
+          </a:p>
+        </p:txBody>
+      </p:sp>
+      <p:sp>
+        <p:nvSpPr>
+          <p:cNvPr id="64" name="Rounded Rectangle 63"/>
+          <p:cNvSpPr/>
+          <p:nvPr/>
+        </p:nvSpPr>
+        <p:spPr>
+          <a:xfrm>
+            <a:off x="3553165" y="2617470"/>
+            <a:ext cx="155448" cy="155448"/>
+          </a:xfrm>
+          <a:prstGeom prst="roundRect">
+            <a:avLst>
+              <a:gd name="adj" fmla="val 29411"/>
+            </a:avLst>
+          </a:prstGeom>
+          <a:solidFill>
+            <a:srgbClr val="0066CC"/>
+          </a:solidFill>
+          <a:ln>
+            <a:noFill/>
+          </a:ln>
+          <a:effectLst/>
+        </p:spPr>
+        <p:style>
+          <a:lnRef idx="1">
+            <a:schemeClr val="accent1"/>
+          </a:lnRef>
+          <a:fillRef idx="3">
+            <a:schemeClr val="accent1"/>
+          </a:fillRef>
+          <a:effectRef idx="2">
+            <a:schemeClr val="accent1"/>
+          </a:effectRef>
+          <a:fontRef idx="minor">
+            <a:schemeClr val="lt1"/>
+          </a:fontRef>
+        </p:style>
+        <p:txBody>
+          <a:bodyPr rtlCol="0" anchor="ctr" wrap="square"/>
+          <a:lstStyle/>
+          <a:p>
+            <a:pPr algn="ctr"/>
+          </a:p>
+        </p:txBody>
+      </p:sp>
+      <p:sp>
+        <p:nvSpPr>
+          <p:cNvPr id="65" name="Rounded Rectangle 64"/>
+          <p:cNvSpPr/>
+          <p:nvPr/>
+        </p:nvSpPr>
+        <p:spPr>
+          <a:xfrm>
+            <a:off x="4025285" y="2617470"/>
+            <a:ext cx="155448" cy="155448"/>
+          </a:xfrm>
+          <a:prstGeom prst="roundRect">
+            <a:avLst>
+              <a:gd name="adj" fmla="val 29411"/>
+            </a:avLst>
+          </a:prstGeom>
+          <a:solidFill>
+            <a:srgbClr val="0066CC"/>
+          </a:solidFill>
+          <a:ln>
+            <a:noFill/>
+          </a:ln>
+          <a:effectLst/>
+        </p:spPr>
+        <p:style>
+          <a:lnRef idx="1">
+            <a:schemeClr val="accent1"/>
+          </a:lnRef>
+          <a:fillRef idx="3">
+            <a:schemeClr val="accent1"/>
+          </a:fillRef>
+          <a:effectRef idx="2">
+            <a:schemeClr val="accent1"/>
+          </a:effectRef>
+          <a:fontRef idx="minor">
+            <a:schemeClr val="lt1"/>
+          </a:fontRef>
+        </p:style>
+        <p:txBody>
+          <a:bodyPr rtlCol="0" anchor="ctr" wrap="square"/>
+          <a:lstStyle/>
+          <a:p>
+            <a:pPr algn="ctr"/>
+          </a:p>
+        </p:txBody>
+      </p:sp>
+      <p:sp>
+        <p:nvSpPr>
+          <p:cNvPr id="66" name="Rounded Rectangle 65"/>
+          <p:cNvSpPr/>
+          <p:nvPr/>
+        </p:nvSpPr>
+        <p:spPr>
+          <a:xfrm>
+            <a:off x="4497404" y="2617470"/>
+            <a:ext cx="155448" cy="155448"/>
+          </a:xfrm>
+          <a:prstGeom prst="roundRect">
+            <a:avLst>
+              <a:gd name="adj" fmla="val 29411"/>
+            </a:avLst>
+          </a:prstGeom>
+          <a:solidFill>
+            <a:srgbClr val="0066CC"/>
+          </a:solidFill>
+          <a:ln>
+            <a:noFill/>
+          </a:ln>
+          <a:effectLst/>
+        </p:spPr>
+        <p:style>
+          <a:lnRef idx="1">
+            <a:schemeClr val="accent1"/>
+          </a:lnRef>
+          <a:fillRef idx="3">
+            <a:schemeClr val="accent1"/>
+          </a:fillRef>
+          <a:effectRef idx="2">
+            <a:schemeClr val="accent1"/>
+          </a:effectRef>
+          <a:fontRef idx="minor">
+            <a:schemeClr val="lt1"/>
+          </a:fontRef>
+        </p:style>
+        <p:txBody>
+          <a:bodyPr rtlCol="0" anchor="ctr" wrap="square"/>
+          <a:lstStyle/>
+          <a:p>
+            <a:pPr algn="ctr"/>
+          </a:p>
+        </p:txBody>
+      </p:sp>
+      <p:sp>
+        <p:nvSpPr>
+          <p:cNvPr id="67" name="Rounded Rectangle 66"/>
+          <p:cNvSpPr/>
+          <p:nvPr/>
+        </p:nvSpPr>
+        <p:spPr>
+          <a:xfrm>
+            <a:off x="4969523" y="2617470"/>
+            <a:ext cx="155448" cy="155448"/>
+          </a:xfrm>
+          <a:prstGeom prst="roundRect">
+            <a:avLst>
+              <a:gd name="adj" fmla="val 29411"/>
+            </a:avLst>
+          </a:prstGeom>
+          <a:solidFill>
+            <a:srgbClr val="0066CC"/>
+          </a:solidFill>
+          <a:ln>
+            <a:noFill/>
+          </a:ln>
+          <a:effectLst/>
+        </p:spPr>
+        <p:style>
+          <a:lnRef idx="1">
+            <a:schemeClr val="accent1"/>
+          </a:lnRef>
+          <a:fillRef idx="3">
+            <a:schemeClr val="accent1"/>
+          </a:fillRef>
+          <a:effectRef idx="2">
+            <a:schemeClr val="accent1"/>
+          </a:effectRef>
+          <a:fontRef idx="minor">
+            <a:schemeClr val="lt1"/>
+          </a:fontRef>
+        </p:style>
+        <p:txBody>
+          <a:bodyPr rtlCol="0" anchor="ctr" wrap="square"/>
+          <a:lstStyle/>
+          <a:p>
+            <a:pPr algn="ctr"/>
+          </a:p>
+        </p:txBody>
+      </p:sp>
+      <p:sp>
+        <p:nvSpPr>
+          <p:cNvPr id="68" name="Rounded Rectangle 67"/>
+          <p:cNvSpPr/>
+          <p:nvPr/>
+        </p:nvSpPr>
+        <p:spPr>
+          <a:xfrm>
+            <a:off x="5441642" y="2617470"/>
+            <a:ext cx="155448" cy="155448"/>
+          </a:xfrm>
+          <a:prstGeom prst="roundRect">
+            <a:avLst>
+              <a:gd name="adj" fmla="val 29411"/>
+            </a:avLst>
+          </a:prstGeom>
+          <a:solidFill>
+            <a:srgbClr val="CBBCF6"/>
+          </a:solidFill>
+          <a:ln>
+            <a:noFill/>
+          </a:ln>
+          <a:effectLst/>
+        </p:spPr>
+        <p:style>
+          <a:lnRef idx="1">
+            <a:schemeClr val="accent1"/>
+          </a:lnRef>
+          <a:fillRef idx="3">
+            <a:schemeClr val="accent1"/>
+          </a:fillRef>
+          <a:effectRef idx="2">
+            <a:schemeClr val="accent1"/>
+          </a:effectRef>
+          <a:fontRef idx="minor">
+            <a:schemeClr val="lt1"/>
+          </a:fontRef>
+        </p:style>
+        <p:txBody>
+          <a:bodyPr rtlCol="0" anchor="ctr" wrap="square"/>
+          <a:lstStyle/>
+          <a:p>
+            <a:pPr algn="ctr"/>
+          </a:p>
+        </p:txBody>
+      </p:sp>
+      <p:sp>
+        <p:nvSpPr>
+          <p:cNvPr id="69" name="Rounded Rectangle 68"/>
+          <p:cNvSpPr/>
+          <p:nvPr/>
+        </p:nvSpPr>
+        <p:spPr>
+          <a:xfrm>
+            <a:off x="5913761" y="2617470"/>
+            <a:ext cx="155448" cy="155448"/>
+          </a:xfrm>
+          <a:prstGeom prst="roundRect">
+            <a:avLst>
+              <a:gd name="adj" fmla="val 29411"/>
+            </a:avLst>
+          </a:prstGeom>
+          <a:solidFill>
+            <a:srgbClr val="CBBCF6"/>
+          </a:solidFill>
+          <a:ln>
+            <a:noFill/>
+          </a:ln>
+          <a:effectLst/>
+        </p:spPr>
+        <p:style>
+          <a:lnRef idx="1">
+            <a:schemeClr val="accent1"/>
+          </a:lnRef>
+          <a:fillRef idx="3">
+            <a:schemeClr val="accent1"/>
+          </a:fillRef>
+          <a:effectRef idx="2">
+            <a:schemeClr val="accent1"/>
+          </a:effectRef>
+          <a:fontRef idx="minor">
+            <a:schemeClr val="lt1"/>
+          </a:fontRef>
+        </p:style>
+        <p:txBody>
+          <a:bodyPr rtlCol="0" anchor="ctr" wrap="square"/>
+          <a:lstStyle/>
+          <a:p>
+            <a:pPr algn="ctr"/>
+          </a:p>
+        </p:txBody>
+      </p:sp>
+      <p:sp>
+        <p:nvSpPr>
+          <p:cNvPr id="70" name="Rounded Rectangle 69"/>
+          <p:cNvSpPr/>
+          <p:nvPr/>
+        </p:nvSpPr>
+        <p:spPr>
+          <a:xfrm>
+            <a:off x="6385880" y="2617470"/>
+            <a:ext cx="155448" cy="155448"/>
+          </a:xfrm>
+          <a:prstGeom prst="roundRect">
+            <a:avLst>
+              <a:gd name="adj" fmla="val 29411"/>
+            </a:avLst>
+          </a:prstGeom>
+          <a:solidFill>
+            <a:srgbClr val="CBBCF6"/>
+          </a:solidFill>
+          <a:ln>
+            <a:noFill/>
+          </a:ln>
+          <a:effectLst/>
+        </p:spPr>
+        <p:style>
+          <a:lnRef idx="1">
+            <a:schemeClr val="accent1"/>
+          </a:lnRef>
+          <a:fillRef idx="3">
+            <a:schemeClr val="accent1"/>
+          </a:fillRef>
+          <a:effectRef idx="2">
+            <a:schemeClr val="accent1"/>
+          </a:effectRef>
+          <a:fontRef idx="minor">
+            <a:schemeClr val="lt1"/>
+          </a:fontRef>
+        </p:style>
+        <p:txBody>
+          <a:bodyPr rtlCol="0" anchor="ctr" wrap="square"/>
+          <a:lstStyle/>
+          <a:p>
+            <a:pPr algn="ctr"/>
+          </a:p>
+        </p:txBody>
+      </p:sp>
+      <p:sp>
+        <p:nvSpPr>
+          <p:cNvPr id="71" name="Rounded Rectangle 70"/>
+          <p:cNvSpPr/>
+          <p:nvPr/>
+        </p:nvSpPr>
+        <p:spPr>
+          <a:xfrm>
+            <a:off x="749808" y="2825496"/>
+            <a:ext cx="10671048" cy="260603"/>
+          </a:xfrm>
+          <a:prstGeom prst="roundRect">
+            <a:avLst>
+              <a:gd name="adj" fmla="val 17543"/>
+            </a:avLst>
+          </a:prstGeom>
+          <a:solidFill>
+            <a:srgbClr val="F3F5FA"/>
+          </a:solidFill>
+          <a:ln>
+            <a:noFill/>
+          </a:ln>
+          <a:effectLst/>
+        </p:spPr>
+        <p:style>
+          <a:lnRef idx="1">
+            <a:schemeClr val="accent1"/>
+          </a:lnRef>
+          <a:fillRef idx="3">
+            <a:schemeClr val="accent1"/>
+          </a:fillRef>
+          <a:effectRef idx="2">
+            <a:schemeClr val="accent1"/>
+          </a:effectRef>
+          <a:fontRef idx="minor">
+            <a:schemeClr val="lt1"/>
+          </a:fontRef>
+        </p:style>
+        <p:txBody>
+          <a:bodyPr rtlCol="0" anchor="ctr" wrap="square"/>
+          <a:lstStyle/>
+          <a:p>
+            <a:pPr algn="ctr"/>
+          </a:p>
+        </p:txBody>
+      </p:sp>
+      <p:sp>
+        <p:nvSpPr>
+          <p:cNvPr id="72" name="TextBox 71"/>
+          <p:cNvSpPr txBox="1"/>
+          <p:nvPr/>
+        </p:nvSpPr>
+        <p:spPr>
+          <a:xfrm>
+            <a:off x="822960" y="2866644"/>
+            <a:ext cx="1572768" cy="365760"/>
+          </a:xfrm>
+          <a:prstGeom prst="rect">
+            <a:avLst/>
+          </a:prstGeom>
+          <a:noFill/>
+        </p:spPr>
+        <p:txBody>
+          <a:bodyPr wrap="square" anchor="t" lIns="0" tIns="0" rIns="0" bIns="0">
+            <a:spAutoFit/>
+          </a:bodyPr>
+          <a:lstStyle/>
+          <a:p>
+            <a:pPr algn="l">
+              <a:lnSpc>
+                <a:spcPct val="100000"/>
+              </a:lnSpc>
+            </a:pPr>
+            <a:r>
+              <a:rPr sz="750" b="0">
+                <a:solidFill>
+                  <a:srgbClr val="0E112A"/>
+                </a:solidFill>
+                <a:latin typeface="Segoe UI"/>
+              </a:rPr>
+              <a:t>Calculo Imposto</a:t>
+            </a:r>
+          </a:p>
+        </p:txBody>
+      </p:sp>
+      <p:sp>
+        <p:nvSpPr>
+          <p:cNvPr id="73" name="Rounded Rectangle 72"/>
+          <p:cNvSpPr/>
+          <p:nvPr/>
+        </p:nvSpPr>
+        <p:spPr>
+          <a:xfrm>
+            <a:off x="2608927" y="2878074"/>
+            <a:ext cx="155448" cy="155448"/>
+          </a:xfrm>
+          <a:prstGeom prst="roundRect">
+            <a:avLst>
+              <a:gd name="adj" fmla="val 29411"/>
+            </a:avLst>
+          </a:prstGeom>
+          <a:solidFill>
+            <a:srgbClr val="CBBCF6"/>
+          </a:solidFill>
+          <a:ln>
+            <a:noFill/>
+          </a:ln>
+          <a:effectLst/>
+        </p:spPr>
+        <p:style>
+          <a:lnRef idx="1">
+            <a:schemeClr val="accent1"/>
+          </a:lnRef>
+          <a:fillRef idx="3">
+            <a:schemeClr val="accent1"/>
+          </a:fillRef>
+          <a:effectRef idx="2">
+            <a:schemeClr val="accent1"/>
+          </a:effectRef>
+          <a:fontRef idx="minor">
+            <a:schemeClr val="lt1"/>
+          </a:fontRef>
+        </p:style>
+        <p:txBody>
+          <a:bodyPr rtlCol="0" anchor="ctr" wrap="square"/>
+          <a:lstStyle/>
+          <a:p>
+            <a:pPr algn="ctr"/>
+          </a:p>
+        </p:txBody>
+      </p:sp>
+      <p:sp>
+        <p:nvSpPr>
+          <p:cNvPr id="74" name="Rounded Rectangle 73"/>
+          <p:cNvSpPr/>
+          <p:nvPr/>
+        </p:nvSpPr>
+        <p:spPr>
+          <a:xfrm>
+            <a:off x="3081046" y="2878074"/>
+            <a:ext cx="155448" cy="155448"/>
+          </a:xfrm>
+          <a:prstGeom prst="roundRect">
+            <a:avLst>
+              <a:gd name="adj" fmla="val 29411"/>
+            </a:avLst>
+          </a:prstGeom>
+          <a:solidFill>
+            <a:srgbClr val="0066CC"/>
+          </a:solidFill>
+          <a:ln>
+            <a:noFill/>
+          </a:ln>
+          <a:effectLst/>
+        </p:spPr>
+        <p:style>
+          <a:lnRef idx="1">
+            <a:schemeClr val="accent1"/>
+          </a:lnRef>
+          <a:fillRef idx="3">
+            <a:schemeClr val="accent1"/>
+          </a:fillRef>
+          <a:effectRef idx="2">
+            <a:schemeClr val="accent1"/>
+          </a:effectRef>
+          <a:fontRef idx="minor">
+            <a:schemeClr val="lt1"/>
+          </a:fontRef>
+        </p:style>
+        <p:txBody>
+          <a:bodyPr rtlCol="0" anchor="ctr" wrap="square"/>
+          <a:lstStyle/>
+          <a:p>
+            <a:pPr algn="ctr"/>
+          </a:p>
+        </p:txBody>
+      </p:sp>
+      <p:sp>
+        <p:nvSpPr>
+          <p:cNvPr id="75" name="Rounded Rectangle 74"/>
+          <p:cNvSpPr/>
+          <p:nvPr/>
+        </p:nvSpPr>
+        <p:spPr>
+          <a:xfrm>
+            <a:off x="3553165" y="2878074"/>
+            <a:ext cx="155448" cy="155448"/>
+          </a:xfrm>
+          <a:prstGeom prst="roundRect">
+            <a:avLst>
+              <a:gd name="adj" fmla="val 29411"/>
+            </a:avLst>
+          </a:prstGeom>
+          <a:solidFill>
+            <a:srgbClr val="0066CC"/>
+          </a:solidFill>
+          <a:ln>
+            <a:noFill/>
+          </a:ln>
+          <a:effectLst/>
+        </p:spPr>
+        <p:style>
+          <a:lnRef idx="1">
+            <a:schemeClr val="accent1"/>
+          </a:lnRef>
+          <a:fillRef idx="3">
+            <a:schemeClr val="accent1"/>
+          </a:fillRef>
+          <a:effectRef idx="2">
+            <a:schemeClr val="accent1"/>
+          </a:effectRef>
+          <a:fontRef idx="minor">
+            <a:schemeClr val="lt1"/>
+          </a:fontRef>
+        </p:style>
+        <p:txBody>
+          <a:bodyPr rtlCol="0" anchor="ctr" wrap="square"/>
+          <a:lstStyle/>
+          <a:p>
+            <a:pPr algn="ctr"/>
+          </a:p>
+        </p:txBody>
+      </p:sp>
+      <p:sp>
+        <p:nvSpPr>
+          <p:cNvPr id="76" name="Rounded Rectangle 75"/>
+          <p:cNvSpPr/>
+          <p:nvPr/>
+        </p:nvSpPr>
+        <p:spPr>
+          <a:xfrm>
+            <a:off x="4025285" y="2878074"/>
+            <a:ext cx="155448" cy="155448"/>
+          </a:xfrm>
+          <a:prstGeom prst="roundRect">
+            <a:avLst>
+              <a:gd name="adj" fmla="val 29411"/>
+            </a:avLst>
+          </a:prstGeom>
+          <a:solidFill>
+            <a:srgbClr val="0066CC"/>
+          </a:solidFill>
+          <a:ln>
+            <a:noFill/>
+          </a:ln>
+          <a:effectLst/>
+        </p:spPr>
+        <p:style>
+          <a:lnRef idx="1">
+            <a:schemeClr val="accent1"/>
+          </a:lnRef>
+          <a:fillRef idx="3">
+            <a:schemeClr val="accent1"/>
+          </a:fillRef>
+          <a:effectRef idx="2">
+            <a:schemeClr val="accent1"/>
+          </a:effectRef>
+          <a:fontRef idx="minor">
+            <a:schemeClr val="lt1"/>
+          </a:fontRef>
+        </p:style>
+        <p:txBody>
+          <a:bodyPr rtlCol="0" anchor="ctr" wrap="square"/>
+          <a:lstStyle/>
+          <a:p>
+            <a:pPr algn="ctr"/>
+          </a:p>
+        </p:txBody>
+      </p:sp>
+      <p:sp>
+        <p:nvSpPr>
+          <p:cNvPr id="77" name="Rounded Rectangle 76"/>
+          <p:cNvSpPr/>
+          <p:nvPr/>
+        </p:nvSpPr>
+        <p:spPr>
+          <a:xfrm>
+            <a:off x="4497404" y="2878074"/>
+            <a:ext cx="155448" cy="155448"/>
+          </a:xfrm>
+          <a:prstGeom prst="roundRect">
+            <a:avLst>
+              <a:gd name="adj" fmla="val 29411"/>
+            </a:avLst>
+          </a:prstGeom>
+          <a:solidFill>
+            <a:srgbClr val="0066CC"/>
+          </a:solidFill>
+          <a:ln>
+            <a:noFill/>
+          </a:ln>
+          <a:effectLst/>
+        </p:spPr>
+        <p:style>
+          <a:lnRef idx="1">
+            <a:schemeClr val="accent1"/>
+          </a:lnRef>
+          <a:fillRef idx="3">
+            <a:schemeClr val="accent1"/>
+          </a:fillRef>
+          <a:effectRef idx="2">
+            <a:schemeClr val="accent1"/>
+          </a:effectRef>
+          <a:fontRef idx="minor">
+            <a:schemeClr val="lt1"/>
+          </a:fontRef>
+        </p:style>
+        <p:txBody>
+          <a:bodyPr rtlCol="0" anchor="ctr" wrap="square"/>
+          <a:lstStyle/>
+          <a:p>
+            <a:pPr algn="ctr"/>
+          </a:p>
+        </p:txBody>
+      </p:sp>
+      <p:sp>
+        <p:nvSpPr>
+          <p:cNvPr id="78" name="Rounded Rectangle 77"/>
+          <p:cNvSpPr/>
+          <p:nvPr/>
+        </p:nvSpPr>
+        <p:spPr>
+          <a:xfrm>
+            <a:off x="4969523" y="2878074"/>
+            <a:ext cx="155448" cy="155448"/>
+          </a:xfrm>
+          <a:prstGeom prst="roundRect">
+            <a:avLst>
+              <a:gd name="adj" fmla="val 29411"/>
+            </a:avLst>
+          </a:prstGeom>
+          <a:solidFill>
+            <a:srgbClr val="0066CC"/>
+          </a:solidFill>
+          <a:ln>
+            <a:noFill/>
+          </a:ln>
+          <a:effectLst/>
+        </p:spPr>
+        <p:style>
+          <a:lnRef idx="1">
+            <a:schemeClr val="accent1"/>
+          </a:lnRef>
+          <a:fillRef idx="3">
+            <a:schemeClr val="accent1"/>
+          </a:fillRef>
+          <a:effectRef idx="2">
+            <a:schemeClr val="accent1"/>
+          </a:effectRef>
+          <a:fontRef idx="minor">
+            <a:schemeClr val="lt1"/>
+          </a:fontRef>
+        </p:style>
+        <p:txBody>
+          <a:bodyPr rtlCol="0" anchor="ctr" wrap="square"/>
+          <a:lstStyle/>
+          <a:p>
+            <a:pPr algn="ctr"/>
+          </a:p>
+        </p:txBody>
+      </p:sp>
+      <p:sp>
+        <p:nvSpPr>
+          <p:cNvPr id="79" name="Rounded Rectangle 78"/>
+          <p:cNvSpPr/>
+          <p:nvPr/>
+        </p:nvSpPr>
+        <p:spPr>
+          <a:xfrm>
+            <a:off x="5441642" y="2878074"/>
+            <a:ext cx="155448" cy="155448"/>
+          </a:xfrm>
+          <a:prstGeom prst="roundRect">
+            <a:avLst>
+              <a:gd name="adj" fmla="val 29411"/>
+            </a:avLst>
+          </a:prstGeom>
+          <a:solidFill>
+            <a:srgbClr val="CBBCF6"/>
+          </a:solidFill>
+          <a:ln>
+            <a:noFill/>
+          </a:ln>
+          <a:effectLst/>
+        </p:spPr>
+        <p:style>
+          <a:lnRef idx="1">
+            <a:schemeClr val="accent1"/>
+          </a:lnRef>
+          <a:fillRef idx="3">
+            <a:schemeClr val="accent1"/>
+          </a:fillRef>
+          <a:effectRef idx="2">
+            <a:schemeClr val="accent1"/>
+          </a:effectRef>
+          <a:fontRef idx="minor">
+            <a:schemeClr val="lt1"/>
+          </a:fontRef>
+        </p:style>
+        <p:txBody>
+          <a:bodyPr rtlCol="0" anchor="ctr" wrap="square"/>
+          <a:lstStyle/>
+          <a:p>
+            <a:pPr algn="ctr"/>
+          </a:p>
+        </p:txBody>
+      </p:sp>
+      <p:sp>
+        <p:nvSpPr>
+          <p:cNvPr id="80" name="Rounded Rectangle 79"/>
+          <p:cNvSpPr/>
+          <p:nvPr/>
+        </p:nvSpPr>
+        <p:spPr>
+          <a:xfrm>
+            <a:off x="5913761" y="2878074"/>
+            <a:ext cx="155448" cy="155448"/>
+          </a:xfrm>
+          <a:prstGeom prst="roundRect">
+            <a:avLst>
+              <a:gd name="adj" fmla="val 29411"/>
+            </a:avLst>
+          </a:prstGeom>
+          <a:solidFill>
+            <a:srgbClr val="CBBCF6"/>
+          </a:solidFill>
+          <a:ln>
+            <a:noFill/>
+          </a:ln>
+          <a:effectLst/>
+        </p:spPr>
+        <p:style>
+          <a:lnRef idx="1">
+            <a:schemeClr val="accent1"/>
+          </a:lnRef>
+          <a:fillRef idx="3">
+            <a:schemeClr val="accent1"/>
+          </a:fillRef>
+          <a:effectRef idx="2">
+            <a:schemeClr val="accent1"/>
+          </a:effectRef>
+          <a:fontRef idx="minor">
+            <a:schemeClr val="lt1"/>
+          </a:fontRef>
+        </p:style>
+        <p:txBody>
+          <a:bodyPr rtlCol="0" anchor="ctr" wrap="square"/>
+          <a:lstStyle/>
+          <a:p>
+            <a:pPr algn="ctr"/>
+          </a:p>
+        </p:txBody>
+      </p:sp>
+      <p:sp>
+        <p:nvSpPr>
+          <p:cNvPr id="81" name="Rounded Rectangle 80"/>
+          <p:cNvSpPr/>
+          <p:nvPr/>
+        </p:nvSpPr>
+        <p:spPr>
+          <a:xfrm>
+            <a:off x="6385880" y="2878074"/>
+            <a:ext cx="155448" cy="155448"/>
+          </a:xfrm>
+          <a:prstGeom prst="roundRect">
+            <a:avLst>
+              <a:gd name="adj" fmla="val 29411"/>
+            </a:avLst>
+          </a:prstGeom>
+          <a:solidFill>
+            <a:srgbClr val="0066CC"/>
+          </a:solidFill>
+          <a:ln>
+            <a:noFill/>
+          </a:ln>
+          <a:effectLst/>
+        </p:spPr>
+        <p:style>
+          <a:lnRef idx="1">
+            <a:schemeClr val="accent1"/>
+          </a:lnRef>
+          <a:fillRef idx="3">
+            <a:schemeClr val="accent1"/>
+          </a:fillRef>
+          <a:effectRef idx="2">
+            <a:schemeClr val="accent1"/>
+          </a:effectRef>
+          <a:fontRef idx="minor">
+            <a:schemeClr val="lt1"/>
+          </a:fontRef>
+        </p:style>
+        <p:txBody>
+          <a:bodyPr rtlCol="0" anchor="ctr" wrap="square"/>
+          <a:lstStyle/>
+          <a:p>
+            <a:pPr algn="ctr"/>
+          </a:p>
+        </p:txBody>
+      </p:sp>
+      <p:sp>
+        <p:nvSpPr>
+          <p:cNvPr id="82" name="TextBox 81"/>
+          <p:cNvSpPr txBox="1"/>
+          <p:nvPr/>
+        </p:nvSpPr>
+        <p:spPr>
+          <a:xfrm>
+            <a:off x="822960" y="3127248"/>
+            <a:ext cx="1572768" cy="365760"/>
+          </a:xfrm>
+          <a:prstGeom prst="rect">
+            <a:avLst/>
+          </a:prstGeom>
+          <a:noFill/>
+        </p:spPr>
+        <p:txBody>
+          <a:bodyPr wrap="square" anchor="t" lIns="0" tIns="0" rIns="0" bIns="0">
+            <a:spAutoFit/>
+          </a:bodyPr>
+          <a:lstStyle/>
+          <a:p>
+            <a:pPr algn="l">
+              <a:lnSpc>
+                <a:spcPct val="100000"/>
+              </a:lnSpc>
+            </a:pPr>
+            <a:r>
+              <a:rPr sz="750" b="0">
+                <a:solidFill>
+                  <a:srgbClr val="0E112A"/>
+                </a:solidFill>
+                <a:latin typeface="Segoe UI"/>
+              </a:rPr>
+              <a:t>Confirmação</a:t>
+            </a:r>
+          </a:p>
+        </p:txBody>
+      </p:sp>
+      <p:sp>
+        <p:nvSpPr>
+          <p:cNvPr id="83" name="Rounded Rectangle 82"/>
+          <p:cNvSpPr/>
+          <p:nvPr/>
+        </p:nvSpPr>
+        <p:spPr>
+          <a:xfrm>
+            <a:off x="2608927" y="3138678"/>
+            <a:ext cx="155448" cy="155448"/>
+          </a:xfrm>
+          <a:prstGeom prst="roundRect">
+            <a:avLst>
+              <a:gd name="adj" fmla="val 29411"/>
+            </a:avLst>
+          </a:prstGeom>
+          <a:solidFill>
+            <a:srgbClr val="CBBCF6"/>
+          </a:solidFill>
+          <a:ln>
+            <a:noFill/>
+          </a:ln>
+          <a:effectLst/>
+        </p:spPr>
+        <p:style>
+          <a:lnRef idx="1">
+            <a:schemeClr val="accent1"/>
+          </a:lnRef>
+          <a:fillRef idx="3">
+            <a:schemeClr val="accent1"/>
+          </a:fillRef>
+          <a:effectRef idx="2">
+            <a:schemeClr val="accent1"/>
+          </a:effectRef>
+          <a:fontRef idx="minor">
+            <a:schemeClr val="lt1"/>
+          </a:fontRef>
+        </p:style>
+        <p:txBody>
+          <a:bodyPr rtlCol="0" anchor="ctr" wrap="square"/>
+          <a:lstStyle/>
+          <a:p>
+            <a:pPr algn="ctr"/>
+          </a:p>
+        </p:txBody>
+      </p:sp>
+      <p:sp>
+        <p:nvSpPr>
+          <p:cNvPr id="84" name="Rounded Rectangle 83"/>
+          <p:cNvSpPr/>
+          <p:nvPr/>
+        </p:nvSpPr>
+        <p:spPr>
+          <a:xfrm>
+            <a:off x="2608927" y="3138678"/>
+            <a:ext cx="77724" cy="155448"/>
+          </a:xfrm>
+          <a:prstGeom prst="roundRect">
+            <a:avLst>
+              <a:gd name="adj" fmla="val 58823"/>
+            </a:avLst>
+          </a:prstGeom>
+          <a:solidFill>
+            <a:srgbClr val="8B5CF6"/>
+          </a:solidFill>
+          <a:ln>
+            <a:noFill/>
+          </a:ln>
+          <a:effectLst/>
+        </p:spPr>
+        <p:style>
+          <a:lnRef idx="1">
+            <a:schemeClr val="accent1"/>
+          </a:lnRef>
+          <a:fillRef idx="3">
+            <a:schemeClr val="accent1"/>
+          </a:fillRef>
+          <a:effectRef idx="2">
+            <a:schemeClr val="accent1"/>
+          </a:effectRef>
+          <a:fontRef idx="minor">
+            <a:schemeClr val="lt1"/>
+          </a:fontRef>
+        </p:style>
+        <p:txBody>
+          <a:bodyPr rtlCol="0" anchor="ctr" wrap="square"/>
+          <a:lstStyle/>
+          <a:p>
+            <a:pPr algn="ctr"/>
+          </a:p>
+        </p:txBody>
+      </p:sp>
+      <p:sp>
+        <p:nvSpPr>
+          <p:cNvPr id="85" name="Rounded Rectangle 84"/>
+          <p:cNvSpPr/>
+          <p:nvPr/>
+        </p:nvSpPr>
+        <p:spPr>
+          <a:xfrm>
+            <a:off x="3081046" y="3138678"/>
+            <a:ext cx="155448" cy="155448"/>
+          </a:xfrm>
+          <a:prstGeom prst="roundRect">
+            <a:avLst>
+              <a:gd name="adj" fmla="val 29411"/>
+            </a:avLst>
+          </a:prstGeom>
+          <a:solidFill>
+            <a:srgbClr val="CBBCF6"/>
+          </a:solidFill>
+          <a:ln>
+            <a:noFill/>
+          </a:ln>
+          <a:effectLst/>
+        </p:spPr>
+        <p:style>
+          <a:lnRef idx="1">
+            <a:schemeClr val="accent1"/>
+          </a:lnRef>
+          <a:fillRef idx="3">
+            <a:schemeClr val="accent1"/>
+          </a:fillRef>
+          <a:effectRef idx="2">
+            <a:schemeClr val="accent1"/>
+          </a:effectRef>
+          <a:fontRef idx="minor">
+            <a:schemeClr val="lt1"/>
+          </a:fontRef>
+        </p:style>
+        <p:txBody>
+          <a:bodyPr rtlCol="0" anchor="ctr" wrap="square"/>
+          <a:lstStyle/>
+          <a:p>
+            <a:pPr algn="ctr"/>
+          </a:p>
+        </p:txBody>
+      </p:sp>
+      <p:sp>
+        <p:nvSpPr>
+          <p:cNvPr id="86" name="Rounded Rectangle 85"/>
+          <p:cNvSpPr/>
+          <p:nvPr/>
+        </p:nvSpPr>
+        <p:spPr>
+          <a:xfrm>
+            <a:off x="3081046" y="3138678"/>
+            <a:ext cx="77724" cy="155448"/>
+          </a:xfrm>
+          <a:prstGeom prst="roundRect">
+            <a:avLst>
+              <a:gd name="adj" fmla="val 58823"/>
+            </a:avLst>
+          </a:prstGeom>
+          <a:solidFill>
+            <a:srgbClr val="8B5CF6"/>
+          </a:solidFill>
+          <a:ln>
+            <a:noFill/>
+          </a:ln>
+          <a:effectLst/>
+        </p:spPr>
+        <p:style>
+          <a:lnRef idx="1">
+            <a:schemeClr val="accent1"/>
+          </a:lnRef>
+          <a:fillRef idx="3">
+            <a:schemeClr val="accent1"/>
+          </a:fillRef>
+          <a:effectRef idx="2">
+            <a:schemeClr val="accent1"/>
+          </a:effectRef>
+          <a:fontRef idx="minor">
+            <a:schemeClr val="lt1"/>
+          </a:fontRef>
+        </p:style>
+        <p:txBody>
+          <a:bodyPr rtlCol="0" anchor="ctr" wrap="square"/>
+          <a:lstStyle/>
+          <a:p>
+            <a:pPr algn="ctr"/>
+          </a:p>
+        </p:txBody>
+      </p:sp>
+      <p:sp>
+        <p:nvSpPr>
+          <p:cNvPr id="87" name="Rounded Rectangle 86"/>
+          <p:cNvSpPr/>
+          <p:nvPr/>
+        </p:nvSpPr>
+        <p:spPr>
+          <a:xfrm>
+            <a:off x="3553165" y="3138678"/>
+            <a:ext cx="155448" cy="155448"/>
+          </a:xfrm>
+          <a:prstGeom prst="roundRect">
+            <a:avLst>
+              <a:gd name="adj" fmla="val 29411"/>
+            </a:avLst>
+          </a:prstGeom>
+          <a:solidFill>
+            <a:srgbClr val="B9C0D0"/>
+          </a:solidFill>
+          <a:ln>
+            <a:noFill/>
+          </a:ln>
+          <a:effectLst/>
+        </p:spPr>
+        <p:style>
+          <a:lnRef idx="1">
+            <a:schemeClr val="accent1"/>
+          </a:lnRef>
+          <a:fillRef idx="3">
+            <a:schemeClr val="accent1"/>
+          </a:fillRef>
+          <a:effectRef idx="2">
+            <a:schemeClr val="accent1"/>
+          </a:effectRef>
+          <a:fontRef idx="minor">
+            <a:schemeClr val="lt1"/>
+          </a:fontRef>
+        </p:style>
+        <p:txBody>
+          <a:bodyPr rtlCol="0" anchor="ctr" wrap="square"/>
+          <a:lstStyle/>
+          <a:p>
+            <a:pPr algn="ctr"/>
+          </a:p>
+        </p:txBody>
+      </p:sp>
+      <p:sp>
+        <p:nvSpPr>
+          <p:cNvPr id="88" name="Rounded Rectangle 87"/>
+          <p:cNvSpPr/>
+          <p:nvPr/>
+        </p:nvSpPr>
+        <p:spPr>
+          <a:xfrm>
+            <a:off x="4025285" y="3138678"/>
+            <a:ext cx="155448" cy="155448"/>
+          </a:xfrm>
+          <a:prstGeom prst="roundRect">
+            <a:avLst>
+              <a:gd name="adj" fmla="val 29411"/>
+            </a:avLst>
+          </a:prstGeom>
+          <a:solidFill>
+            <a:srgbClr val="0066CC"/>
+          </a:solidFill>
+          <a:ln>
+            <a:noFill/>
+          </a:ln>
+          <a:effectLst/>
+        </p:spPr>
+        <p:style>
+          <a:lnRef idx="1">
+            <a:schemeClr val="accent1"/>
+          </a:lnRef>
+          <a:fillRef idx="3">
+            <a:schemeClr val="accent1"/>
+          </a:fillRef>
+          <a:effectRef idx="2">
+            <a:schemeClr val="accent1"/>
+          </a:effectRef>
+          <a:fontRef idx="minor">
+            <a:schemeClr val="lt1"/>
+          </a:fontRef>
+        </p:style>
+        <p:txBody>
+          <a:bodyPr rtlCol="0" anchor="ctr" wrap="square"/>
+          <a:lstStyle/>
+          <a:p>
+            <a:pPr algn="ctr"/>
+          </a:p>
+        </p:txBody>
+      </p:sp>
+      <p:sp>
+        <p:nvSpPr>
+          <p:cNvPr id="89" name="Rounded Rectangle 88"/>
+          <p:cNvSpPr/>
+          <p:nvPr/>
+        </p:nvSpPr>
+        <p:spPr>
+          <a:xfrm>
+            <a:off x="4497404" y="3138678"/>
+            <a:ext cx="155448" cy="155448"/>
+          </a:xfrm>
+          <a:prstGeom prst="roundRect">
+            <a:avLst>
+              <a:gd name="adj" fmla="val 29411"/>
+            </a:avLst>
+          </a:prstGeom>
+          <a:solidFill>
+            <a:srgbClr val="B9C0D0"/>
+          </a:solidFill>
+          <a:ln>
+            <a:noFill/>
+          </a:ln>
+          <a:effectLst/>
+        </p:spPr>
+        <p:style>
+          <a:lnRef idx="1">
+            <a:schemeClr val="accent1"/>
+          </a:lnRef>
+          <a:fillRef idx="3">
+            <a:schemeClr val="accent1"/>
+          </a:fillRef>
+          <a:effectRef idx="2">
+            <a:schemeClr val="accent1"/>
+          </a:effectRef>
+          <a:fontRef idx="minor">
+            <a:schemeClr val="lt1"/>
+          </a:fontRef>
+        </p:style>
+        <p:txBody>
+          <a:bodyPr rtlCol="0" anchor="ctr" wrap="square"/>
+          <a:lstStyle/>
+          <a:p>
+            <a:pPr algn="ctr"/>
+          </a:p>
+        </p:txBody>
+      </p:sp>
+      <p:sp>
+        <p:nvSpPr>
+          <p:cNvPr id="90" name="Rounded Rectangle 89"/>
+          <p:cNvSpPr/>
+          <p:nvPr/>
+        </p:nvSpPr>
+        <p:spPr>
+          <a:xfrm>
+            <a:off x="4969523" y="3138678"/>
+            <a:ext cx="155448" cy="155448"/>
+          </a:xfrm>
+          <a:prstGeom prst="roundRect">
+            <a:avLst>
+              <a:gd name="adj" fmla="val 29411"/>
+            </a:avLst>
+          </a:prstGeom>
+          <a:solidFill>
+            <a:srgbClr val="0066CC"/>
+          </a:solidFill>
+          <a:ln>
+            <a:noFill/>
+          </a:ln>
+          <a:effectLst/>
+        </p:spPr>
+        <p:style>
+          <a:lnRef idx="1">
+            <a:schemeClr val="accent1"/>
+          </a:lnRef>
+          <a:fillRef idx="3">
+            <a:schemeClr val="accent1"/>
+          </a:fillRef>
+          <a:effectRef idx="2">
+            <a:schemeClr val="accent1"/>
+          </a:effectRef>
+          <a:fontRef idx="minor">
+            <a:schemeClr val="lt1"/>
+          </a:fontRef>
+        </p:style>
+        <p:txBody>
+          <a:bodyPr rtlCol="0" anchor="ctr" wrap="square"/>
+          <a:lstStyle/>
+          <a:p>
+            <a:pPr algn="ctr"/>
+          </a:p>
+        </p:txBody>
+      </p:sp>
+      <p:sp>
+        <p:nvSpPr>
+          <p:cNvPr id="91" name="Rounded Rectangle 90"/>
+          <p:cNvSpPr/>
+          <p:nvPr/>
+        </p:nvSpPr>
+        <p:spPr>
+          <a:xfrm>
+            <a:off x="5441642" y="3138678"/>
+            <a:ext cx="155448" cy="155448"/>
+          </a:xfrm>
+          <a:prstGeom prst="roundRect">
+            <a:avLst>
+              <a:gd name="adj" fmla="val 29411"/>
+            </a:avLst>
+          </a:prstGeom>
+          <a:solidFill>
+            <a:srgbClr val="CBBCF6"/>
+          </a:solidFill>
+          <a:ln>
+            <a:noFill/>
+          </a:ln>
+          <a:effectLst/>
+        </p:spPr>
+        <p:style>
+          <a:lnRef idx="1">
+            <a:schemeClr val="accent1"/>
+          </a:lnRef>
+          <a:fillRef idx="3">
+            <a:schemeClr val="accent1"/>
+          </a:fillRef>
+          <a:effectRef idx="2">
+            <a:schemeClr val="accent1"/>
+          </a:effectRef>
+          <a:fontRef idx="minor">
+            <a:schemeClr val="lt1"/>
+          </a:fontRef>
+        </p:style>
+        <p:txBody>
+          <a:bodyPr rtlCol="0" anchor="ctr" wrap="square"/>
+          <a:lstStyle/>
+          <a:p>
+            <a:pPr algn="ctr"/>
+          </a:p>
+        </p:txBody>
+      </p:sp>
+      <p:sp>
+        <p:nvSpPr>
+          <p:cNvPr id="92" name="Rounded Rectangle 91"/>
+          <p:cNvSpPr/>
+          <p:nvPr/>
+        </p:nvSpPr>
+        <p:spPr>
+          <a:xfrm>
+            <a:off x="5913761" y="3138678"/>
+            <a:ext cx="155448" cy="155448"/>
+          </a:xfrm>
+          <a:prstGeom prst="roundRect">
+            <a:avLst>
+              <a:gd name="adj" fmla="val 29411"/>
+            </a:avLst>
+          </a:prstGeom>
+          <a:solidFill>
+            <a:srgbClr val="0066CC"/>
+          </a:solidFill>
+          <a:ln>
+            <a:noFill/>
+          </a:ln>
+          <a:effectLst/>
+        </p:spPr>
+        <p:style>
+          <a:lnRef idx="1">
+            <a:schemeClr val="accent1"/>
+          </a:lnRef>
+          <a:fillRef idx="3">
+            <a:schemeClr val="accent1"/>
+          </a:fillRef>
+          <a:effectRef idx="2">
+            <a:schemeClr val="accent1"/>
+          </a:effectRef>
+          <a:fontRef idx="minor">
+            <a:schemeClr val="lt1"/>
+          </a:fontRef>
+        </p:style>
+        <p:txBody>
+          <a:bodyPr rtlCol="0" anchor="ctr" wrap="square"/>
+          <a:lstStyle/>
+          <a:p>
+            <a:pPr algn="ctr"/>
+          </a:p>
+        </p:txBody>
+      </p:sp>
+      <p:sp>
+        <p:nvSpPr>
+          <p:cNvPr id="93" name="Rounded Rectangle 92"/>
+          <p:cNvSpPr/>
+          <p:nvPr/>
+        </p:nvSpPr>
+        <p:spPr>
+          <a:xfrm>
+            <a:off x="6385880" y="3138678"/>
+            <a:ext cx="155448" cy="155448"/>
+          </a:xfrm>
+          <a:prstGeom prst="roundRect">
+            <a:avLst>
+              <a:gd name="adj" fmla="val 29411"/>
+            </a:avLst>
+          </a:prstGeom>
+          <a:solidFill>
+            <a:srgbClr val="0066CC"/>
+          </a:solidFill>
+          <a:ln>
+            <a:noFill/>
+          </a:ln>
+          <a:effectLst/>
+        </p:spPr>
+        <p:style>
+          <a:lnRef idx="1">
+            <a:schemeClr val="accent1"/>
+          </a:lnRef>
+          <a:fillRef idx="3">
+            <a:schemeClr val="accent1"/>
+          </a:fillRef>
+          <a:effectRef idx="2">
+            <a:schemeClr val="accent1"/>
+          </a:effectRef>
+          <a:fontRef idx="minor">
+            <a:schemeClr val="lt1"/>
+          </a:fontRef>
+        </p:style>
+        <p:txBody>
+          <a:bodyPr rtlCol="0" anchor="ctr" wrap="square"/>
+          <a:lstStyle/>
+          <a:p>
+            <a:pPr algn="ctr"/>
+          </a:p>
+        </p:txBody>
+      </p:sp>
+      <p:sp>
+        <p:nvSpPr>
+          <p:cNvPr id="94" name="Rounded Rectangle 93"/>
+          <p:cNvSpPr/>
+          <p:nvPr/>
+        </p:nvSpPr>
+        <p:spPr>
+          <a:xfrm>
+            <a:off x="7330119" y="3138678"/>
+            <a:ext cx="155448" cy="155448"/>
+          </a:xfrm>
+          <a:prstGeom prst="roundRect">
+            <a:avLst>
+              <a:gd name="adj" fmla="val 29411"/>
+            </a:avLst>
+          </a:prstGeom>
+          <a:solidFill>
+            <a:srgbClr val="CBBCF6"/>
+          </a:solidFill>
+          <a:ln>
+            <a:noFill/>
+          </a:ln>
+          <a:effectLst/>
+        </p:spPr>
+        <p:style>
+          <a:lnRef idx="1">
+            <a:schemeClr val="accent1"/>
+          </a:lnRef>
+          <a:fillRef idx="3">
+            <a:schemeClr val="accent1"/>
+          </a:fillRef>
+          <a:effectRef idx="2">
+            <a:schemeClr val="accent1"/>
+          </a:effectRef>
+          <a:fontRef idx="minor">
+            <a:schemeClr val="lt1"/>
+          </a:fontRef>
+        </p:style>
+        <p:txBody>
+          <a:bodyPr rtlCol="0" anchor="ctr" wrap="square"/>
+          <a:lstStyle/>
+          <a:p>
+            <a:pPr algn="ctr"/>
+          </a:p>
+        </p:txBody>
+      </p:sp>
+      <p:sp>
+        <p:nvSpPr>
+          <p:cNvPr id="95" name="Rounded Rectangle 94"/>
+          <p:cNvSpPr/>
+          <p:nvPr/>
+        </p:nvSpPr>
+        <p:spPr>
+          <a:xfrm>
+            <a:off x="7802238" y="3138678"/>
+            <a:ext cx="155448" cy="155448"/>
+          </a:xfrm>
+          <a:prstGeom prst="roundRect">
+            <a:avLst>
+              <a:gd name="adj" fmla="val 29411"/>
+            </a:avLst>
+          </a:prstGeom>
+          <a:solidFill>
+            <a:srgbClr val="CBBCF6"/>
+          </a:solidFill>
+          <a:ln>
+            <a:noFill/>
+          </a:ln>
+          <a:effectLst/>
+        </p:spPr>
+        <p:style>
+          <a:lnRef idx="1">
+            <a:schemeClr val="accent1"/>
+          </a:lnRef>
+          <a:fillRef idx="3">
+            <a:schemeClr val="accent1"/>
+          </a:fillRef>
+          <a:effectRef idx="2">
+            <a:schemeClr val="accent1"/>
+          </a:effectRef>
+          <a:fontRef idx="minor">
+            <a:schemeClr val="lt1"/>
+          </a:fontRef>
+        </p:style>
+        <p:txBody>
+          <a:bodyPr rtlCol="0" anchor="ctr" wrap="square"/>
+          <a:lstStyle/>
+          <a:p>
+            <a:pPr algn="ctr"/>
+          </a:p>
+        </p:txBody>
+      </p:sp>
+      <p:sp>
+        <p:nvSpPr>
+          <p:cNvPr id="96" name="Rounded Rectangle 95"/>
+          <p:cNvSpPr/>
+          <p:nvPr/>
+        </p:nvSpPr>
+        <p:spPr>
+          <a:xfrm>
+            <a:off x="8274357" y="3138678"/>
+            <a:ext cx="155448" cy="155448"/>
+          </a:xfrm>
+          <a:prstGeom prst="roundRect">
+            <a:avLst>
+              <a:gd name="adj" fmla="val 29411"/>
+            </a:avLst>
+          </a:prstGeom>
+          <a:solidFill>
+            <a:srgbClr val="CBBCF6"/>
+          </a:solidFill>
+          <a:ln>
+            <a:noFill/>
+          </a:ln>
+          <a:effectLst/>
+        </p:spPr>
+        <p:style>
+          <a:lnRef idx="1">
+            <a:schemeClr val="accent1"/>
+          </a:lnRef>
+          <a:fillRef idx="3">
+            <a:schemeClr val="accent1"/>
+          </a:fillRef>
+          <a:effectRef idx="2">
+            <a:schemeClr val="accent1"/>
+          </a:effectRef>
+          <a:fontRef idx="minor">
+            <a:schemeClr val="lt1"/>
+          </a:fontRef>
+        </p:style>
+        <p:txBody>
+          <a:bodyPr rtlCol="0" anchor="ctr" wrap="square"/>
+          <a:lstStyle/>
+          <a:p>
+            <a:pPr algn="ctr"/>
+          </a:p>
+        </p:txBody>
+      </p:sp>
+      <p:sp>
+        <p:nvSpPr>
+          <p:cNvPr id="97" name="Rounded Rectangle 96"/>
+          <p:cNvSpPr/>
+          <p:nvPr/>
+        </p:nvSpPr>
+        <p:spPr>
+          <a:xfrm>
+            <a:off x="8746476" y="3138678"/>
+            <a:ext cx="155448" cy="155448"/>
+          </a:xfrm>
+          <a:prstGeom prst="roundRect">
+            <a:avLst>
+              <a:gd name="adj" fmla="val 29411"/>
+            </a:avLst>
+          </a:prstGeom>
+          <a:solidFill>
+            <a:srgbClr val="CBBCF6"/>
+          </a:solidFill>
+          <a:ln>
+            <a:noFill/>
+          </a:ln>
+          <a:effectLst/>
+        </p:spPr>
+        <p:style>
+          <a:lnRef idx="1">
+            <a:schemeClr val="accent1"/>
+          </a:lnRef>
+          <a:fillRef idx="3">
+            <a:schemeClr val="accent1"/>
+          </a:fillRef>
+          <a:effectRef idx="2">
+            <a:schemeClr val="accent1"/>
+          </a:effectRef>
+          <a:fontRef idx="minor">
+            <a:schemeClr val="lt1"/>
+          </a:fontRef>
+        </p:style>
+        <p:txBody>
+          <a:bodyPr rtlCol="0" anchor="ctr" wrap="square"/>
+          <a:lstStyle/>
+          <a:p>
+            <a:pPr algn="ctr"/>
+          </a:p>
+        </p:txBody>
+      </p:sp>
+      <p:sp>
+        <p:nvSpPr>
+          <p:cNvPr id="98" name="Rounded Rectangle 97"/>
+          <p:cNvSpPr/>
+          <p:nvPr/>
+        </p:nvSpPr>
+        <p:spPr>
+          <a:xfrm>
+            <a:off x="9218595" y="3138678"/>
+            <a:ext cx="155448" cy="155448"/>
+          </a:xfrm>
+          <a:prstGeom prst="roundRect">
+            <a:avLst>
+              <a:gd name="adj" fmla="val 29411"/>
+            </a:avLst>
+          </a:prstGeom>
+          <a:solidFill>
+            <a:srgbClr val="CBBCF6"/>
+          </a:solidFill>
+          <a:ln>
+            <a:noFill/>
+          </a:ln>
+          <a:effectLst/>
+        </p:spPr>
+        <p:style>
+          <a:lnRef idx="1">
+            <a:schemeClr val="accent1"/>
+          </a:lnRef>
+          <a:fillRef idx="3">
+            <a:schemeClr val="accent1"/>
+          </a:fillRef>
+          <a:effectRef idx="2">
+            <a:schemeClr val="accent1"/>
+          </a:effectRef>
+          <a:fontRef idx="minor">
+            <a:schemeClr val="lt1"/>
+          </a:fontRef>
+        </p:style>
+        <p:txBody>
+          <a:bodyPr rtlCol="0" anchor="ctr" wrap="square"/>
+          <a:lstStyle/>
+          <a:p>
+            <a:pPr algn="ctr"/>
+          </a:p>
+        </p:txBody>
+      </p:sp>
+      <p:sp>
+        <p:nvSpPr>
+          <p:cNvPr id="99" name="Rounded Rectangle 98"/>
+          <p:cNvSpPr/>
+          <p:nvPr/>
+        </p:nvSpPr>
+        <p:spPr>
+          <a:xfrm>
+            <a:off x="9690714" y="3138678"/>
+            <a:ext cx="155448" cy="155448"/>
+          </a:xfrm>
+          <a:prstGeom prst="roundRect">
+            <a:avLst>
+              <a:gd name="adj" fmla="val 29411"/>
+            </a:avLst>
+          </a:prstGeom>
+          <a:solidFill>
+            <a:srgbClr val="CBBCF6"/>
+          </a:solidFill>
+          <a:ln>
+            <a:noFill/>
+          </a:ln>
+          <a:effectLst/>
+        </p:spPr>
+        <p:style>
+          <a:lnRef idx="1">
+            <a:schemeClr val="accent1"/>
+          </a:lnRef>
+          <a:fillRef idx="3">
+            <a:schemeClr val="accent1"/>
+          </a:fillRef>
+          <a:effectRef idx="2">
+            <a:schemeClr val="accent1"/>
+          </a:effectRef>
+          <a:fontRef idx="minor">
+            <a:schemeClr val="lt1"/>
+          </a:fontRef>
+        </p:style>
+        <p:txBody>
+          <a:bodyPr rtlCol="0" anchor="ctr" wrap="square"/>
+          <a:lstStyle/>
+          <a:p>
+            <a:pPr algn="ctr"/>
+          </a:p>
+        </p:txBody>
+      </p:sp>
+      <p:sp>
+        <p:nvSpPr>
+          <p:cNvPr id="100" name="Rounded Rectangle 99"/>
+          <p:cNvSpPr/>
+          <p:nvPr/>
+        </p:nvSpPr>
+        <p:spPr>
+          <a:xfrm>
+            <a:off x="10162834" y="3138678"/>
+            <a:ext cx="155448" cy="155448"/>
+          </a:xfrm>
+          <a:prstGeom prst="roundRect">
+            <a:avLst>
+              <a:gd name="adj" fmla="val 29411"/>
+            </a:avLst>
+          </a:prstGeom>
+          <a:solidFill>
+            <a:srgbClr val="CBBCF6"/>
+          </a:solidFill>
+          <a:ln>
+            <a:noFill/>
+          </a:ln>
+          <a:effectLst/>
+        </p:spPr>
+        <p:style>
+          <a:lnRef idx="1">
+            <a:schemeClr val="accent1"/>
+          </a:lnRef>
+          <a:fillRef idx="3">
+            <a:schemeClr val="accent1"/>
+          </a:fillRef>
+          <a:effectRef idx="2">
+            <a:schemeClr val="accent1"/>
+          </a:effectRef>
+          <a:fontRef idx="minor">
+            <a:schemeClr val="lt1"/>
+          </a:fontRef>
+        </p:style>
+        <p:txBody>
+          <a:bodyPr rtlCol="0" anchor="ctr" wrap="square"/>
+          <a:lstStyle/>
+          <a:p>
+            <a:pPr algn="ctr"/>
+          </a:p>
+        </p:txBody>
+      </p:sp>
+      <p:sp>
+        <p:nvSpPr>
+          <p:cNvPr id="101" name="Rounded Rectangle 100"/>
+          <p:cNvSpPr/>
+          <p:nvPr/>
+        </p:nvSpPr>
+        <p:spPr>
+          <a:xfrm>
+            <a:off x="10634953" y="3138678"/>
+            <a:ext cx="155448" cy="155448"/>
+          </a:xfrm>
+          <a:prstGeom prst="roundRect">
+            <a:avLst>
+              <a:gd name="adj" fmla="val 29411"/>
+            </a:avLst>
+          </a:prstGeom>
+          <a:solidFill>
+            <a:srgbClr val="CBBCF6"/>
+          </a:solidFill>
+          <a:ln>
+            <a:noFill/>
+          </a:ln>
+          <a:effectLst/>
+        </p:spPr>
+        <p:style>
+          <a:lnRef idx="1">
+            <a:schemeClr val="accent1"/>
+          </a:lnRef>
+          <a:fillRef idx="3">
+            <a:schemeClr val="accent1"/>
+          </a:fillRef>
+          <a:effectRef idx="2">
+            <a:schemeClr val="accent1"/>
+          </a:effectRef>
+          <a:fontRef idx="minor">
+            <a:schemeClr val="lt1"/>
+          </a:fontRef>
+        </p:style>
+        <p:txBody>
+          <a:bodyPr rtlCol="0" anchor="ctr" wrap="square"/>
+          <a:lstStyle/>
+          <a:p>
+            <a:pPr algn="ctr"/>
+          </a:p>
+        </p:txBody>
+      </p:sp>
+      <p:sp>
+        <p:nvSpPr>
+          <p:cNvPr id="102" name="Rounded Rectangle 101"/>
+          <p:cNvSpPr/>
+          <p:nvPr/>
+        </p:nvSpPr>
+        <p:spPr>
+          <a:xfrm>
+            <a:off x="11107072" y="3138678"/>
+            <a:ext cx="155448" cy="155448"/>
+          </a:xfrm>
+          <a:prstGeom prst="roundRect">
+            <a:avLst>
+              <a:gd name="adj" fmla="val 29411"/>
+            </a:avLst>
+          </a:prstGeom>
+          <a:solidFill>
+            <a:srgbClr val="CBBCF6"/>
+          </a:solidFill>
+          <a:ln>
+            <a:noFill/>
+          </a:ln>
+          <a:effectLst/>
+        </p:spPr>
+        <p:style>
+          <a:lnRef idx="1">
+            <a:schemeClr val="accent1"/>
+          </a:lnRef>
+          <a:fillRef idx="3">
+            <a:schemeClr val="accent1"/>
+          </a:fillRef>
+          <a:effectRef idx="2">
+            <a:schemeClr val="accent1"/>
+          </a:effectRef>
+          <a:fontRef idx="minor">
+            <a:schemeClr val="lt1"/>
+          </a:fontRef>
+        </p:style>
+        <p:txBody>
+          <a:bodyPr rtlCol="0" anchor="ctr" wrap="square"/>
+          <a:lstStyle/>
+          <a:p>
+            <a:pPr algn="ctr"/>
+          </a:p>
+        </p:txBody>
+      </p:sp>
+      <p:sp>
+        <p:nvSpPr>
+          <p:cNvPr id="103" name="Rounded Rectangle 102"/>
+          <p:cNvSpPr/>
+          <p:nvPr/>
+        </p:nvSpPr>
+        <p:spPr>
+          <a:xfrm>
+            <a:off x="749808" y="3346704"/>
+            <a:ext cx="10671048" cy="260603"/>
+          </a:xfrm>
+          <a:prstGeom prst="roundRect">
+            <a:avLst>
+              <a:gd name="adj" fmla="val 17543"/>
+            </a:avLst>
+          </a:prstGeom>
+          <a:solidFill>
+            <a:srgbClr val="F3F5FA"/>
+          </a:solidFill>
+          <a:ln>
+            <a:noFill/>
+          </a:ln>
+          <a:effectLst/>
+        </p:spPr>
+        <p:style>
+          <a:lnRef idx="1">
+            <a:schemeClr val="accent1"/>
+          </a:lnRef>
+          <a:fillRef idx="3">
+            <a:schemeClr val="accent1"/>
+          </a:fillRef>
+          <a:effectRef idx="2">
+            <a:schemeClr val="accent1"/>
+          </a:effectRef>
+          <a:fontRef idx="minor">
+            <a:schemeClr val="lt1"/>
+          </a:fontRef>
+        </p:style>
+        <p:txBody>
+          <a:bodyPr rtlCol="0" anchor="ctr" wrap="square"/>
+          <a:lstStyle/>
+          <a:p>
+            <a:pPr algn="ctr"/>
+          </a:p>
+        </p:txBody>
+      </p:sp>
+      <p:sp>
+        <p:nvSpPr>
+          <p:cNvPr id="104" name="TextBox 103"/>
+          <p:cNvSpPr txBox="1"/>
+          <p:nvPr/>
+        </p:nvSpPr>
+        <p:spPr>
+          <a:xfrm>
+            <a:off x="822960" y="3387852"/>
+            <a:ext cx="1572768" cy="365760"/>
+          </a:xfrm>
+          <a:prstGeom prst="rect">
+            <a:avLst/>
+          </a:prstGeom>
+          <a:noFill/>
+        </p:spPr>
+        <p:txBody>
+          <a:bodyPr wrap="square" anchor="t" lIns="0" tIns="0" rIns="0" bIns="0">
+            <a:spAutoFit/>
+          </a:bodyPr>
+          <a:lstStyle/>
+          <a:p>
+            <a:pPr algn="l">
+              <a:lnSpc>
+                <a:spcPct val="100000"/>
+              </a:lnSpc>
+            </a:pPr>
+            <a:r>
+              <a:rPr sz="750" b="0">
+                <a:solidFill>
+                  <a:srgbClr val="0E112A"/>
+                </a:solidFill>
+                <a:latin typeface="Segoe UI"/>
+              </a:rPr>
+              <a:t>Recompra</a:t>
+            </a:r>
+          </a:p>
+        </p:txBody>
+      </p:sp>
+      <p:sp>
+        <p:nvSpPr>
+          <p:cNvPr id="105" name="Rounded Rectangle 104"/>
+          <p:cNvSpPr/>
+          <p:nvPr/>
+        </p:nvSpPr>
+        <p:spPr>
+          <a:xfrm>
+            <a:off x="2608927" y="3399282"/>
+            <a:ext cx="155448" cy="155448"/>
+          </a:xfrm>
+          <a:prstGeom prst="roundRect">
+            <a:avLst>
+              <a:gd name="adj" fmla="val 29411"/>
+            </a:avLst>
+          </a:prstGeom>
+          <a:solidFill>
+            <a:srgbClr val="CBBCF6"/>
+          </a:solidFill>
+          <a:ln>
+            <a:noFill/>
+          </a:ln>
+          <a:effectLst/>
+        </p:spPr>
+        <p:style>
+          <a:lnRef idx="1">
+            <a:schemeClr val="accent1"/>
+          </a:lnRef>
+          <a:fillRef idx="3">
+            <a:schemeClr val="accent1"/>
+          </a:fillRef>
+          <a:effectRef idx="2">
+            <a:schemeClr val="accent1"/>
+          </a:effectRef>
+          <a:fontRef idx="minor">
+            <a:schemeClr val="lt1"/>
+          </a:fontRef>
+        </p:style>
+        <p:txBody>
+          <a:bodyPr rtlCol="0" anchor="ctr" wrap="square"/>
+          <a:lstStyle/>
+          <a:p>
+            <a:pPr algn="ctr"/>
+          </a:p>
+        </p:txBody>
+      </p:sp>
+      <p:sp>
+        <p:nvSpPr>
+          <p:cNvPr id="106" name="Rounded Rectangle 105"/>
+          <p:cNvSpPr/>
+          <p:nvPr/>
+        </p:nvSpPr>
+        <p:spPr>
+          <a:xfrm>
+            <a:off x="3081046" y="3399282"/>
+            <a:ext cx="155448" cy="155448"/>
+          </a:xfrm>
+          <a:prstGeom prst="roundRect">
+            <a:avLst>
+              <a:gd name="adj" fmla="val 29411"/>
+            </a:avLst>
+          </a:prstGeom>
+          <a:solidFill>
+            <a:srgbClr val="CBBCF6"/>
+          </a:solidFill>
+          <a:ln>
+            <a:noFill/>
+          </a:ln>
+          <a:effectLst/>
+        </p:spPr>
+        <p:style>
+          <a:lnRef idx="1">
+            <a:schemeClr val="accent1"/>
+          </a:lnRef>
+          <a:fillRef idx="3">
+            <a:schemeClr val="accent1"/>
+          </a:fillRef>
+          <a:effectRef idx="2">
+            <a:schemeClr val="accent1"/>
+          </a:effectRef>
+          <a:fontRef idx="minor">
+            <a:schemeClr val="lt1"/>
+          </a:fontRef>
+        </p:style>
+        <p:txBody>
+          <a:bodyPr rtlCol="0" anchor="ctr" wrap="square"/>
+          <a:lstStyle/>
+          <a:p>
+            <a:pPr algn="ctr"/>
+          </a:p>
+        </p:txBody>
+      </p:sp>
+      <p:sp>
+        <p:nvSpPr>
+          <p:cNvPr id="107" name="Rounded Rectangle 106"/>
+          <p:cNvSpPr/>
+          <p:nvPr/>
+        </p:nvSpPr>
+        <p:spPr>
+          <a:xfrm>
+            <a:off x="3553165" y="3399282"/>
+            <a:ext cx="155448" cy="155448"/>
+          </a:xfrm>
+          <a:prstGeom prst="roundRect">
+            <a:avLst>
+              <a:gd name="adj" fmla="val 29411"/>
+            </a:avLst>
+          </a:prstGeom>
+          <a:solidFill>
+            <a:srgbClr val="B9C0D0"/>
+          </a:solidFill>
+          <a:ln>
+            <a:noFill/>
+          </a:ln>
+          <a:effectLst/>
+        </p:spPr>
+        <p:style>
+          <a:lnRef idx="1">
+            <a:schemeClr val="accent1"/>
+          </a:lnRef>
+          <a:fillRef idx="3">
+            <a:schemeClr val="accent1"/>
+          </a:fillRef>
+          <a:effectRef idx="2">
+            <a:schemeClr val="accent1"/>
+          </a:effectRef>
+          <a:fontRef idx="minor">
+            <a:schemeClr val="lt1"/>
+          </a:fontRef>
+        </p:style>
+        <p:txBody>
+          <a:bodyPr rtlCol="0" anchor="ctr" wrap="square"/>
+          <a:lstStyle/>
+          <a:p>
+            <a:pPr algn="ctr"/>
+          </a:p>
+        </p:txBody>
+      </p:sp>
+      <p:sp>
+        <p:nvSpPr>
+          <p:cNvPr id="108" name="Rounded Rectangle 107"/>
+          <p:cNvSpPr/>
+          <p:nvPr/>
+        </p:nvSpPr>
+        <p:spPr>
+          <a:xfrm>
+            <a:off x="4025285" y="3399282"/>
+            <a:ext cx="155448" cy="155448"/>
+          </a:xfrm>
+          <a:prstGeom prst="roundRect">
+            <a:avLst>
+              <a:gd name="adj" fmla="val 29411"/>
+            </a:avLst>
+          </a:prstGeom>
+          <a:solidFill>
+            <a:srgbClr val="B9C0D0"/>
+          </a:solidFill>
+          <a:ln>
+            <a:noFill/>
+          </a:ln>
+          <a:effectLst/>
+        </p:spPr>
+        <p:style>
+          <a:lnRef idx="1">
+            <a:schemeClr val="accent1"/>
+          </a:lnRef>
+          <a:fillRef idx="3">
+            <a:schemeClr val="accent1"/>
+          </a:fillRef>
+          <a:effectRef idx="2">
+            <a:schemeClr val="accent1"/>
+          </a:effectRef>
+          <a:fontRef idx="minor">
+            <a:schemeClr val="lt1"/>
+          </a:fontRef>
+        </p:style>
+        <p:txBody>
+          <a:bodyPr rtlCol="0" anchor="ctr" wrap="square"/>
+          <a:lstStyle/>
+          <a:p>
+            <a:pPr algn="ctr"/>
+          </a:p>
+        </p:txBody>
+      </p:sp>
+      <p:sp>
+        <p:nvSpPr>
+          <p:cNvPr id="109" name="Rounded Rectangle 108"/>
+          <p:cNvSpPr/>
+          <p:nvPr/>
+        </p:nvSpPr>
+        <p:spPr>
+          <a:xfrm>
+            <a:off x="4497404" y="3399282"/>
+            <a:ext cx="155448" cy="155448"/>
+          </a:xfrm>
+          <a:prstGeom prst="roundRect">
+            <a:avLst>
+              <a:gd name="adj" fmla="val 29411"/>
+            </a:avLst>
+          </a:prstGeom>
+          <a:solidFill>
+            <a:srgbClr val="B9C0D0"/>
+          </a:solidFill>
+          <a:ln>
+            <a:noFill/>
+          </a:ln>
+          <a:effectLst/>
+        </p:spPr>
+        <p:style>
+          <a:lnRef idx="1">
+            <a:schemeClr val="accent1"/>
+          </a:lnRef>
+          <a:fillRef idx="3">
+            <a:schemeClr val="accent1"/>
+          </a:fillRef>
+          <a:effectRef idx="2">
+            <a:schemeClr val="accent1"/>
+          </a:effectRef>
+          <a:fontRef idx="minor">
+            <a:schemeClr val="lt1"/>
+          </a:fontRef>
+        </p:style>
+        <p:txBody>
+          <a:bodyPr rtlCol="0" anchor="ctr" wrap="square"/>
+          <a:lstStyle/>
+          <a:p>
+            <a:pPr algn="ctr"/>
+          </a:p>
+        </p:txBody>
+      </p:sp>
+      <p:sp>
+        <p:nvSpPr>
+          <p:cNvPr id="110" name="Rounded Rectangle 109"/>
+          <p:cNvSpPr/>
+          <p:nvPr/>
+        </p:nvSpPr>
+        <p:spPr>
+          <a:xfrm>
+            <a:off x="4969523" y="3399282"/>
+            <a:ext cx="155448" cy="155448"/>
+          </a:xfrm>
+          <a:prstGeom prst="roundRect">
+            <a:avLst>
+              <a:gd name="adj" fmla="val 29411"/>
+            </a:avLst>
+          </a:prstGeom>
+          <a:solidFill>
+            <a:srgbClr val="CBBCF6"/>
+          </a:solidFill>
+          <a:ln>
+            <a:noFill/>
+          </a:ln>
+          <a:effectLst/>
+        </p:spPr>
+        <p:style>
+          <a:lnRef idx="1">
+            <a:schemeClr val="accent1"/>
+          </a:lnRef>
+          <a:fillRef idx="3">
+            <a:schemeClr val="accent1"/>
+          </a:fillRef>
+          <a:effectRef idx="2">
+            <a:schemeClr val="accent1"/>
+          </a:effectRef>
+          <a:fontRef idx="minor">
+            <a:schemeClr val="lt1"/>
+          </a:fontRef>
+        </p:style>
+        <p:txBody>
+          <a:bodyPr rtlCol="0" anchor="ctr" wrap="square"/>
+          <a:lstStyle/>
+          <a:p>
+            <a:pPr algn="ctr"/>
+          </a:p>
+        </p:txBody>
+      </p:sp>
+      <p:sp>
+        <p:nvSpPr>
+          <p:cNvPr id="111" name="Rounded Rectangle 110"/>
+          <p:cNvSpPr/>
+          <p:nvPr/>
+        </p:nvSpPr>
+        <p:spPr>
+          <a:xfrm>
+            <a:off x="5441642" y="3399282"/>
+            <a:ext cx="155448" cy="155448"/>
+          </a:xfrm>
+          <a:prstGeom prst="roundRect">
+            <a:avLst>
+              <a:gd name="adj" fmla="val 29411"/>
+            </a:avLst>
+          </a:prstGeom>
+          <a:solidFill>
+            <a:srgbClr val="CBBCF6"/>
+          </a:solidFill>
+          <a:ln>
+            <a:noFill/>
+          </a:ln>
+          <a:effectLst/>
+        </p:spPr>
+        <p:style>
+          <a:lnRef idx="1">
+            <a:schemeClr val="accent1"/>
+          </a:lnRef>
+          <a:fillRef idx="3">
+            <a:schemeClr val="accent1"/>
+          </a:fillRef>
+          <a:effectRef idx="2">
+            <a:schemeClr val="accent1"/>
+          </a:effectRef>
+          <a:fontRef idx="minor">
+            <a:schemeClr val="lt1"/>
+          </a:fontRef>
+        </p:style>
+        <p:txBody>
+          <a:bodyPr rtlCol="0" anchor="ctr" wrap="square"/>
+          <a:lstStyle/>
+          <a:p>
+            <a:pPr algn="ctr"/>
+          </a:p>
+        </p:txBody>
+      </p:sp>
+      <p:sp>
+        <p:nvSpPr>
+          <p:cNvPr id="112" name="Rounded Rectangle 111"/>
+          <p:cNvSpPr/>
+          <p:nvPr/>
+        </p:nvSpPr>
+        <p:spPr>
+          <a:xfrm>
+            <a:off x="5913761" y="3399282"/>
+            <a:ext cx="155448" cy="155448"/>
+          </a:xfrm>
+          <a:prstGeom prst="roundRect">
+            <a:avLst>
+              <a:gd name="adj" fmla="val 29411"/>
+            </a:avLst>
+          </a:prstGeom>
+          <a:solidFill>
+            <a:srgbClr val="CBBCF6"/>
+          </a:solidFill>
+          <a:ln>
+            <a:noFill/>
+          </a:ln>
+          <a:effectLst/>
+        </p:spPr>
+        <p:style>
+          <a:lnRef idx="1">
+            <a:schemeClr val="accent1"/>
+          </a:lnRef>
+          <a:fillRef idx="3">
+            <a:schemeClr val="accent1"/>
+          </a:fillRef>
+          <a:effectRef idx="2">
+            <a:schemeClr val="accent1"/>
+          </a:effectRef>
+          <a:fontRef idx="minor">
+            <a:schemeClr val="lt1"/>
+          </a:fontRef>
+        </p:style>
+        <p:txBody>
+          <a:bodyPr rtlCol="0" anchor="ctr" wrap="square"/>
+          <a:lstStyle/>
+          <a:p>
+            <a:pPr algn="ctr"/>
+          </a:p>
+        </p:txBody>
+      </p:sp>
+      <p:sp>
+        <p:nvSpPr>
+          <p:cNvPr id="113" name="Rounded Rectangle 112"/>
+          <p:cNvSpPr/>
+          <p:nvPr/>
+        </p:nvSpPr>
+        <p:spPr>
+          <a:xfrm>
+            <a:off x="6385880" y="3399282"/>
+            <a:ext cx="155448" cy="155448"/>
+          </a:xfrm>
+          <a:prstGeom prst="roundRect">
+            <a:avLst>
+              <a:gd name="adj" fmla="val 29411"/>
+            </a:avLst>
+          </a:prstGeom>
+          <a:solidFill>
+            <a:srgbClr val="CBBCF6"/>
+          </a:solidFill>
+          <a:ln>
+            <a:noFill/>
+          </a:ln>
+          <a:effectLst/>
+        </p:spPr>
+        <p:style>
+          <a:lnRef idx="1">
+            <a:schemeClr val="accent1"/>
+          </a:lnRef>
+          <a:fillRef idx="3">
+            <a:schemeClr val="accent1"/>
+          </a:fillRef>
+          <a:effectRef idx="2">
+            <a:schemeClr val="accent1"/>
+          </a:effectRef>
+          <a:fontRef idx="minor">
+            <a:schemeClr val="lt1"/>
+          </a:fontRef>
+        </p:style>
+        <p:txBody>
+          <a:bodyPr rtlCol="0" anchor="ctr" wrap="square"/>
+          <a:lstStyle/>
+          <a:p>
+            <a:pPr algn="ctr"/>
+          </a:p>
+        </p:txBody>
+      </p:sp>
+      <p:sp>
+        <p:nvSpPr>
+          <p:cNvPr id="114" name="Rounded Rectangle 113"/>
+          <p:cNvSpPr/>
+          <p:nvPr/>
+        </p:nvSpPr>
+        <p:spPr>
+          <a:xfrm>
+            <a:off x="7330119" y="3399282"/>
+            <a:ext cx="155448" cy="155448"/>
+          </a:xfrm>
+          <a:prstGeom prst="roundRect">
+            <a:avLst>
+              <a:gd name="adj" fmla="val 29411"/>
+            </a:avLst>
+          </a:prstGeom>
+          <a:solidFill>
+            <a:srgbClr val="CBBCF6"/>
+          </a:solidFill>
+          <a:ln>
+            <a:noFill/>
+          </a:ln>
+          <a:effectLst/>
+        </p:spPr>
+        <p:style>
+          <a:lnRef idx="1">
+            <a:schemeClr val="accent1"/>
+          </a:lnRef>
+          <a:fillRef idx="3">
+            <a:schemeClr val="accent1"/>
+          </a:fillRef>
+          <a:effectRef idx="2">
+            <a:schemeClr val="accent1"/>
+          </a:effectRef>
+          <a:fontRef idx="minor">
+            <a:schemeClr val="lt1"/>
+          </a:fontRef>
+        </p:style>
+        <p:txBody>
+          <a:bodyPr rtlCol="0" anchor="ctr" wrap="square"/>
+          <a:lstStyle/>
+          <a:p>
+            <a:pPr algn="ctr"/>
+          </a:p>
+        </p:txBody>
+      </p:sp>
+      <p:sp>
+        <p:nvSpPr>
+          <p:cNvPr id="115" name="Rounded Rectangle 114"/>
+          <p:cNvSpPr/>
+          <p:nvPr/>
+        </p:nvSpPr>
+        <p:spPr>
+          <a:xfrm>
+            <a:off x="7802238" y="3399282"/>
+            <a:ext cx="155448" cy="155448"/>
+          </a:xfrm>
+          <a:prstGeom prst="roundRect">
+            <a:avLst>
+              <a:gd name="adj" fmla="val 29411"/>
+            </a:avLst>
+          </a:prstGeom>
+          <a:solidFill>
+            <a:srgbClr val="CBBCF6"/>
+          </a:solidFill>
+          <a:ln>
+            <a:noFill/>
+          </a:ln>
+          <a:effectLst/>
+        </p:spPr>
+        <p:style>
+          <a:lnRef idx="1">
+            <a:schemeClr val="accent1"/>
+          </a:lnRef>
+          <a:fillRef idx="3">
+            <a:schemeClr val="accent1"/>
+          </a:fillRef>
+          <a:effectRef idx="2">
+            <a:schemeClr val="accent1"/>
+          </a:effectRef>
+          <a:fontRef idx="minor">
+            <a:schemeClr val="lt1"/>
+          </a:fontRef>
+        </p:style>
+        <p:txBody>
+          <a:bodyPr rtlCol="0" anchor="ctr" wrap="square"/>
+          <a:lstStyle/>
+          <a:p>
+            <a:pPr algn="ctr"/>
+          </a:p>
+        </p:txBody>
+      </p:sp>
+      <p:sp>
+        <p:nvSpPr>
+          <p:cNvPr id="116" name="Rounded Rectangle 115"/>
+          <p:cNvSpPr/>
+          <p:nvPr/>
+        </p:nvSpPr>
+        <p:spPr>
+          <a:xfrm>
+            <a:off x="8274357" y="3399282"/>
+            <a:ext cx="155448" cy="155448"/>
+          </a:xfrm>
+          <a:prstGeom prst="roundRect">
+            <a:avLst>
+              <a:gd name="adj" fmla="val 29411"/>
+            </a:avLst>
+          </a:prstGeom>
+          <a:solidFill>
+            <a:srgbClr val="CBBCF6"/>
+          </a:solidFill>
+          <a:ln>
+            <a:noFill/>
+          </a:ln>
+          <a:effectLst/>
+        </p:spPr>
+        <p:style>
+          <a:lnRef idx="1">
+            <a:schemeClr val="accent1"/>
+          </a:lnRef>
+          <a:fillRef idx="3">
+            <a:schemeClr val="accent1"/>
+          </a:fillRef>
+          <a:effectRef idx="2">
+            <a:schemeClr val="accent1"/>
+          </a:effectRef>
+          <a:fontRef idx="minor">
+            <a:schemeClr val="lt1"/>
+          </a:fontRef>
+        </p:style>
+        <p:txBody>
+          <a:bodyPr rtlCol="0" anchor="ctr" wrap="square"/>
+          <a:lstStyle/>
+          <a:p>
+            <a:pPr algn="ctr"/>
+          </a:p>
+        </p:txBody>
+      </p:sp>
+      <p:sp>
+        <p:nvSpPr>
+          <p:cNvPr id="117" name="Rounded Rectangle 116"/>
+          <p:cNvSpPr/>
+          <p:nvPr/>
+        </p:nvSpPr>
+        <p:spPr>
+          <a:xfrm>
+            <a:off x="8746476" y="3399282"/>
+            <a:ext cx="155448" cy="155448"/>
+          </a:xfrm>
+          <a:prstGeom prst="roundRect">
+            <a:avLst>
+              <a:gd name="adj" fmla="val 29411"/>
+            </a:avLst>
+          </a:prstGeom>
+          <a:solidFill>
+            <a:srgbClr val="CBBCF6"/>
+          </a:solidFill>
+          <a:ln>
+            <a:noFill/>
+          </a:ln>
+          <a:effectLst/>
+        </p:spPr>
+        <p:style>
+          <a:lnRef idx="1">
+            <a:schemeClr val="accent1"/>
+          </a:lnRef>
+          <a:fillRef idx="3">
+            <a:schemeClr val="accent1"/>
+          </a:fillRef>
+          <a:effectRef idx="2">
+            <a:schemeClr val="accent1"/>
+          </a:effectRef>
+          <a:fontRef idx="minor">
+            <a:schemeClr val="lt1"/>
+          </a:fontRef>
+        </p:style>
+        <p:txBody>
+          <a:bodyPr rtlCol="0" anchor="ctr" wrap="square"/>
+          <a:lstStyle/>
+          <a:p>
+            <a:pPr algn="ctr"/>
+          </a:p>
+        </p:txBody>
+      </p:sp>
+      <p:sp>
+        <p:nvSpPr>
+          <p:cNvPr id="118" name="Rounded Rectangle 117"/>
+          <p:cNvSpPr/>
+          <p:nvPr/>
+        </p:nvSpPr>
+        <p:spPr>
+          <a:xfrm>
+            <a:off x="9218595" y="3399282"/>
+            <a:ext cx="155448" cy="155448"/>
+          </a:xfrm>
+          <a:prstGeom prst="roundRect">
+            <a:avLst>
+              <a:gd name="adj" fmla="val 29411"/>
+            </a:avLst>
+          </a:prstGeom>
+          <a:solidFill>
+            <a:srgbClr val="CBBCF6"/>
+          </a:solidFill>
+          <a:ln>
+            <a:noFill/>
+          </a:ln>
+          <a:effectLst/>
+        </p:spPr>
+        <p:style>
+          <a:lnRef idx="1">
+            <a:schemeClr val="accent1"/>
+          </a:lnRef>
+          <a:fillRef idx="3">
+            <a:schemeClr val="accent1"/>
+          </a:fillRef>
+          <a:effectRef idx="2">
+            <a:schemeClr val="accent1"/>
+          </a:effectRef>
+          <a:fontRef idx="minor">
+            <a:schemeClr val="lt1"/>
+          </a:fontRef>
+        </p:style>
+        <p:txBody>
+          <a:bodyPr rtlCol="0" anchor="ctr" wrap="square"/>
+          <a:lstStyle/>
+          <a:p>
+            <a:pPr algn="ctr"/>
+          </a:p>
+        </p:txBody>
+      </p:sp>
+      <p:sp>
+        <p:nvSpPr>
+          <p:cNvPr id="119" name="Rounded Rectangle 118"/>
+          <p:cNvSpPr/>
+          <p:nvPr/>
+        </p:nvSpPr>
+        <p:spPr>
+          <a:xfrm>
+            <a:off x="9690714" y="3399282"/>
+            <a:ext cx="155448" cy="155448"/>
+          </a:xfrm>
+          <a:prstGeom prst="roundRect">
+            <a:avLst>
+              <a:gd name="adj" fmla="val 29411"/>
+            </a:avLst>
+          </a:prstGeom>
+          <a:solidFill>
+            <a:srgbClr val="CBBCF6"/>
+          </a:solidFill>
+          <a:ln>
+            <a:noFill/>
+          </a:ln>
+          <a:effectLst/>
+        </p:spPr>
+        <p:style>
+          <a:lnRef idx="1">
+            <a:schemeClr val="accent1"/>
+          </a:lnRef>
+          <a:fillRef idx="3">
+            <a:schemeClr val="accent1"/>
+          </a:fillRef>
+          <a:effectRef idx="2">
+            <a:schemeClr val="accent1"/>
+          </a:effectRef>
+          <a:fontRef idx="minor">
+            <a:schemeClr val="lt1"/>
+          </a:fontRef>
+        </p:style>
+        <p:txBody>
+          <a:bodyPr rtlCol="0" anchor="ctr" wrap="square"/>
+          <a:lstStyle/>
+          <a:p>
+            <a:pPr algn="ctr"/>
+          </a:p>
+        </p:txBody>
+      </p:sp>
+      <p:sp>
+        <p:nvSpPr>
+          <p:cNvPr id="120" name="Rounded Rectangle 119"/>
+          <p:cNvSpPr/>
+          <p:nvPr/>
+        </p:nvSpPr>
+        <p:spPr>
+          <a:xfrm>
+            <a:off x="10162834" y="3399282"/>
+            <a:ext cx="155448" cy="155448"/>
+          </a:xfrm>
+          <a:prstGeom prst="roundRect">
+            <a:avLst>
+              <a:gd name="adj" fmla="val 29411"/>
+            </a:avLst>
+          </a:prstGeom>
+          <a:solidFill>
+            <a:srgbClr val="CBBCF6"/>
+          </a:solidFill>
+          <a:ln>
+            <a:noFill/>
+          </a:ln>
+          <a:effectLst/>
+        </p:spPr>
+        <p:style>
+          <a:lnRef idx="1">
+            <a:schemeClr val="accent1"/>
+          </a:lnRef>
+          <a:fillRef idx="3">
+            <a:schemeClr val="accent1"/>
+          </a:fillRef>
+          <a:effectRef idx="2">
+            <a:schemeClr val="accent1"/>
+          </a:effectRef>
+          <a:fontRef idx="minor">
+            <a:schemeClr val="lt1"/>
+          </a:fontRef>
+        </p:style>
+        <p:txBody>
+          <a:bodyPr rtlCol="0" anchor="ctr" wrap="square"/>
+          <a:lstStyle/>
+          <a:p>
+            <a:pPr algn="ctr"/>
+          </a:p>
+        </p:txBody>
+      </p:sp>
+      <p:sp>
+        <p:nvSpPr>
+          <p:cNvPr id="121" name="Rounded Rectangle 120"/>
+          <p:cNvSpPr/>
+          <p:nvPr/>
+        </p:nvSpPr>
+        <p:spPr>
+          <a:xfrm>
+            <a:off x="10634953" y="3399282"/>
+            <a:ext cx="155448" cy="155448"/>
+          </a:xfrm>
+          <a:prstGeom prst="roundRect">
+            <a:avLst>
+              <a:gd name="adj" fmla="val 29411"/>
+            </a:avLst>
+          </a:prstGeom>
+          <a:solidFill>
+            <a:srgbClr val="CBBCF6"/>
+          </a:solidFill>
+          <a:ln>
+            <a:noFill/>
+          </a:ln>
+          <a:effectLst/>
+        </p:spPr>
+        <p:style>
+          <a:lnRef idx="1">
+            <a:schemeClr val="accent1"/>
+          </a:lnRef>
+          <a:fillRef idx="3">
+            <a:schemeClr val="accent1"/>
+          </a:fillRef>
+          <a:effectRef idx="2">
+            <a:schemeClr val="accent1"/>
+          </a:effectRef>
+          <a:fontRef idx="minor">
+            <a:schemeClr val="lt1"/>
+          </a:fontRef>
+        </p:style>
+        <p:txBody>
+          <a:bodyPr rtlCol="0" anchor="ctr" wrap="square"/>
+          <a:lstStyle/>
+          <a:p>
+            <a:pPr algn="ctr"/>
+          </a:p>
+        </p:txBody>
+      </p:sp>
+      <p:sp>
+        <p:nvSpPr>
+          <p:cNvPr id="122" name="Rounded Rectangle 121"/>
+          <p:cNvSpPr/>
+          <p:nvPr/>
+        </p:nvSpPr>
+        <p:spPr>
+          <a:xfrm>
+            <a:off x="11107072" y="3399282"/>
+            <a:ext cx="155448" cy="155448"/>
+          </a:xfrm>
+          <a:prstGeom prst="roundRect">
+            <a:avLst>
+              <a:gd name="adj" fmla="val 29411"/>
+            </a:avLst>
+          </a:prstGeom>
+          <a:solidFill>
+            <a:srgbClr val="CBBCF6"/>
+          </a:solidFill>
+          <a:ln>
+            <a:noFill/>
+          </a:ln>
+          <a:effectLst/>
+        </p:spPr>
+        <p:style>
+          <a:lnRef idx="1">
+            <a:schemeClr val="accent1"/>
+          </a:lnRef>
+          <a:fillRef idx="3">
+            <a:schemeClr val="accent1"/>
+          </a:fillRef>
+          <a:effectRef idx="2">
+            <a:schemeClr val="accent1"/>
+          </a:effectRef>
+          <a:fontRef idx="minor">
+            <a:schemeClr val="lt1"/>
+          </a:fontRef>
+        </p:style>
+        <p:txBody>
+          <a:bodyPr rtlCol="0" anchor="ctr" wrap="square"/>
+          <a:lstStyle/>
+          <a:p>
+            <a:pPr algn="ctr"/>
+          </a:p>
+        </p:txBody>
+      </p:sp>
+      <p:sp>
+        <p:nvSpPr>
+          <p:cNvPr id="123" name="TextBox 122"/>
+          <p:cNvSpPr txBox="1"/>
+          <p:nvPr/>
+        </p:nvSpPr>
+        <p:spPr>
+          <a:xfrm>
+            <a:off x="822960" y="3648456"/>
+            <a:ext cx="1572768" cy="365760"/>
+          </a:xfrm>
+          <a:prstGeom prst="rect">
+            <a:avLst/>
+          </a:prstGeom>
+          <a:noFill/>
+        </p:spPr>
+        <p:txBody>
+          <a:bodyPr wrap="square" anchor="t" lIns="0" tIns="0" rIns="0" bIns="0">
+            <a:spAutoFit/>
+          </a:bodyPr>
+          <a:lstStyle/>
+          <a:p>
+            <a:pPr algn="l">
+              <a:lnSpc>
+                <a:spcPct val="100000"/>
+              </a:lnSpc>
+            </a:pPr>
+            <a:r>
+              <a:rPr sz="750" b="0">
+                <a:solidFill>
+                  <a:srgbClr val="0E112A"/>
+                </a:solidFill>
+                <a:latin typeface="Segoe UI"/>
+              </a:rPr>
+              <a:t>Reconciliação Posicao</a:t>
+            </a:r>
+          </a:p>
+        </p:txBody>
+      </p:sp>
+      <p:sp>
+        <p:nvSpPr>
+          <p:cNvPr id="124" name="Rounded Rectangle 123"/>
+          <p:cNvSpPr/>
+          <p:nvPr/>
+        </p:nvSpPr>
+        <p:spPr>
+          <a:xfrm>
+            <a:off x="2608927" y="3659885"/>
+            <a:ext cx="155448" cy="155448"/>
+          </a:xfrm>
+          <a:prstGeom prst="roundRect">
+            <a:avLst>
+              <a:gd name="adj" fmla="val 29411"/>
+            </a:avLst>
+          </a:prstGeom>
+          <a:solidFill>
+            <a:srgbClr val="B9C0D0"/>
+          </a:solidFill>
+          <a:ln>
+            <a:noFill/>
+          </a:ln>
+          <a:effectLst/>
+        </p:spPr>
+        <p:style>
+          <a:lnRef idx="1">
+            <a:schemeClr val="accent1"/>
+          </a:lnRef>
+          <a:fillRef idx="3">
+            <a:schemeClr val="accent1"/>
+          </a:fillRef>
+          <a:effectRef idx="2">
+            <a:schemeClr val="accent1"/>
+          </a:effectRef>
+          <a:fontRef idx="minor">
+            <a:schemeClr val="lt1"/>
+          </a:fontRef>
+        </p:style>
+        <p:txBody>
+          <a:bodyPr rtlCol="0" anchor="ctr" wrap="square"/>
+          <a:lstStyle/>
+          <a:p>
+            <a:pPr algn="ctr"/>
+          </a:p>
+        </p:txBody>
+      </p:sp>
+      <p:sp>
+        <p:nvSpPr>
+          <p:cNvPr id="125" name="Rounded Rectangle 124"/>
+          <p:cNvSpPr/>
+          <p:nvPr/>
+        </p:nvSpPr>
+        <p:spPr>
+          <a:xfrm>
+            <a:off x="3081046" y="3659885"/>
+            <a:ext cx="155448" cy="155448"/>
+          </a:xfrm>
+          <a:prstGeom prst="roundRect">
+            <a:avLst>
+              <a:gd name="adj" fmla="val 29411"/>
+            </a:avLst>
+          </a:prstGeom>
+          <a:solidFill>
+            <a:srgbClr val="B9C0D0"/>
+          </a:solidFill>
+          <a:ln>
+            <a:noFill/>
+          </a:ln>
+          <a:effectLst/>
+        </p:spPr>
+        <p:style>
+          <a:lnRef idx="1">
+            <a:schemeClr val="accent1"/>
+          </a:lnRef>
+          <a:fillRef idx="3">
+            <a:schemeClr val="accent1"/>
+          </a:fillRef>
+          <a:effectRef idx="2">
+            <a:schemeClr val="accent1"/>
+          </a:effectRef>
+          <a:fontRef idx="minor">
+            <a:schemeClr val="lt1"/>
+          </a:fontRef>
+        </p:style>
+        <p:txBody>
+          <a:bodyPr rtlCol="0" anchor="ctr" wrap="square"/>
+          <a:lstStyle/>
+          <a:p>
+            <a:pPr algn="ctr"/>
+          </a:p>
+        </p:txBody>
+      </p:sp>
+      <p:sp>
+        <p:nvSpPr>
+          <p:cNvPr id="126" name="Rounded Rectangle 125"/>
+          <p:cNvSpPr/>
+          <p:nvPr/>
+        </p:nvSpPr>
+        <p:spPr>
+          <a:xfrm>
+            <a:off x="3553165" y="3659885"/>
+            <a:ext cx="155448" cy="155448"/>
+          </a:xfrm>
+          <a:prstGeom prst="roundRect">
+            <a:avLst>
+              <a:gd name="adj" fmla="val 29411"/>
+            </a:avLst>
+          </a:prstGeom>
+          <a:solidFill>
+            <a:srgbClr val="B9C0D0"/>
+          </a:solidFill>
+          <a:ln>
+            <a:noFill/>
+          </a:ln>
+          <a:effectLst/>
+        </p:spPr>
+        <p:style>
+          <a:lnRef idx="1">
+            <a:schemeClr val="accent1"/>
+          </a:lnRef>
+          <a:fillRef idx="3">
+            <a:schemeClr val="accent1"/>
+          </a:fillRef>
+          <a:effectRef idx="2">
+            <a:schemeClr val="accent1"/>
+          </a:effectRef>
+          <a:fontRef idx="minor">
+            <a:schemeClr val="lt1"/>
+          </a:fontRef>
+        </p:style>
+        <p:txBody>
+          <a:bodyPr rtlCol="0" anchor="ctr" wrap="square"/>
+          <a:lstStyle/>
+          <a:p>
+            <a:pPr algn="ctr"/>
+          </a:p>
+        </p:txBody>
+      </p:sp>
+      <p:sp>
+        <p:nvSpPr>
+          <p:cNvPr id="127" name="Rounded Rectangle 126"/>
+          <p:cNvSpPr/>
+          <p:nvPr/>
+        </p:nvSpPr>
+        <p:spPr>
+          <a:xfrm>
+            <a:off x="4025285" y="3659885"/>
+            <a:ext cx="155448" cy="155448"/>
+          </a:xfrm>
+          <a:prstGeom prst="roundRect">
+            <a:avLst>
+              <a:gd name="adj" fmla="val 29411"/>
+            </a:avLst>
+          </a:prstGeom>
+          <a:solidFill>
+            <a:srgbClr val="B9C0D0"/>
+          </a:solidFill>
+          <a:ln>
+            <a:noFill/>
+          </a:ln>
+          <a:effectLst/>
+        </p:spPr>
+        <p:style>
+          <a:lnRef idx="1">
+            <a:schemeClr val="accent1"/>
+          </a:lnRef>
+          <a:fillRef idx="3">
+            <a:schemeClr val="accent1"/>
+          </a:fillRef>
+          <a:effectRef idx="2">
+            <a:schemeClr val="accent1"/>
+          </a:effectRef>
+          <a:fontRef idx="minor">
+            <a:schemeClr val="lt1"/>
+          </a:fontRef>
+        </p:style>
+        <p:txBody>
+          <a:bodyPr rtlCol="0" anchor="ctr" wrap="square"/>
+          <a:lstStyle/>
+          <a:p>
+            <a:pPr algn="ctr"/>
+          </a:p>
+        </p:txBody>
+      </p:sp>
+      <p:sp>
+        <p:nvSpPr>
+          <p:cNvPr id="128" name="Rounded Rectangle 127"/>
+          <p:cNvSpPr/>
+          <p:nvPr/>
+        </p:nvSpPr>
+        <p:spPr>
+          <a:xfrm>
+            <a:off x="4497404" y="3659885"/>
+            <a:ext cx="155448" cy="155448"/>
+          </a:xfrm>
+          <a:prstGeom prst="roundRect">
+            <a:avLst>
+              <a:gd name="adj" fmla="val 29411"/>
+            </a:avLst>
+          </a:prstGeom>
+          <a:solidFill>
+            <a:srgbClr val="B9C0D0"/>
+          </a:solidFill>
+          <a:ln>
+            <a:noFill/>
+          </a:ln>
+          <a:effectLst/>
+        </p:spPr>
+        <p:style>
+          <a:lnRef idx="1">
+            <a:schemeClr val="accent1"/>
+          </a:lnRef>
+          <a:fillRef idx="3">
+            <a:schemeClr val="accent1"/>
+          </a:fillRef>
+          <a:effectRef idx="2">
+            <a:schemeClr val="accent1"/>
+          </a:effectRef>
+          <a:fontRef idx="minor">
+            <a:schemeClr val="lt1"/>
+          </a:fontRef>
+        </p:style>
+        <p:txBody>
+          <a:bodyPr rtlCol="0" anchor="ctr" wrap="square"/>
+          <a:lstStyle/>
+          <a:p>
+            <a:pPr algn="ctr"/>
+          </a:p>
+        </p:txBody>
+      </p:sp>
+      <p:sp>
+        <p:nvSpPr>
+          <p:cNvPr id="129" name="Rounded Rectangle 128"/>
+          <p:cNvSpPr/>
+          <p:nvPr/>
+        </p:nvSpPr>
+        <p:spPr>
+          <a:xfrm>
+            <a:off x="4969523" y="3659885"/>
+            <a:ext cx="155448" cy="155448"/>
+          </a:xfrm>
+          <a:prstGeom prst="roundRect">
+            <a:avLst>
+              <a:gd name="adj" fmla="val 29411"/>
+            </a:avLst>
+          </a:prstGeom>
+          <a:solidFill>
+            <a:srgbClr val="B9C0D0"/>
+          </a:solidFill>
+          <a:ln>
+            <a:noFill/>
+          </a:ln>
+          <a:effectLst/>
+        </p:spPr>
+        <p:style>
+          <a:lnRef idx="1">
+            <a:schemeClr val="accent1"/>
+          </a:lnRef>
+          <a:fillRef idx="3">
+            <a:schemeClr val="accent1"/>
+          </a:fillRef>
+          <a:effectRef idx="2">
+            <a:schemeClr val="accent1"/>
+          </a:effectRef>
+          <a:fontRef idx="minor">
+            <a:schemeClr val="lt1"/>
+          </a:fontRef>
+        </p:style>
+        <p:txBody>
+          <a:bodyPr rtlCol="0" anchor="ctr" wrap="square"/>
+          <a:lstStyle/>
+          <a:p>
+            <a:pPr algn="ctr"/>
+          </a:p>
+        </p:txBody>
+      </p:sp>
+      <p:sp>
+        <p:nvSpPr>
+          <p:cNvPr id="130" name="Rounded Rectangle 129"/>
+          <p:cNvSpPr/>
+          <p:nvPr/>
+        </p:nvSpPr>
+        <p:spPr>
+          <a:xfrm>
+            <a:off x="5441642" y="3659885"/>
+            <a:ext cx="155448" cy="155448"/>
+          </a:xfrm>
+          <a:prstGeom prst="roundRect">
+            <a:avLst>
+              <a:gd name="adj" fmla="val 29411"/>
+            </a:avLst>
+          </a:prstGeom>
+          <a:solidFill>
+            <a:srgbClr val="B9C0D0"/>
+          </a:solidFill>
+          <a:ln>
+            <a:noFill/>
+          </a:ln>
+          <a:effectLst/>
+        </p:spPr>
+        <p:style>
+          <a:lnRef idx="1">
+            <a:schemeClr val="accent1"/>
+          </a:lnRef>
+          <a:fillRef idx="3">
+            <a:schemeClr val="accent1"/>
+          </a:fillRef>
+          <a:effectRef idx="2">
+            <a:schemeClr val="accent1"/>
+          </a:effectRef>
+          <a:fontRef idx="minor">
+            <a:schemeClr val="lt1"/>
+          </a:fontRef>
+        </p:style>
+        <p:txBody>
+          <a:bodyPr rtlCol="0" anchor="ctr" wrap="square"/>
+          <a:lstStyle/>
+          <a:p>
+            <a:pPr algn="ctr"/>
+          </a:p>
+        </p:txBody>
+      </p:sp>
+      <p:sp>
+        <p:nvSpPr>
+          <p:cNvPr id="131" name="Rounded Rectangle 130"/>
+          <p:cNvSpPr/>
+          <p:nvPr/>
+        </p:nvSpPr>
+        <p:spPr>
+          <a:xfrm>
+            <a:off x="5913761" y="3659885"/>
+            <a:ext cx="155448" cy="155448"/>
+          </a:xfrm>
+          <a:prstGeom prst="roundRect">
+            <a:avLst>
+              <a:gd name="adj" fmla="val 29411"/>
+            </a:avLst>
+          </a:prstGeom>
+          <a:solidFill>
+            <a:srgbClr val="0066CC"/>
+          </a:solidFill>
+          <a:ln>
+            <a:noFill/>
+          </a:ln>
+          <a:effectLst/>
+        </p:spPr>
+        <p:style>
+          <a:lnRef idx="1">
+            <a:schemeClr val="accent1"/>
+          </a:lnRef>
+          <a:fillRef idx="3">
+            <a:schemeClr val="accent1"/>
+          </a:fillRef>
+          <a:effectRef idx="2">
+            <a:schemeClr val="accent1"/>
+          </a:effectRef>
+          <a:fontRef idx="minor">
+            <a:schemeClr val="lt1"/>
+          </a:fontRef>
+        </p:style>
+        <p:txBody>
+          <a:bodyPr rtlCol="0" anchor="ctr" wrap="square"/>
+          <a:lstStyle/>
+          <a:p>
+            <a:pPr algn="ctr"/>
+          </a:p>
+        </p:txBody>
+      </p:sp>
+      <p:sp>
+        <p:nvSpPr>
+          <p:cNvPr id="132" name="Rounded Rectangle 131"/>
+          <p:cNvSpPr/>
+          <p:nvPr/>
+        </p:nvSpPr>
+        <p:spPr>
+          <a:xfrm>
+            <a:off x="6385880" y="3659885"/>
+            <a:ext cx="155448" cy="155448"/>
+          </a:xfrm>
+          <a:prstGeom prst="roundRect">
+            <a:avLst>
+              <a:gd name="adj" fmla="val 29411"/>
+            </a:avLst>
+          </a:prstGeom>
+          <a:solidFill>
+            <a:srgbClr val="B9C0D0"/>
+          </a:solidFill>
+          <a:ln>
+            <a:noFill/>
+          </a:ln>
+          <a:effectLst/>
+        </p:spPr>
+        <p:style>
+          <a:lnRef idx="1">
+            <a:schemeClr val="accent1"/>
+          </a:lnRef>
+          <a:fillRef idx="3">
+            <a:schemeClr val="accent1"/>
+          </a:fillRef>
+          <a:effectRef idx="2">
+            <a:schemeClr val="accent1"/>
+          </a:effectRef>
+          <a:fontRef idx="minor">
+            <a:schemeClr val="lt1"/>
+          </a:fontRef>
+        </p:style>
+        <p:txBody>
+          <a:bodyPr rtlCol="0" anchor="ctr" wrap="square"/>
+          <a:lstStyle/>
+          <a:p>
+            <a:pPr algn="ctr"/>
+          </a:p>
+        </p:txBody>
+      </p:sp>
+      <p:sp>
+        <p:nvSpPr>
+          <p:cNvPr id="133" name="Rounded Rectangle 132"/>
+          <p:cNvSpPr/>
+          <p:nvPr/>
+        </p:nvSpPr>
+        <p:spPr>
+          <a:xfrm>
+            <a:off x="7802238" y="3659885"/>
+            <a:ext cx="155448" cy="155448"/>
+          </a:xfrm>
+          <a:prstGeom prst="roundRect">
+            <a:avLst>
+              <a:gd name="adj" fmla="val 29411"/>
+            </a:avLst>
+          </a:prstGeom>
+          <a:solidFill>
+            <a:srgbClr val="CBBCF6"/>
+          </a:solidFill>
+          <a:ln>
+            <a:noFill/>
+          </a:ln>
+          <a:effectLst/>
+        </p:spPr>
+        <p:style>
+          <a:lnRef idx="1">
+            <a:schemeClr val="accent1"/>
+          </a:lnRef>
+          <a:fillRef idx="3">
+            <a:schemeClr val="accent1"/>
+          </a:fillRef>
+          <a:effectRef idx="2">
+            <a:schemeClr val="accent1"/>
+          </a:effectRef>
+          <a:fontRef idx="minor">
+            <a:schemeClr val="lt1"/>
+          </a:fontRef>
+        </p:style>
+        <p:txBody>
+          <a:bodyPr rtlCol="0" anchor="ctr" wrap="square"/>
+          <a:lstStyle/>
+          <a:p>
+            <a:pPr algn="ctr"/>
+          </a:p>
+        </p:txBody>
+      </p:sp>
+      <p:sp>
+        <p:nvSpPr>
+          <p:cNvPr id="134" name="Rounded Rectangle 133"/>
+          <p:cNvSpPr/>
+          <p:nvPr/>
+        </p:nvSpPr>
+        <p:spPr>
+          <a:xfrm>
+            <a:off x="8274357" y="3659885"/>
+            <a:ext cx="155448" cy="155448"/>
+          </a:xfrm>
+          <a:prstGeom prst="roundRect">
+            <a:avLst>
+              <a:gd name="adj" fmla="val 29411"/>
+            </a:avLst>
+          </a:prstGeom>
+          <a:solidFill>
+            <a:srgbClr val="CBBCF6"/>
+          </a:solidFill>
+          <a:ln>
+            <a:noFill/>
+          </a:ln>
+          <a:effectLst/>
+        </p:spPr>
+        <p:style>
+          <a:lnRef idx="1">
+            <a:schemeClr val="accent1"/>
+          </a:lnRef>
+          <a:fillRef idx="3">
+            <a:schemeClr val="accent1"/>
+          </a:fillRef>
+          <a:effectRef idx="2">
+            <a:schemeClr val="accent1"/>
+          </a:effectRef>
+          <a:fontRef idx="minor">
+            <a:schemeClr val="lt1"/>
+          </a:fontRef>
+        </p:style>
+        <p:txBody>
+          <a:bodyPr rtlCol="0" anchor="ctr" wrap="square"/>
+          <a:lstStyle/>
+          <a:p>
+            <a:pPr algn="ctr"/>
+          </a:p>
+        </p:txBody>
+      </p:sp>
+      <p:sp>
+        <p:nvSpPr>
+          <p:cNvPr id="135" name="Rounded Rectangle 134"/>
+          <p:cNvSpPr/>
+          <p:nvPr/>
+        </p:nvSpPr>
+        <p:spPr>
+          <a:xfrm>
+            <a:off x="8746476" y="3659885"/>
+            <a:ext cx="155448" cy="155448"/>
+          </a:xfrm>
+          <a:prstGeom prst="roundRect">
+            <a:avLst>
+              <a:gd name="adj" fmla="val 29411"/>
+            </a:avLst>
+          </a:prstGeom>
+          <a:solidFill>
+            <a:srgbClr val="CBBCF6"/>
+          </a:solidFill>
+          <a:ln>
+            <a:noFill/>
+          </a:ln>
+          <a:effectLst/>
+        </p:spPr>
+        <p:style>
+          <a:lnRef idx="1">
+            <a:schemeClr val="accent1"/>
+          </a:lnRef>
+          <a:fillRef idx="3">
+            <a:schemeClr val="accent1"/>
+          </a:fillRef>
+          <a:effectRef idx="2">
+            <a:schemeClr val="accent1"/>
+          </a:effectRef>
+          <a:fontRef idx="minor">
+            <a:schemeClr val="lt1"/>
+          </a:fontRef>
+        </p:style>
+        <p:txBody>
+          <a:bodyPr rtlCol="0" anchor="ctr" wrap="square"/>
+          <a:lstStyle/>
+          <a:p>
+            <a:pPr algn="ctr"/>
+          </a:p>
+        </p:txBody>
+      </p:sp>
+      <p:sp>
+        <p:nvSpPr>
+          <p:cNvPr id="136" name="Rounded Rectangle 135"/>
+          <p:cNvSpPr/>
+          <p:nvPr/>
+        </p:nvSpPr>
+        <p:spPr>
+          <a:xfrm>
+            <a:off x="9218595" y="3659885"/>
+            <a:ext cx="155448" cy="155448"/>
+          </a:xfrm>
+          <a:prstGeom prst="roundRect">
+            <a:avLst>
+              <a:gd name="adj" fmla="val 29411"/>
+            </a:avLst>
+          </a:prstGeom>
+          <a:solidFill>
+            <a:srgbClr val="CBBCF6"/>
+          </a:solidFill>
+          <a:ln>
+            <a:noFill/>
+          </a:ln>
+          <a:effectLst/>
+        </p:spPr>
+        <p:style>
+          <a:lnRef idx="1">
+            <a:schemeClr val="accent1"/>
+          </a:lnRef>
+          <a:fillRef idx="3">
+            <a:schemeClr val="accent1"/>
+          </a:fillRef>
+          <a:effectRef idx="2">
+            <a:schemeClr val="accent1"/>
+          </a:effectRef>
+          <a:fontRef idx="minor">
+            <a:schemeClr val="lt1"/>
+          </a:fontRef>
+        </p:style>
+        <p:txBody>
+          <a:bodyPr rtlCol="0" anchor="ctr" wrap="square"/>
+          <a:lstStyle/>
+          <a:p>
+            <a:pPr algn="ctr"/>
+          </a:p>
+        </p:txBody>
+      </p:sp>
+      <p:sp>
+        <p:nvSpPr>
+          <p:cNvPr id="137" name="Rounded Rectangle 136"/>
+          <p:cNvSpPr/>
+          <p:nvPr/>
+        </p:nvSpPr>
+        <p:spPr>
+          <a:xfrm>
+            <a:off x="9690714" y="3659885"/>
+            <a:ext cx="155448" cy="155448"/>
+          </a:xfrm>
+          <a:prstGeom prst="roundRect">
+            <a:avLst>
+              <a:gd name="adj" fmla="val 29411"/>
+            </a:avLst>
+          </a:prstGeom>
+          <a:solidFill>
+            <a:srgbClr val="CBBCF6"/>
+          </a:solidFill>
+          <a:ln>
+            <a:noFill/>
+          </a:ln>
+          <a:effectLst/>
+        </p:spPr>
+        <p:style>
+          <a:lnRef idx="1">
+            <a:schemeClr val="accent1"/>
+          </a:lnRef>
+          <a:fillRef idx="3">
+            <a:schemeClr val="accent1"/>
+          </a:fillRef>
+          <a:effectRef idx="2">
+            <a:schemeClr val="accent1"/>
+          </a:effectRef>
+          <a:fontRef idx="minor">
+            <a:schemeClr val="lt1"/>
+          </a:fontRef>
+        </p:style>
+        <p:txBody>
+          <a:bodyPr rtlCol="0" anchor="ctr" wrap="square"/>
+          <a:lstStyle/>
+          <a:p>
+            <a:pPr algn="ctr"/>
+          </a:p>
+        </p:txBody>
+      </p:sp>
+      <p:sp>
+        <p:nvSpPr>
+          <p:cNvPr id="138" name="Rounded Rectangle 137"/>
+          <p:cNvSpPr/>
+          <p:nvPr/>
+        </p:nvSpPr>
+        <p:spPr>
+          <a:xfrm>
+            <a:off x="10634953" y="3659885"/>
+            <a:ext cx="155448" cy="155448"/>
+          </a:xfrm>
+          <a:prstGeom prst="roundRect">
+            <a:avLst>
+              <a:gd name="adj" fmla="val 29411"/>
+            </a:avLst>
+          </a:prstGeom>
+          <a:solidFill>
+            <a:srgbClr val="CBBCF6"/>
+          </a:solidFill>
+          <a:ln>
+            <a:noFill/>
+          </a:ln>
+          <a:effectLst/>
+        </p:spPr>
+        <p:style>
+          <a:lnRef idx="1">
+            <a:schemeClr val="accent1"/>
+          </a:lnRef>
+          <a:fillRef idx="3">
+            <a:schemeClr val="accent1"/>
+          </a:fillRef>
+          <a:effectRef idx="2">
+            <a:schemeClr val="accent1"/>
+          </a:effectRef>
+          <a:fontRef idx="minor">
+            <a:schemeClr val="lt1"/>
+          </a:fontRef>
+        </p:style>
+        <p:txBody>
+          <a:bodyPr rtlCol="0" anchor="ctr" wrap="square"/>
+          <a:lstStyle/>
+          <a:p>
+            <a:pPr algn="ctr"/>
+          </a:p>
+        </p:txBody>
+      </p:sp>
+      <p:sp>
+        <p:nvSpPr>
+          <p:cNvPr id="139" name="Rounded Rectangle 138"/>
+          <p:cNvSpPr/>
+          <p:nvPr/>
+        </p:nvSpPr>
+        <p:spPr>
+          <a:xfrm>
+            <a:off x="11107072" y="3659885"/>
+            <a:ext cx="155448" cy="155448"/>
+          </a:xfrm>
+          <a:prstGeom prst="roundRect">
+            <a:avLst>
+              <a:gd name="adj" fmla="val 29411"/>
+            </a:avLst>
+          </a:prstGeom>
+          <a:solidFill>
+            <a:srgbClr val="CBBCF6"/>
+          </a:solidFill>
+          <a:ln>
+            <a:noFill/>
+          </a:ln>
+          <a:effectLst/>
+        </p:spPr>
+        <p:style>
+          <a:lnRef idx="1">
+            <a:schemeClr val="accent1"/>
+          </a:lnRef>
+          <a:fillRef idx="3">
+            <a:schemeClr val="accent1"/>
+          </a:fillRef>
+          <a:effectRef idx="2">
+            <a:schemeClr val="accent1"/>
+          </a:effectRef>
+          <a:fontRef idx="minor">
+            <a:schemeClr val="lt1"/>
+          </a:fontRef>
+        </p:style>
+        <p:txBody>
+          <a:bodyPr rtlCol="0" anchor="ctr" wrap="square"/>
+          <a:lstStyle/>
+          <a:p>
+            <a:pPr algn="ctr"/>
+          </a:p>
+        </p:txBody>
+      </p:sp>
+      <p:sp>
+        <p:nvSpPr>
+          <p:cNvPr id="140" name="Rounded Rectangle 139"/>
+          <p:cNvSpPr/>
+          <p:nvPr/>
+        </p:nvSpPr>
+        <p:spPr>
+          <a:xfrm>
+            <a:off x="749808" y="3867912"/>
+            <a:ext cx="10671048" cy="260603"/>
+          </a:xfrm>
+          <a:prstGeom prst="roundRect">
+            <a:avLst>
+              <a:gd name="adj" fmla="val 17543"/>
+            </a:avLst>
+          </a:prstGeom>
+          <a:solidFill>
+            <a:srgbClr val="F3F5FA"/>
+          </a:solidFill>
+          <a:ln>
+            <a:noFill/>
+          </a:ln>
+          <a:effectLst/>
+        </p:spPr>
+        <p:style>
+          <a:lnRef idx="1">
+            <a:schemeClr val="accent1"/>
+          </a:lnRef>
+          <a:fillRef idx="3">
+            <a:schemeClr val="accent1"/>
+          </a:fillRef>
+          <a:effectRef idx="2">
+            <a:schemeClr val="accent1"/>
+          </a:effectRef>
+          <a:fontRef idx="minor">
+            <a:schemeClr val="lt1"/>
+          </a:fontRef>
+        </p:style>
+        <p:txBody>
+          <a:bodyPr rtlCol="0" anchor="ctr" wrap="square"/>
+          <a:lstStyle/>
+          <a:p>
+            <a:pPr algn="ctr"/>
+          </a:p>
+        </p:txBody>
+      </p:sp>
+      <p:sp>
+        <p:nvSpPr>
+          <p:cNvPr id="141" name="TextBox 140"/>
+          <p:cNvSpPr txBox="1"/>
+          <p:nvPr/>
+        </p:nvSpPr>
+        <p:spPr>
+          <a:xfrm>
+            <a:off x="822960" y="3909060"/>
+            <a:ext cx="1572768" cy="365760"/>
+          </a:xfrm>
+          <a:prstGeom prst="rect">
+            <a:avLst/>
+          </a:prstGeom>
+          <a:noFill/>
+        </p:spPr>
+        <p:txBody>
+          <a:bodyPr wrap="square" anchor="t" lIns="0" tIns="0" rIns="0" bIns="0">
+            <a:spAutoFit/>
+          </a:bodyPr>
+          <a:lstStyle/>
+          <a:p>
+            <a:pPr algn="l">
+              <a:lnSpc>
+                <a:spcPct val="100000"/>
+              </a:lnSpc>
+            </a:pPr>
+            <a:r>
+              <a:rPr sz="750" b="0">
+                <a:solidFill>
+                  <a:srgbClr val="0E112A"/>
+                </a:solidFill>
+                <a:latin typeface="Segoe UI"/>
+              </a:rPr>
+              <a:t>Pagamentos</a:t>
+            </a:r>
+          </a:p>
+        </p:txBody>
+      </p:sp>
+      <p:sp>
+        <p:nvSpPr>
+          <p:cNvPr id="142" name="Rounded Rectangle 141"/>
+          <p:cNvSpPr/>
+          <p:nvPr/>
+        </p:nvSpPr>
+        <p:spPr>
+          <a:xfrm>
+            <a:off x="2608927" y="3920490"/>
+            <a:ext cx="155448" cy="155448"/>
+          </a:xfrm>
+          <a:prstGeom prst="roundRect">
+            <a:avLst>
+              <a:gd name="adj" fmla="val 29411"/>
+            </a:avLst>
+          </a:prstGeom>
+          <a:solidFill>
+            <a:srgbClr val="EFCDD6"/>
+          </a:solidFill>
+          <a:ln>
+            <a:noFill/>
+          </a:ln>
+          <a:effectLst/>
+        </p:spPr>
+        <p:style>
+          <a:lnRef idx="1">
+            <a:schemeClr val="accent1"/>
+          </a:lnRef>
+          <a:fillRef idx="3">
+            <a:schemeClr val="accent1"/>
+          </a:fillRef>
+          <a:effectRef idx="2">
+            <a:schemeClr val="accent1"/>
+          </a:effectRef>
+          <a:fontRef idx="minor">
+            <a:schemeClr val="lt1"/>
+          </a:fontRef>
+        </p:style>
+        <p:txBody>
+          <a:bodyPr rtlCol="0" anchor="ctr" wrap="square"/>
+          <a:lstStyle/>
+          <a:p>
+            <a:pPr algn="ctr"/>
+          </a:p>
+        </p:txBody>
+      </p:sp>
+      <p:sp>
+        <p:nvSpPr>
+          <p:cNvPr id="143" name="Rounded Rectangle 142"/>
+          <p:cNvSpPr/>
+          <p:nvPr/>
+        </p:nvSpPr>
+        <p:spPr>
+          <a:xfrm>
+            <a:off x="3081046" y="3920490"/>
+            <a:ext cx="155448" cy="155448"/>
+          </a:xfrm>
+          <a:prstGeom prst="roundRect">
+            <a:avLst>
+              <a:gd name="adj" fmla="val 29411"/>
+            </a:avLst>
+          </a:prstGeom>
+          <a:solidFill>
+            <a:srgbClr val="EFCDD6"/>
+          </a:solidFill>
+          <a:ln>
+            <a:noFill/>
+          </a:ln>
+          <a:effectLst/>
+        </p:spPr>
+        <p:style>
+          <a:lnRef idx="1">
+            <a:schemeClr val="accent1"/>
+          </a:lnRef>
+          <a:fillRef idx="3">
+            <a:schemeClr val="accent1"/>
+          </a:fillRef>
+          <a:effectRef idx="2">
+            <a:schemeClr val="accent1"/>
+          </a:effectRef>
+          <a:fontRef idx="minor">
+            <a:schemeClr val="lt1"/>
+          </a:fontRef>
+        </p:style>
+        <p:txBody>
+          <a:bodyPr rtlCol="0" anchor="ctr" wrap="square"/>
+          <a:lstStyle/>
+          <a:p>
+            <a:pPr algn="ctr"/>
+          </a:p>
+        </p:txBody>
+      </p:sp>
+      <p:sp>
+        <p:nvSpPr>
+          <p:cNvPr id="144" name="Rounded Rectangle 143"/>
+          <p:cNvSpPr/>
+          <p:nvPr/>
+        </p:nvSpPr>
+        <p:spPr>
+          <a:xfrm>
+            <a:off x="3553165" y="3920490"/>
+            <a:ext cx="155448" cy="155448"/>
+          </a:xfrm>
+          <a:prstGeom prst="roundRect">
+            <a:avLst>
+              <a:gd name="adj" fmla="val 29411"/>
+            </a:avLst>
+          </a:prstGeom>
+          <a:solidFill>
+            <a:srgbClr val="B9C0D0"/>
+          </a:solidFill>
+          <a:ln>
+            <a:noFill/>
+          </a:ln>
+          <a:effectLst/>
+        </p:spPr>
+        <p:style>
+          <a:lnRef idx="1">
+            <a:schemeClr val="accent1"/>
+          </a:lnRef>
+          <a:fillRef idx="3">
+            <a:schemeClr val="accent1"/>
+          </a:fillRef>
+          <a:effectRef idx="2">
+            <a:schemeClr val="accent1"/>
+          </a:effectRef>
+          <a:fontRef idx="minor">
+            <a:schemeClr val="lt1"/>
+          </a:fontRef>
+        </p:style>
+        <p:txBody>
+          <a:bodyPr rtlCol="0" anchor="ctr" wrap="square"/>
+          <a:lstStyle/>
+          <a:p>
+            <a:pPr algn="ctr"/>
+          </a:p>
+        </p:txBody>
+      </p:sp>
+      <p:sp>
+        <p:nvSpPr>
+          <p:cNvPr id="145" name="Rounded Rectangle 144"/>
+          <p:cNvSpPr/>
+          <p:nvPr/>
+        </p:nvSpPr>
+        <p:spPr>
+          <a:xfrm>
+            <a:off x="4025285" y="3920490"/>
+            <a:ext cx="155448" cy="155448"/>
+          </a:xfrm>
+          <a:prstGeom prst="roundRect">
+            <a:avLst>
+              <a:gd name="adj" fmla="val 29411"/>
+            </a:avLst>
+          </a:prstGeom>
+          <a:solidFill>
+            <a:srgbClr val="B9C0D0"/>
+          </a:solidFill>
+          <a:ln>
+            <a:noFill/>
+          </a:ln>
+          <a:effectLst/>
+        </p:spPr>
+        <p:style>
+          <a:lnRef idx="1">
+            <a:schemeClr val="accent1"/>
+          </a:lnRef>
+          <a:fillRef idx="3">
+            <a:schemeClr val="accent1"/>
+          </a:fillRef>
+          <a:effectRef idx="2">
+            <a:schemeClr val="accent1"/>
+          </a:effectRef>
+          <a:fontRef idx="minor">
+            <a:schemeClr val="lt1"/>
+          </a:fontRef>
+        </p:style>
+        <p:txBody>
+          <a:bodyPr rtlCol="0" anchor="ctr" wrap="square"/>
+          <a:lstStyle/>
+          <a:p>
+            <a:pPr algn="ctr"/>
+          </a:p>
+        </p:txBody>
+      </p:sp>
+      <p:sp>
+        <p:nvSpPr>
+          <p:cNvPr id="146" name="Rounded Rectangle 145"/>
+          <p:cNvSpPr/>
+          <p:nvPr/>
+        </p:nvSpPr>
+        <p:spPr>
+          <a:xfrm>
+            <a:off x="4497404" y="3920490"/>
+            <a:ext cx="155448" cy="155448"/>
+          </a:xfrm>
+          <a:prstGeom prst="roundRect">
+            <a:avLst>
+              <a:gd name="adj" fmla="val 29411"/>
+            </a:avLst>
+          </a:prstGeom>
+          <a:solidFill>
+            <a:srgbClr val="B9C0D0"/>
+          </a:solidFill>
+          <a:ln>
+            <a:noFill/>
+          </a:ln>
+          <a:effectLst/>
+        </p:spPr>
+        <p:style>
+          <a:lnRef idx="1">
+            <a:schemeClr val="accent1"/>
+          </a:lnRef>
+          <a:fillRef idx="3">
+            <a:schemeClr val="accent1"/>
+          </a:fillRef>
+          <a:effectRef idx="2">
+            <a:schemeClr val="accent1"/>
+          </a:effectRef>
+          <a:fontRef idx="minor">
+            <a:schemeClr val="lt1"/>
+          </a:fontRef>
+        </p:style>
+        <p:txBody>
+          <a:bodyPr rtlCol="0" anchor="ctr" wrap="square"/>
+          <a:lstStyle/>
+          <a:p>
+            <a:pPr algn="ctr"/>
+          </a:p>
+        </p:txBody>
+      </p:sp>
+      <p:sp>
+        <p:nvSpPr>
+          <p:cNvPr id="147" name="Rounded Rectangle 146"/>
+          <p:cNvSpPr/>
+          <p:nvPr/>
+        </p:nvSpPr>
+        <p:spPr>
+          <a:xfrm>
+            <a:off x="4969523" y="3920490"/>
+            <a:ext cx="155448" cy="155448"/>
+          </a:xfrm>
+          <a:prstGeom prst="roundRect">
+            <a:avLst>
+              <a:gd name="adj" fmla="val 29411"/>
+            </a:avLst>
+          </a:prstGeom>
+          <a:solidFill>
+            <a:srgbClr val="EFCDD6"/>
+          </a:solidFill>
+          <a:ln>
+            <a:noFill/>
+          </a:ln>
+          <a:effectLst/>
+        </p:spPr>
+        <p:style>
+          <a:lnRef idx="1">
+            <a:schemeClr val="accent1"/>
+          </a:lnRef>
+          <a:fillRef idx="3">
+            <a:schemeClr val="accent1"/>
+          </a:fillRef>
+          <a:effectRef idx="2">
+            <a:schemeClr val="accent1"/>
+          </a:effectRef>
+          <a:fontRef idx="minor">
+            <a:schemeClr val="lt1"/>
+          </a:fontRef>
+        </p:style>
+        <p:txBody>
+          <a:bodyPr rtlCol="0" anchor="ctr" wrap="square"/>
+          <a:lstStyle/>
+          <a:p>
+            <a:pPr algn="ctr"/>
+          </a:p>
+        </p:txBody>
+      </p:sp>
+      <p:sp>
+        <p:nvSpPr>
+          <p:cNvPr id="148" name="Rounded Rectangle 147"/>
+          <p:cNvSpPr/>
+          <p:nvPr/>
+        </p:nvSpPr>
+        <p:spPr>
+          <a:xfrm>
+            <a:off x="5441642" y="3920490"/>
+            <a:ext cx="155448" cy="155448"/>
+          </a:xfrm>
+          <a:prstGeom prst="roundRect">
+            <a:avLst>
+              <a:gd name="adj" fmla="val 29411"/>
+            </a:avLst>
+          </a:prstGeom>
+          <a:solidFill>
+            <a:srgbClr val="EFCDD6"/>
+          </a:solidFill>
+          <a:ln>
+            <a:noFill/>
+          </a:ln>
+          <a:effectLst/>
+        </p:spPr>
+        <p:style>
+          <a:lnRef idx="1">
+            <a:schemeClr val="accent1"/>
+          </a:lnRef>
+          <a:fillRef idx="3">
+            <a:schemeClr val="accent1"/>
+          </a:fillRef>
+          <a:effectRef idx="2">
+            <a:schemeClr val="accent1"/>
+          </a:effectRef>
+          <a:fontRef idx="minor">
+            <a:schemeClr val="lt1"/>
+          </a:fontRef>
+        </p:style>
+        <p:txBody>
+          <a:bodyPr rtlCol="0" anchor="ctr" wrap="square"/>
+          <a:lstStyle/>
+          <a:p>
+            <a:pPr algn="ctr"/>
+          </a:p>
+        </p:txBody>
+      </p:sp>
+      <p:sp>
+        <p:nvSpPr>
+          <p:cNvPr id="149" name="Rounded Rectangle 148"/>
+          <p:cNvSpPr/>
+          <p:nvPr/>
+        </p:nvSpPr>
+        <p:spPr>
+          <a:xfrm>
+            <a:off x="5913761" y="3920490"/>
+            <a:ext cx="155448" cy="155448"/>
+          </a:xfrm>
+          <a:prstGeom prst="roundRect">
+            <a:avLst>
+              <a:gd name="adj" fmla="val 29411"/>
+            </a:avLst>
+          </a:prstGeom>
+          <a:solidFill>
+            <a:srgbClr val="EFCDD6"/>
+          </a:solidFill>
+          <a:ln>
+            <a:noFill/>
+          </a:ln>
+          <a:effectLst/>
+        </p:spPr>
+        <p:style>
+          <a:lnRef idx="1">
+            <a:schemeClr val="accent1"/>
+          </a:lnRef>
+          <a:fillRef idx="3">
+            <a:schemeClr val="accent1"/>
+          </a:fillRef>
+          <a:effectRef idx="2">
+            <a:schemeClr val="accent1"/>
+          </a:effectRef>
+          <a:fontRef idx="minor">
+            <a:schemeClr val="lt1"/>
+          </a:fontRef>
+        </p:style>
+        <p:txBody>
+          <a:bodyPr rtlCol="0" anchor="ctr" wrap="square"/>
+          <a:lstStyle/>
+          <a:p>
+            <a:pPr algn="ctr"/>
+          </a:p>
+        </p:txBody>
+      </p:sp>
+      <p:sp>
+        <p:nvSpPr>
+          <p:cNvPr id="150" name="Rounded Rectangle 149"/>
+          <p:cNvSpPr/>
+          <p:nvPr/>
+        </p:nvSpPr>
+        <p:spPr>
+          <a:xfrm>
+            <a:off x="6385880" y="3920490"/>
+            <a:ext cx="155448" cy="155448"/>
+          </a:xfrm>
+          <a:prstGeom prst="roundRect">
+            <a:avLst>
+              <a:gd name="adj" fmla="val 29411"/>
+            </a:avLst>
+          </a:prstGeom>
+          <a:solidFill>
+            <a:srgbClr val="EFCDD6"/>
+          </a:solidFill>
+          <a:ln>
+            <a:noFill/>
+          </a:ln>
+          <a:effectLst/>
+        </p:spPr>
+        <p:style>
+          <a:lnRef idx="1">
+            <a:schemeClr val="accent1"/>
+          </a:lnRef>
+          <a:fillRef idx="3">
+            <a:schemeClr val="accent1"/>
+          </a:fillRef>
+          <a:effectRef idx="2">
+            <a:schemeClr val="accent1"/>
+          </a:effectRef>
+          <a:fontRef idx="minor">
+            <a:schemeClr val="lt1"/>
+          </a:fontRef>
+        </p:style>
+        <p:txBody>
+          <a:bodyPr rtlCol="0" anchor="ctr" wrap="square"/>
+          <a:lstStyle/>
+          <a:p>
+            <a:pPr algn="ctr"/>
+          </a:p>
+        </p:txBody>
+      </p:sp>
+      <p:sp>
+        <p:nvSpPr>
+          <p:cNvPr id="151" name="TextBox 150"/>
+          <p:cNvSpPr txBox="1"/>
+          <p:nvPr/>
+        </p:nvSpPr>
+        <p:spPr>
+          <a:xfrm>
+            <a:off x="822960" y="4169663"/>
+            <a:ext cx="1572768" cy="365760"/>
+          </a:xfrm>
+          <a:prstGeom prst="rect">
+            <a:avLst/>
+          </a:prstGeom>
+          <a:noFill/>
+        </p:spPr>
+        <p:txBody>
+          <a:bodyPr wrap="square" anchor="t" lIns="0" tIns="0" rIns="0" bIns="0">
+            <a:spAutoFit/>
+          </a:bodyPr>
+          <a:lstStyle/>
+          <a:p>
+            <a:pPr algn="l">
+              <a:lnSpc>
+                <a:spcPct val="100000"/>
+              </a:lnSpc>
+            </a:pPr>
+            <a:r>
+              <a:rPr sz="750" b="0">
+                <a:solidFill>
+                  <a:srgbClr val="0E112A"/>
+                </a:solidFill>
+                <a:latin typeface="Segoe UI"/>
+              </a:rPr>
+              <a:t>Emissão de CGD</a:t>
+            </a:r>
+          </a:p>
+        </p:txBody>
+      </p:sp>
+      <p:sp>
+        <p:nvSpPr>
+          <p:cNvPr id="152" name="Rounded Rectangle 151"/>
+          <p:cNvSpPr/>
+          <p:nvPr/>
+        </p:nvSpPr>
+        <p:spPr>
+          <a:xfrm>
+            <a:off x="6858000" y="4181094"/>
+            <a:ext cx="155448" cy="155448"/>
+          </a:xfrm>
+          <a:prstGeom prst="roundRect">
+            <a:avLst>
+              <a:gd name="adj" fmla="val 29411"/>
+            </a:avLst>
+          </a:prstGeom>
+          <a:solidFill>
+            <a:srgbClr val="CBBCF6"/>
+          </a:solidFill>
+          <a:ln>
+            <a:noFill/>
+          </a:ln>
+          <a:effectLst/>
+        </p:spPr>
+        <p:style>
+          <a:lnRef idx="1">
+            <a:schemeClr val="accent1"/>
+          </a:lnRef>
+          <a:fillRef idx="3">
+            <a:schemeClr val="accent1"/>
+          </a:fillRef>
+          <a:effectRef idx="2">
+            <a:schemeClr val="accent1"/>
+          </a:effectRef>
+          <a:fontRef idx="minor">
+            <a:schemeClr val="lt1"/>
+          </a:fontRef>
+        </p:style>
+        <p:txBody>
+          <a:bodyPr rtlCol="0" anchor="ctr" wrap="square"/>
+          <a:lstStyle/>
+          <a:p>
+            <a:pPr algn="ctr"/>
+          </a:p>
+        </p:txBody>
+      </p:sp>
+      <p:sp>
+        <p:nvSpPr>
+          <p:cNvPr id="153" name="Rounded Rectangle 152"/>
+          <p:cNvSpPr/>
+          <p:nvPr/>
+        </p:nvSpPr>
+        <p:spPr>
+          <a:xfrm>
+            <a:off x="749808" y="4389120"/>
+            <a:ext cx="10671048" cy="260603"/>
+          </a:xfrm>
+          <a:prstGeom prst="roundRect">
+            <a:avLst>
+              <a:gd name="adj" fmla="val 17543"/>
+            </a:avLst>
+          </a:prstGeom>
+          <a:solidFill>
+            <a:srgbClr val="F3F5FA"/>
+          </a:solidFill>
+          <a:ln>
+            <a:noFill/>
+          </a:ln>
+          <a:effectLst/>
+        </p:spPr>
+        <p:style>
+          <a:lnRef idx="1">
+            <a:schemeClr val="accent1"/>
+          </a:lnRef>
+          <a:fillRef idx="3">
+            <a:schemeClr val="accent1"/>
+          </a:fillRef>
+          <a:effectRef idx="2">
+            <a:schemeClr val="accent1"/>
+          </a:effectRef>
+          <a:fontRef idx="minor">
+            <a:schemeClr val="lt1"/>
+          </a:fontRef>
+        </p:style>
+        <p:txBody>
+          <a:bodyPr rtlCol="0" anchor="ctr" wrap="square"/>
+          <a:lstStyle/>
+          <a:p>
+            <a:pPr algn="ctr"/>
+          </a:p>
+        </p:txBody>
+      </p:sp>
+      <p:sp>
+        <p:nvSpPr>
+          <p:cNvPr id="154" name="TextBox 153"/>
+          <p:cNvSpPr txBox="1"/>
+          <p:nvPr/>
+        </p:nvSpPr>
+        <p:spPr>
+          <a:xfrm>
+            <a:off x="822960" y="4430268"/>
+            <a:ext cx="1572768" cy="365760"/>
+          </a:xfrm>
+          <a:prstGeom prst="rect">
+            <a:avLst/>
+          </a:prstGeom>
+          <a:noFill/>
+        </p:spPr>
+        <p:txBody>
+          <a:bodyPr wrap="square" anchor="t" lIns="0" tIns="0" rIns="0" bIns="0">
+            <a:spAutoFit/>
+          </a:bodyPr>
+          <a:lstStyle/>
+          <a:p>
+            <a:pPr algn="l">
+              <a:lnSpc>
+                <a:spcPct val="100000"/>
+              </a:lnSpc>
+            </a:pPr>
+            <a:r>
+              <a:rPr sz="750" b="0">
+                <a:solidFill>
+                  <a:srgbClr val="0E112A"/>
+                </a:solidFill>
+                <a:latin typeface="Segoe UI"/>
+              </a:rPr>
+              <a:t>EA ou Aviso Premio D+0</a:t>
+            </a:r>
+          </a:p>
+        </p:txBody>
+      </p:sp>
+      <p:sp>
+        <p:nvSpPr>
+          <p:cNvPr id="155" name="Rounded Rectangle 154"/>
+          <p:cNvSpPr/>
+          <p:nvPr/>
+        </p:nvSpPr>
+        <p:spPr>
+          <a:xfrm>
+            <a:off x="2608927" y="4441698"/>
+            <a:ext cx="155448" cy="155448"/>
+          </a:xfrm>
+          <a:prstGeom prst="roundRect">
+            <a:avLst>
+              <a:gd name="adj" fmla="val 29411"/>
+            </a:avLst>
+          </a:prstGeom>
+          <a:solidFill>
+            <a:srgbClr val="CBBCF6"/>
+          </a:solidFill>
+          <a:ln>
+            <a:noFill/>
+          </a:ln>
+          <a:effectLst/>
+        </p:spPr>
+        <p:style>
+          <a:lnRef idx="1">
+            <a:schemeClr val="accent1"/>
+          </a:lnRef>
+          <a:fillRef idx="3">
+            <a:schemeClr val="accent1"/>
+          </a:fillRef>
+          <a:effectRef idx="2">
+            <a:schemeClr val="accent1"/>
+          </a:effectRef>
+          <a:fontRef idx="minor">
+            <a:schemeClr val="lt1"/>
+          </a:fontRef>
+        </p:style>
+        <p:txBody>
+          <a:bodyPr rtlCol="0" anchor="ctr" wrap="square"/>
+          <a:lstStyle/>
+          <a:p>
+            <a:pPr algn="ctr"/>
+          </a:p>
+        </p:txBody>
+      </p:sp>
+      <p:sp>
+        <p:nvSpPr>
+          <p:cNvPr id="156" name="Rounded Rectangle 155"/>
+          <p:cNvSpPr/>
+          <p:nvPr/>
+        </p:nvSpPr>
+        <p:spPr>
+          <a:xfrm>
+            <a:off x="3081046" y="4441698"/>
+            <a:ext cx="155448" cy="155448"/>
+          </a:xfrm>
+          <a:prstGeom prst="roundRect">
+            <a:avLst>
+              <a:gd name="adj" fmla="val 29411"/>
+            </a:avLst>
+          </a:prstGeom>
+          <a:solidFill>
+            <a:srgbClr val="CBBCF6"/>
+          </a:solidFill>
+          <a:ln>
+            <a:noFill/>
+          </a:ln>
+          <a:effectLst/>
+        </p:spPr>
+        <p:style>
+          <a:lnRef idx="1">
+            <a:schemeClr val="accent1"/>
+          </a:lnRef>
+          <a:fillRef idx="3">
+            <a:schemeClr val="accent1"/>
+          </a:fillRef>
+          <a:effectRef idx="2">
+            <a:schemeClr val="accent1"/>
+          </a:effectRef>
+          <a:fontRef idx="minor">
+            <a:schemeClr val="lt1"/>
+          </a:fontRef>
+        </p:style>
+        <p:txBody>
+          <a:bodyPr rtlCol="0" anchor="ctr" wrap="square"/>
+          <a:lstStyle/>
+          <a:p>
+            <a:pPr algn="ctr"/>
+          </a:p>
+        </p:txBody>
+      </p:sp>
+      <p:sp>
+        <p:nvSpPr>
+          <p:cNvPr id="157" name="Rounded Rectangle 156"/>
+          <p:cNvSpPr/>
+          <p:nvPr/>
+        </p:nvSpPr>
+        <p:spPr>
+          <a:xfrm>
+            <a:off x="3553165" y="4441698"/>
+            <a:ext cx="155448" cy="155448"/>
+          </a:xfrm>
+          <a:prstGeom prst="roundRect">
+            <a:avLst>
+              <a:gd name="adj" fmla="val 29411"/>
+            </a:avLst>
+          </a:prstGeom>
+          <a:solidFill>
+            <a:srgbClr val="CBBCF6"/>
+          </a:solidFill>
+          <a:ln>
+            <a:noFill/>
+          </a:ln>
+          <a:effectLst/>
+        </p:spPr>
+        <p:style>
+          <a:lnRef idx="1">
+            <a:schemeClr val="accent1"/>
+          </a:lnRef>
+          <a:fillRef idx="3">
+            <a:schemeClr val="accent1"/>
+          </a:fillRef>
+          <a:effectRef idx="2">
+            <a:schemeClr val="accent1"/>
+          </a:effectRef>
+          <a:fontRef idx="minor">
+            <a:schemeClr val="lt1"/>
+          </a:fontRef>
+        </p:style>
+        <p:txBody>
+          <a:bodyPr rtlCol="0" anchor="ctr" wrap="square"/>
+          <a:lstStyle/>
+          <a:p>
+            <a:pPr algn="ctr"/>
+          </a:p>
+        </p:txBody>
+      </p:sp>
+      <p:sp>
+        <p:nvSpPr>
+          <p:cNvPr id="158" name="Rounded Rectangle 157"/>
+          <p:cNvSpPr/>
+          <p:nvPr/>
+        </p:nvSpPr>
+        <p:spPr>
+          <a:xfrm>
+            <a:off x="4025285" y="4441698"/>
+            <a:ext cx="155448" cy="155448"/>
+          </a:xfrm>
+          <a:prstGeom prst="roundRect">
+            <a:avLst>
+              <a:gd name="adj" fmla="val 29411"/>
+            </a:avLst>
+          </a:prstGeom>
+          <a:solidFill>
+            <a:srgbClr val="CBBCF6"/>
+          </a:solidFill>
+          <a:ln>
+            <a:noFill/>
+          </a:ln>
+          <a:effectLst/>
+        </p:spPr>
+        <p:style>
+          <a:lnRef idx="1">
+            <a:schemeClr val="accent1"/>
+          </a:lnRef>
+          <a:fillRef idx="3">
+            <a:schemeClr val="accent1"/>
+          </a:fillRef>
+          <a:effectRef idx="2">
+            <a:schemeClr val="accent1"/>
+          </a:effectRef>
+          <a:fontRef idx="minor">
+            <a:schemeClr val="lt1"/>
+          </a:fontRef>
+        </p:style>
+        <p:txBody>
+          <a:bodyPr rtlCol="0" anchor="ctr" wrap="square"/>
+          <a:lstStyle/>
+          <a:p>
+            <a:pPr algn="ctr"/>
+          </a:p>
+        </p:txBody>
+      </p:sp>
+      <p:sp>
+        <p:nvSpPr>
+          <p:cNvPr id="159" name="Rounded Rectangle 158"/>
+          <p:cNvSpPr/>
+          <p:nvPr/>
+        </p:nvSpPr>
+        <p:spPr>
+          <a:xfrm>
+            <a:off x="4497404" y="4441698"/>
+            <a:ext cx="155448" cy="155448"/>
+          </a:xfrm>
+          <a:prstGeom prst="roundRect">
+            <a:avLst>
+              <a:gd name="adj" fmla="val 29411"/>
+            </a:avLst>
+          </a:prstGeom>
+          <a:solidFill>
+            <a:srgbClr val="CBBCF6"/>
+          </a:solidFill>
+          <a:ln>
+            <a:noFill/>
+          </a:ln>
+          <a:effectLst/>
+        </p:spPr>
+        <p:style>
+          <a:lnRef idx="1">
+            <a:schemeClr val="accent1"/>
+          </a:lnRef>
+          <a:fillRef idx="3">
+            <a:schemeClr val="accent1"/>
+          </a:fillRef>
+          <a:effectRef idx="2">
+            <a:schemeClr val="accent1"/>
+          </a:effectRef>
+          <a:fontRef idx="minor">
+            <a:schemeClr val="lt1"/>
+          </a:fontRef>
+        </p:style>
+        <p:txBody>
+          <a:bodyPr rtlCol="0" anchor="ctr" wrap="square"/>
+          <a:lstStyle/>
+          <a:p>
+            <a:pPr algn="ctr"/>
+          </a:p>
+        </p:txBody>
+      </p:sp>
+      <p:sp>
+        <p:nvSpPr>
+          <p:cNvPr id="160" name="Rounded Rectangle 159"/>
+          <p:cNvSpPr/>
+          <p:nvPr/>
+        </p:nvSpPr>
+        <p:spPr>
+          <a:xfrm>
+            <a:off x="4969523" y="4441698"/>
+            <a:ext cx="155448" cy="155448"/>
+          </a:xfrm>
+          <a:prstGeom prst="roundRect">
+            <a:avLst>
+              <a:gd name="adj" fmla="val 29411"/>
+            </a:avLst>
+          </a:prstGeom>
+          <a:solidFill>
+            <a:srgbClr val="CBBCF6"/>
+          </a:solidFill>
+          <a:ln>
+            <a:noFill/>
+          </a:ln>
+          <a:effectLst/>
+        </p:spPr>
+        <p:style>
+          <a:lnRef idx="1">
+            <a:schemeClr val="accent1"/>
+          </a:lnRef>
+          <a:fillRef idx="3">
+            <a:schemeClr val="accent1"/>
+          </a:fillRef>
+          <a:effectRef idx="2">
+            <a:schemeClr val="accent1"/>
+          </a:effectRef>
+          <a:fontRef idx="minor">
+            <a:schemeClr val="lt1"/>
+          </a:fontRef>
+        </p:style>
+        <p:txBody>
+          <a:bodyPr rtlCol="0" anchor="ctr" wrap="square"/>
+          <a:lstStyle/>
+          <a:p>
+            <a:pPr algn="ctr"/>
+          </a:p>
+        </p:txBody>
+      </p:sp>
+      <p:sp>
+        <p:nvSpPr>
+          <p:cNvPr id="161" name="Rounded Rectangle 160"/>
+          <p:cNvSpPr/>
+          <p:nvPr/>
+        </p:nvSpPr>
+        <p:spPr>
+          <a:xfrm>
+            <a:off x="5441642" y="4441698"/>
+            <a:ext cx="155448" cy="155448"/>
+          </a:xfrm>
+          <a:prstGeom prst="roundRect">
+            <a:avLst>
+              <a:gd name="adj" fmla="val 29411"/>
+            </a:avLst>
+          </a:prstGeom>
+          <a:solidFill>
+            <a:srgbClr val="CBBCF6"/>
+          </a:solidFill>
+          <a:ln>
+            <a:noFill/>
+          </a:ln>
+          <a:effectLst/>
+        </p:spPr>
+        <p:style>
+          <a:lnRef idx="1">
+            <a:schemeClr val="accent1"/>
+          </a:lnRef>
+          <a:fillRef idx="3">
+            <a:schemeClr val="accent1"/>
+          </a:fillRef>
+          <a:effectRef idx="2">
+            <a:schemeClr val="accent1"/>
+          </a:effectRef>
+          <a:fontRef idx="minor">
+            <a:schemeClr val="lt1"/>
+          </a:fontRef>
+        </p:style>
+        <p:txBody>
+          <a:bodyPr rtlCol="0" anchor="ctr" wrap="square"/>
+          <a:lstStyle/>
+          <a:p>
+            <a:pPr algn="ctr"/>
+          </a:p>
+        </p:txBody>
+      </p:sp>
+      <p:sp>
+        <p:nvSpPr>
+          <p:cNvPr id="162" name="Rounded Rectangle 161"/>
+          <p:cNvSpPr/>
+          <p:nvPr/>
+        </p:nvSpPr>
+        <p:spPr>
+          <a:xfrm>
+            <a:off x="5913761" y="4441698"/>
+            <a:ext cx="155448" cy="155448"/>
+          </a:xfrm>
+          <a:prstGeom prst="roundRect">
+            <a:avLst>
+              <a:gd name="adj" fmla="val 29411"/>
+            </a:avLst>
+          </a:prstGeom>
+          <a:solidFill>
+            <a:srgbClr val="0066CC"/>
+          </a:solidFill>
+          <a:ln>
+            <a:noFill/>
+          </a:ln>
+          <a:effectLst/>
+        </p:spPr>
+        <p:style>
+          <a:lnRef idx="1">
+            <a:schemeClr val="accent1"/>
+          </a:lnRef>
+          <a:fillRef idx="3">
+            <a:schemeClr val="accent1"/>
+          </a:fillRef>
+          <a:effectRef idx="2">
+            <a:schemeClr val="accent1"/>
+          </a:effectRef>
+          <a:fontRef idx="minor">
+            <a:schemeClr val="lt1"/>
+          </a:fontRef>
+        </p:style>
+        <p:txBody>
+          <a:bodyPr rtlCol="0" anchor="ctr" wrap="square"/>
+          <a:lstStyle/>
+          <a:p>
+            <a:pPr algn="ctr"/>
+          </a:p>
+        </p:txBody>
+      </p:sp>
+      <p:sp>
+        <p:nvSpPr>
+          <p:cNvPr id="163" name="Rounded Rectangle 162"/>
+          <p:cNvSpPr/>
+          <p:nvPr/>
+        </p:nvSpPr>
+        <p:spPr>
+          <a:xfrm>
+            <a:off x="6385880" y="4441698"/>
+            <a:ext cx="155448" cy="155448"/>
+          </a:xfrm>
+          <a:prstGeom prst="roundRect">
+            <a:avLst>
+              <a:gd name="adj" fmla="val 29411"/>
+            </a:avLst>
+          </a:prstGeom>
+          <a:solidFill>
+            <a:srgbClr val="0066CC"/>
+          </a:solidFill>
+          <a:ln>
+            <a:noFill/>
+          </a:ln>
+          <a:effectLst/>
+        </p:spPr>
+        <p:style>
+          <a:lnRef idx="1">
+            <a:schemeClr val="accent1"/>
+          </a:lnRef>
+          <a:fillRef idx="3">
+            <a:schemeClr val="accent1"/>
+          </a:fillRef>
+          <a:effectRef idx="2">
+            <a:schemeClr val="accent1"/>
+          </a:effectRef>
+          <a:fontRef idx="minor">
+            <a:schemeClr val="lt1"/>
+          </a:fontRef>
+        </p:style>
+        <p:txBody>
+          <a:bodyPr rtlCol="0" anchor="ctr" wrap="square"/>
+          <a:lstStyle/>
+          <a:p>
+            <a:pPr algn="ctr"/>
+          </a:p>
+        </p:txBody>
+      </p:sp>
+      <p:sp>
+        <p:nvSpPr>
+          <p:cNvPr id="164" name="TextBox 163"/>
+          <p:cNvSpPr txBox="1"/>
+          <p:nvPr/>
+        </p:nvSpPr>
+        <p:spPr>
+          <a:xfrm>
+            <a:off x="822960" y="4690872"/>
+            <a:ext cx="1572768" cy="365760"/>
+          </a:xfrm>
+          <a:prstGeom prst="rect">
+            <a:avLst/>
+          </a:prstGeom>
+          <a:noFill/>
+        </p:spPr>
+        <p:txBody>
+          <a:bodyPr wrap="square" anchor="t" lIns="0" tIns="0" rIns="0" bIns="0">
+            <a:spAutoFit/>
+          </a:bodyPr>
+          <a:lstStyle/>
+          <a:p>
+            <a:pPr algn="l">
+              <a:lnSpc>
+                <a:spcPct val="100000"/>
+              </a:lnSpc>
+            </a:pPr>
+            <a:r>
+              <a:rPr sz="750" b="0">
+                <a:solidFill>
+                  <a:srgbClr val="0E112A"/>
+                </a:solidFill>
+                <a:latin typeface="Segoe UI"/>
+              </a:rPr>
+              <a:t>Reconciliação Comitente</a:t>
+            </a:r>
+          </a:p>
+        </p:txBody>
+      </p:sp>
+      <p:sp>
+        <p:nvSpPr>
+          <p:cNvPr id="165" name="Rounded Rectangle 164"/>
+          <p:cNvSpPr/>
+          <p:nvPr/>
+        </p:nvSpPr>
+        <p:spPr>
+          <a:xfrm>
+            <a:off x="6858000" y="4702302"/>
+            <a:ext cx="155448" cy="155448"/>
+          </a:xfrm>
+          <a:prstGeom prst="roundRect">
+            <a:avLst>
+              <a:gd name="adj" fmla="val 29411"/>
+            </a:avLst>
+          </a:prstGeom>
+          <a:solidFill>
+            <a:srgbClr val="0066CC"/>
+          </a:solidFill>
+          <a:ln>
+            <a:noFill/>
+          </a:ln>
+          <a:effectLst/>
+        </p:spPr>
+        <p:style>
+          <a:lnRef idx="1">
+            <a:schemeClr val="accent1"/>
+          </a:lnRef>
+          <a:fillRef idx="3">
+            <a:schemeClr val="accent1"/>
+          </a:fillRef>
+          <a:effectRef idx="2">
+            <a:schemeClr val="accent1"/>
+          </a:effectRef>
+          <a:fontRef idx="minor">
+            <a:schemeClr val="lt1"/>
+          </a:fontRef>
+        </p:style>
+        <p:txBody>
+          <a:bodyPr rtlCol="0" anchor="ctr" wrap="square"/>
+          <a:lstStyle/>
+          <a:p>
+            <a:pPr algn="ctr"/>
+          </a:p>
+        </p:txBody>
+      </p:sp>
+      <p:sp>
+        <p:nvSpPr>
+          <p:cNvPr id="166" name="Rounded Rectangle 165"/>
+          <p:cNvSpPr/>
+          <p:nvPr/>
+        </p:nvSpPr>
+        <p:spPr>
+          <a:xfrm>
+            <a:off x="749808" y="4910327"/>
+            <a:ext cx="10671048" cy="260603"/>
+          </a:xfrm>
+          <a:prstGeom prst="roundRect">
+            <a:avLst>
+              <a:gd name="adj" fmla="val 17543"/>
+            </a:avLst>
+          </a:prstGeom>
+          <a:solidFill>
+            <a:srgbClr val="F3F5FA"/>
+          </a:solidFill>
+          <a:ln>
+            <a:noFill/>
+          </a:ln>
+          <a:effectLst/>
+        </p:spPr>
+        <p:style>
+          <a:lnRef idx="1">
+            <a:schemeClr val="accent1"/>
+          </a:lnRef>
+          <a:fillRef idx="3">
+            <a:schemeClr val="accent1"/>
+          </a:fillRef>
+          <a:effectRef idx="2">
+            <a:schemeClr val="accent1"/>
+          </a:effectRef>
+          <a:fontRef idx="minor">
+            <a:schemeClr val="lt1"/>
+          </a:fontRef>
+        </p:style>
+        <p:txBody>
+          <a:bodyPr rtlCol="0" anchor="ctr" wrap="square"/>
+          <a:lstStyle/>
+          <a:p>
+            <a:pPr algn="ctr"/>
+          </a:p>
+        </p:txBody>
+      </p:sp>
+      <p:sp>
+        <p:nvSpPr>
+          <p:cNvPr id="167" name="TextBox 166"/>
+          <p:cNvSpPr txBox="1"/>
+          <p:nvPr/>
+        </p:nvSpPr>
+        <p:spPr>
+          <a:xfrm>
+            <a:off x="822960" y="4951475"/>
+            <a:ext cx="1572768" cy="365760"/>
+          </a:xfrm>
+          <a:prstGeom prst="rect">
+            <a:avLst/>
+          </a:prstGeom>
+          <a:noFill/>
+        </p:spPr>
+        <p:txBody>
+          <a:bodyPr wrap="square" anchor="t" lIns="0" tIns="0" rIns="0" bIns="0">
+            <a:spAutoFit/>
+          </a:bodyPr>
+          <a:lstStyle/>
+          <a:p>
+            <a:pPr algn="l">
+              <a:lnSpc>
+                <a:spcPct val="100000"/>
+              </a:lnSpc>
+            </a:pPr>
+            <a:r>
+              <a:rPr sz="750" b="0">
+                <a:solidFill>
+                  <a:srgbClr val="0E112A"/>
+                </a:solidFill>
+                <a:latin typeface="Segoe UI"/>
+              </a:rPr>
+              <a:t>Controle Pay/Rec</a:t>
+            </a:r>
+          </a:p>
+        </p:txBody>
+      </p:sp>
+      <p:sp>
+        <p:nvSpPr>
+          <p:cNvPr id="168" name="Rounded Rectangle 167"/>
+          <p:cNvSpPr/>
+          <p:nvPr/>
+        </p:nvSpPr>
+        <p:spPr>
+          <a:xfrm>
+            <a:off x="6858000" y="4962905"/>
+            <a:ext cx="155448" cy="155448"/>
+          </a:xfrm>
+          <a:prstGeom prst="roundRect">
+            <a:avLst>
+              <a:gd name="adj" fmla="val 29411"/>
+            </a:avLst>
+          </a:prstGeom>
+          <a:solidFill>
+            <a:srgbClr val="0066CC"/>
+          </a:solidFill>
+          <a:ln>
+            <a:noFill/>
+          </a:ln>
+          <a:effectLst/>
+        </p:spPr>
+        <p:style>
+          <a:lnRef idx="1">
+            <a:schemeClr val="accent1"/>
+          </a:lnRef>
+          <a:fillRef idx="3">
+            <a:schemeClr val="accent1"/>
+          </a:fillRef>
+          <a:effectRef idx="2">
+            <a:schemeClr val="accent1"/>
+          </a:effectRef>
+          <a:fontRef idx="minor">
+            <a:schemeClr val="lt1"/>
+          </a:fontRef>
+        </p:style>
+        <p:txBody>
+          <a:bodyPr rtlCol="0" anchor="ctr" wrap="square"/>
+          <a:lstStyle/>
+          <a:p>
+            <a:pPr algn="ctr"/>
+          </a:p>
+        </p:txBody>
+      </p:sp>
+      <p:sp>
+        <p:nvSpPr>
+          <p:cNvPr id="169" name="TextBox 168"/>
+          <p:cNvSpPr txBox="1"/>
+          <p:nvPr/>
+        </p:nvSpPr>
+        <p:spPr>
+          <a:xfrm>
+            <a:off x="822960" y="5212079"/>
+            <a:ext cx="1572768" cy="365760"/>
+          </a:xfrm>
+          <a:prstGeom prst="rect">
+            <a:avLst/>
+          </a:prstGeom>
+          <a:noFill/>
+        </p:spPr>
+        <p:txBody>
+          <a:bodyPr wrap="square" anchor="t" lIns="0" tIns="0" rIns="0" bIns="0">
+            <a:spAutoFit/>
+          </a:bodyPr>
+          <a:lstStyle/>
+          <a:p>
+            <a:pPr algn="l">
+              <a:lnSpc>
+                <a:spcPct val="100000"/>
+              </a:lnSpc>
+            </a:pPr>
+            <a:r>
+              <a:rPr sz="750" b="0">
+                <a:solidFill>
+                  <a:srgbClr val="0E112A"/>
+                </a:solidFill>
+                <a:latin typeface="Segoe UI"/>
+              </a:rPr>
+              <a:t>Inventário Eletronico</a:t>
+            </a:r>
+          </a:p>
+        </p:txBody>
+      </p:sp>
+      <p:sp>
+        <p:nvSpPr>
+          <p:cNvPr id="170" name="Rounded Rectangle 169"/>
+          <p:cNvSpPr/>
+          <p:nvPr/>
+        </p:nvSpPr>
+        <p:spPr>
+          <a:xfrm>
+            <a:off x="6858000" y="5223509"/>
+            <a:ext cx="155448" cy="155448"/>
+          </a:xfrm>
+          <a:prstGeom prst="roundRect">
+            <a:avLst>
+              <a:gd name="adj" fmla="val 29411"/>
+            </a:avLst>
+          </a:prstGeom>
+          <a:solidFill>
+            <a:srgbClr val="0066CC"/>
+          </a:solidFill>
+          <a:ln>
+            <a:noFill/>
+          </a:ln>
+          <a:effectLst/>
+        </p:spPr>
+        <p:style>
+          <a:lnRef idx="1">
+            <a:schemeClr val="accent1"/>
+          </a:lnRef>
+          <a:fillRef idx="3">
+            <a:schemeClr val="accent1"/>
+          </a:fillRef>
+          <a:effectRef idx="2">
+            <a:schemeClr val="accent1"/>
+          </a:effectRef>
+          <a:fontRef idx="minor">
+            <a:schemeClr val="lt1"/>
+          </a:fontRef>
+        </p:style>
+        <p:txBody>
+          <a:bodyPr rtlCol="0" anchor="ctr" wrap="square"/>
+          <a:lstStyle/>
+          <a:p>
+            <a:pPr algn="ctr"/>
+          </a:p>
+        </p:txBody>
+      </p:sp>
+      <p:sp>
+        <p:nvSpPr>
+          <p:cNvPr id="171" name="Rounded Rectangle 170"/>
+          <p:cNvSpPr/>
+          <p:nvPr/>
+        </p:nvSpPr>
+        <p:spPr>
+          <a:xfrm>
+            <a:off x="749808" y="5431536"/>
+            <a:ext cx="10671048" cy="260603"/>
+          </a:xfrm>
+          <a:prstGeom prst="roundRect">
+            <a:avLst>
+              <a:gd name="adj" fmla="val 17543"/>
+            </a:avLst>
+          </a:prstGeom>
+          <a:solidFill>
+            <a:srgbClr val="F3F5FA"/>
+          </a:solidFill>
+          <a:ln>
+            <a:noFill/>
+          </a:ln>
+          <a:effectLst/>
+        </p:spPr>
+        <p:style>
+          <a:lnRef idx="1">
+            <a:schemeClr val="accent1"/>
+          </a:lnRef>
+          <a:fillRef idx="3">
+            <a:schemeClr val="accent1"/>
+          </a:fillRef>
+          <a:effectRef idx="2">
+            <a:schemeClr val="accent1"/>
+          </a:effectRef>
+          <a:fontRef idx="minor">
+            <a:schemeClr val="lt1"/>
+          </a:fontRef>
+        </p:style>
+        <p:txBody>
+          <a:bodyPr rtlCol="0" anchor="ctr" wrap="square"/>
+          <a:lstStyle/>
+          <a:p>
+            <a:pPr algn="ctr"/>
+          </a:p>
+        </p:txBody>
+      </p:sp>
+      <p:sp>
+        <p:nvSpPr>
+          <p:cNvPr id="172" name="TextBox 171"/>
+          <p:cNvSpPr txBox="1"/>
+          <p:nvPr/>
+        </p:nvSpPr>
+        <p:spPr>
+          <a:xfrm>
+            <a:off x="822960" y="5472683"/>
+            <a:ext cx="1572768" cy="365760"/>
+          </a:xfrm>
+          <a:prstGeom prst="rect">
+            <a:avLst/>
+          </a:prstGeom>
+          <a:noFill/>
+        </p:spPr>
+        <p:txBody>
+          <a:bodyPr wrap="square" anchor="t" lIns="0" tIns="0" rIns="0" bIns="0">
+            <a:spAutoFit/>
+          </a:bodyPr>
+          <a:lstStyle/>
+          <a:p>
+            <a:pPr algn="l">
+              <a:lnSpc>
+                <a:spcPct val="100000"/>
+              </a:lnSpc>
+            </a:pPr>
+            <a:r>
+              <a:rPr sz="750" b="0">
+                <a:solidFill>
+                  <a:srgbClr val="0E112A"/>
+                </a:solidFill>
+                <a:latin typeface="Segoe UI"/>
+              </a:rPr>
+              <a:t>Intrag</a:t>
+            </a:r>
+          </a:p>
+        </p:txBody>
+      </p:sp>
+      <p:sp>
+        <p:nvSpPr>
+          <p:cNvPr id="173" name="Rounded Rectangle 172"/>
+          <p:cNvSpPr/>
+          <p:nvPr/>
+        </p:nvSpPr>
+        <p:spPr>
+          <a:xfrm>
+            <a:off x="2608927" y="5484114"/>
+            <a:ext cx="155448" cy="155448"/>
+          </a:xfrm>
+          <a:prstGeom prst="roundRect">
+            <a:avLst>
+              <a:gd name="adj" fmla="val 29411"/>
+            </a:avLst>
+          </a:prstGeom>
+          <a:solidFill>
+            <a:srgbClr val="CBBCF6"/>
+          </a:solidFill>
+          <a:ln>
+            <a:noFill/>
+          </a:ln>
+          <a:effectLst/>
+        </p:spPr>
+        <p:style>
+          <a:lnRef idx="1">
+            <a:schemeClr val="accent1"/>
+          </a:lnRef>
+          <a:fillRef idx="3">
+            <a:schemeClr val="accent1"/>
+          </a:fillRef>
+          <a:effectRef idx="2">
+            <a:schemeClr val="accent1"/>
+          </a:effectRef>
+          <a:fontRef idx="minor">
+            <a:schemeClr val="lt1"/>
+          </a:fontRef>
+        </p:style>
+        <p:txBody>
+          <a:bodyPr rtlCol="0" anchor="ctr" wrap="square"/>
+          <a:lstStyle/>
+          <a:p>
+            <a:pPr algn="ctr"/>
+          </a:p>
+        </p:txBody>
+      </p:sp>
+      <p:sp>
+        <p:nvSpPr>
+          <p:cNvPr id="174" name="Rounded Rectangle 173"/>
+          <p:cNvSpPr/>
+          <p:nvPr/>
+        </p:nvSpPr>
+        <p:spPr>
+          <a:xfrm>
+            <a:off x="3081046" y="5484114"/>
+            <a:ext cx="155448" cy="155448"/>
+          </a:xfrm>
+          <a:prstGeom prst="roundRect">
+            <a:avLst>
+              <a:gd name="adj" fmla="val 29411"/>
+            </a:avLst>
+          </a:prstGeom>
+          <a:solidFill>
+            <a:srgbClr val="CBBCF6"/>
+          </a:solidFill>
+          <a:ln>
+            <a:noFill/>
+          </a:ln>
+          <a:effectLst/>
+        </p:spPr>
+        <p:style>
+          <a:lnRef idx="1">
+            <a:schemeClr val="accent1"/>
+          </a:lnRef>
+          <a:fillRef idx="3">
+            <a:schemeClr val="accent1"/>
+          </a:fillRef>
+          <a:effectRef idx="2">
+            <a:schemeClr val="accent1"/>
+          </a:effectRef>
+          <a:fontRef idx="minor">
+            <a:schemeClr val="lt1"/>
+          </a:fontRef>
+        </p:style>
+        <p:txBody>
+          <a:bodyPr rtlCol="0" anchor="ctr" wrap="square"/>
+          <a:lstStyle/>
+          <a:p>
+            <a:pPr algn="ctr"/>
+          </a:p>
+        </p:txBody>
+      </p:sp>
+      <p:sp>
+        <p:nvSpPr>
+          <p:cNvPr id="175" name="Rounded Rectangle 174"/>
+          <p:cNvSpPr/>
+          <p:nvPr/>
+        </p:nvSpPr>
+        <p:spPr>
+          <a:xfrm>
+            <a:off x="3553165" y="5484114"/>
+            <a:ext cx="155448" cy="155448"/>
+          </a:xfrm>
+          <a:prstGeom prst="roundRect">
+            <a:avLst>
+              <a:gd name="adj" fmla="val 29411"/>
+            </a:avLst>
+          </a:prstGeom>
+          <a:solidFill>
+            <a:srgbClr val="0066CC"/>
+          </a:solidFill>
+          <a:ln>
+            <a:noFill/>
+          </a:ln>
+          <a:effectLst/>
+        </p:spPr>
+        <p:style>
+          <a:lnRef idx="1">
+            <a:schemeClr val="accent1"/>
+          </a:lnRef>
+          <a:fillRef idx="3">
+            <a:schemeClr val="accent1"/>
+          </a:fillRef>
+          <a:effectRef idx="2">
+            <a:schemeClr val="accent1"/>
+          </a:effectRef>
+          <a:fontRef idx="minor">
+            <a:schemeClr val="lt1"/>
+          </a:fontRef>
+        </p:style>
+        <p:txBody>
+          <a:bodyPr rtlCol="0" anchor="ctr" wrap="square"/>
+          <a:lstStyle/>
+          <a:p>
+            <a:pPr algn="ctr"/>
+          </a:p>
+        </p:txBody>
+      </p:sp>
+      <p:sp>
+        <p:nvSpPr>
+          <p:cNvPr id="176" name="Rounded Rectangle 175"/>
+          <p:cNvSpPr/>
+          <p:nvPr/>
+        </p:nvSpPr>
+        <p:spPr>
+          <a:xfrm>
+            <a:off x="4025285" y="5484114"/>
+            <a:ext cx="155448" cy="155448"/>
+          </a:xfrm>
+          <a:prstGeom prst="roundRect">
+            <a:avLst>
+              <a:gd name="adj" fmla="val 29411"/>
+            </a:avLst>
+          </a:prstGeom>
+          <a:solidFill>
+            <a:srgbClr val="0066CC"/>
+          </a:solidFill>
+          <a:ln>
+            <a:noFill/>
+          </a:ln>
+          <a:effectLst/>
+        </p:spPr>
+        <p:style>
+          <a:lnRef idx="1">
+            <a:schemeClr val="accent1"/>
+          </a:lnRef>
+          <a:fillRef idx="3">
+            <a:schemeClr val="accent1"/>
+          </a:fillRef>
+          <a:effectRef idx="2">
+            <a:schemeClr val="accent1"/>
+          </a:effectRef>
+          <a:fontRef idx="minor">
+            <a:schemeClr val="lt1"/>
+          </a:fontRef>
+        </p:style>
+        <p:txBody>
+          <a:bodyPr rtlCol="0" anchor="ctr" wrap="square"/>
+          <a:lstStyle/>
+          <a:p>
+            <a:pPr algn="ctr"/>
+          </a:p>
+        </p:txBody>
+      </p:sp>
+      <p:sp>
+        <p:nvSpPr>
+          <p:cNvPr id="177" name="Rounded Rectangle 176"/>
+          <p:cNvSpPr/>
+          <p:nvPr/>
+        </p:nvSpPr>
+        <p:spPr>
+          <a:xfrm>
+            <a:off x="4497404" y="5484114"/>
+            <a:ext cx="155448" cy="155448"/>
+          </a:xfrm>
+          <a:prstGeom prst="roundRect">
+            <a:avLst>
+              <a:gd name="adj" fmla="val 29411"/>
+            </a:avLst>
+          </a:prstGeom>
+          <a:solidFill>
+            <a:srgbClr val="0066CC"/>
+          </a:solidFill>
+          <a:ln>
+            <a:noFill/>
+          </a:ln>
+          <a:effectLst/>
+        </p:spPr>
+        <p:style>
+          <a:lnRef idx="1">
+            <a:schemeClr val="accent1"/>
+          </a:lnRef>
+          <a:fillRef idx="3">
+            <a:schemeClr val="accent1"/>
+          </a:fillRef>
+          <a:effectRef idx="2">
+            <a:schemeClr val="accent1"/>
+          </a:effectRef>
+          <a:fontRef idx="minor">
+            <a:schemeClr val="lt1"/>
+          </a:fontRef>
+        </p:style>
+        <p:txBody>
+          <a:bodyPr rtlCol="0" anchor="ctr" wrap="square"/>
+          <a:lstStyle/>
+          <a:p>
+            <a:pPr algn="ctr"/>
+          </a:p>
+        </p:txBody>
+      </p:sp>
+      <p:sp>
+        <p:nvSpPr>
+          <p:cNvPr id="178" name="Rounded Rectangle 177"/>
+          <p:cNvSpPr/>
+          <p:nvPr/>
+        </p:nvSpPr>
+        <p:spPr>
+          <a:xfrm>
+            <a:off x="4969523" y="5484114"/>
+            <a:ext cx="155448" cy="155448"/>
+          </a:xfrm>
+          <a:prstGeom prst="roundRect">
+            <a:avLst>
+              <a:gd name="adj" fmla="val 29411"/>
+            </a:avLst>
+          </a:prstGeom>
+          <a:solidFill>
+            <a:srgbClr val="0066CC"/>
+          </a:solidFill>
+          <a:ln>
+            <a:noFill/>
+          </a:ln>
+          <a:effectLst/>
+        </p:spPr>
+        <p:style>
+          <a:lnRef idx="1">
+            <a:schemeClr val="accent1"/>
+          </a:lnRef>
+          <a:fillRef idx="3">
+            <a:schemeClr val="accent1"/>
+          </a:fillRef>
+          <a:effectRef idx="2">
+            <a:schemeClr val="accent1"/>
+          </a:effectRef>
+          <a:fontRef idx="minor">
+            <a:schemeClr val="lt1"/>
+          </a:fontRef>
+        </p:style>
+        <p:txBody>
+          <a:bodyPr rtlCol="0" anchor="ctr" wrap="square"/>
+          <a:lstStyle/>
+          <a:p>
+            <a:pPr algn="ctr"/>
+          </a:p>
+        </p:txBody>
+      </p:sp>
+      <p:sp>
+        <p:nvSpPr>
+          <p:cNvPr id="179" name="Rounded Rectangle 178"/>
+          <p:cNvSpPr/>
+          <p:nvPr/>
+        </p:nvSpPr>
+        <p:spPr>
+          <a:xfrm>
+            <a:off x="5441642" y="5484114"/>
+            <a:ext cx="155448" cy="155448"/>
+          </a:xfrm>
+          <a:prstGeom prst="roundRect">
+            <a:avLst>
+              <a:gd name="adj" fmla="val 29411"/>
+            </a:avLst>
+          </a:prstGeom>
+          <a:solidFill>
+            <a:srgbClr val="CBBCF6"/>
+          </a:solidFill>
+          <a:ln>
+            <a:noFill/>
+          </a:ln>
+          <a:effectLst/>
+        </p:spPr>
+        <p:style>
+          <a:lnRef idx="1">
+            <a:schemeClr val="accent1"/>
+          </a:lnRef>
+          <a:fillRef idx="3">
+            <a:schemeClr val="accent1"/>
+          </a:fillRef>
+          <a:effectRef idx="2">
+            <a:schemeClr val="accent1"/>
+          </a:effectRef>
+          <a:fontRef idx="minor">
+            <a:schemeClr val="lt1"/>
+          </a:fontRef>
+        </p:style>
+        <p:txBody>
+          <a:bodyPr rtlCol="0" anchor="ctr" wrap="square"/>
+          <a:lstStyle/>
+          <a:p>
+            <a:pPr algn="ctr"/>
+          </a:p>
+        </p:txBody>
+      </p:sp>
+      <p:sp>
+        <p:nvSpPr>
+          <p:cNvPr id="180" name="Rounded Rectangle 179"/>
+          <p:cNvSpPr/>
+          <p:nvPr/>
+        </p:nvSpPr>
+        <p:spPr>
+          <a:xfrm>
+            <a:off x="5913761" y="5484114"/>
+            <a:ext cx="155448" cy="155448"/>
+          </a:xfrm>
+          <a:prstGeom prst="roundRect">
+            <a:avLst>
+              <a:gd name="adj" fmla="val 29411"/>
+            </a:avLst>
+          </a:prstGeom>
+          <a:solidFill>
+            <a:srgbClr val="0066CC"/>
+          </a:solidFill>
+          <a:ln>
+            <a:noFill/>
+          </a:ln>
+          <a:effectLst/>
+        </p:spPr>
+        <p:style>
+          <a:lnRef idx="1">
+            <a:schemeClr val="accent1"/>
+          </a:lnRef>
+          <a:fillRef idx="3">
+            <a:schemeClr val="accent1"/>
+          </a:fillRef>
+          <a:effectRef idx="2">
+            <a:schemeClr val="accent1"/>
+          </a:effectRef>
+          <a:fontRef idx="minor">
+            <a:schemeClr val="lt1"/>
+          </a:fontRef>
+        </p:style>
+        <p:txBody>
+          <a:bodyPr rtlCol="0" anchor="ctr" wrap="square"/>
+          <a:lstStyle/>
+          <a:p>
+            <a:pPr algn="ctr"/>
+          </a:p>
+        </p:txBody>
+      </p:sp>
+      <p:sp>
+        <p:nvSpPr>
+          <p:cNvPr id="181" name="Rounded Rectangle 180"/>
+          <p:cNvSpPr/>
+          <p:nvPr/>
+        </p:nvSpPr>
+        <p:spPr>
+          <a:xfrm>
+            <a:off x="6385880" y="5484114"/>
+            <a:ext cx="155448" cy="155448"/>
+          </a:xfrm>
+          <a:prstGeom prst="roundRect">
+            <a:avLst>
+              <a:gd name="adj" fmla="val 29411"/>
+            </a:avLst>
+          </a:prstGeom>
+          <a:solidFill>
+            <a:srgbClr val="0066CC"/>
+          </a:solidFill>
+          <a:ln>
+            <a:noFill/>
+          </a:ln>
+          <a:effectLst/>
+        </p:spPr>
+        <p:style>
+          <a:lnRef idx="1">
+            <a:schemeClr val="accent1"/>
+          </a:lnRef>
+          <a:fillRef idx="3">
+            <a:schemeClr val="accent1"/>
+          </a:fillRef>
+          <a:effectRef idx="2">
+            <a:schemeClr val="accent1"/>
+          </a:effectRef>
+          <a:fontRef idx="minor">
+            <a:schemeClr val="lt1"/>
+          </a:fontRef>
+        </p:style>
+        <p:txBody>
+          <a:bodyPr rtlCol="0" anchor="ctr" wrap="square"/>
+          <a:lstStyle/>
+          <a:p>
+            <a:pPr algn="ctr"/>
+          </a:p>
+        </p:txBody>
+      </p:sp>
+      <p:sp>
+        <p:nvSpPr>
+          <p:cNvPr id="182" name="Rounded Rectangle 181"/>
+          <p:cNvSpPr/>
+          <p:nvPr/>
+        </p:nvSpPr>
+        <p:spPr>
+          <a:xfrm>
+            <a:off x="7802238" y="5484114"/>
+            <a:ext cx="155448" cy="155448"/>
+          </a:xfrm>
+          <a:prstGeom prst="roundRect">
+            <a:avLst>
+              <a:gd name="adj" fmla="val 29411"/>
+            </a:avLst>
+          </a:prstGeom>
+          <a:solidFill>
+            <a:srgbClr val="CBBCF6"/>
+          </a:solidFill>
+          <a:ln>
+            <a:noFill/>
+          </a:ln>
+          <a:effectLst/>
+        </p:spPr>
+        <p:style>
+          <a:lnRef idx="1">
+            <a:schemeClr val="accent1"/>
+          </a:lnRef>
+          <a:fillRef idx="3">
+            <a:schemeClr val="accent1"/>
+          </a:fillRef>
+          <a:effectRef idx="2">
+            <a:schemeClr val="accent1"/>
+          </a:effectRef>
+          <a:fontRef idx="minor">
+            <a:schemeClr val="lt1"/>
+          </a:fontRef>
+        </p:style>
+        <p:txBody>
+          <a:bodyPr rtlCol="0" anchor="ctr" wrap="square"/>
+          <a:lstStyle/>
+          <a:p>
+            <a:pPr algn="ctr"/>
+          </a:p>
+        </p:txBody>
+      </p:sp>
+      <p:sp>
+        <p:nvSpPr>
+          <p:cNvPr id="183" name="Rounded Rectangle 182"/>
+          <p:cNvSpPr/>
+          <p:nvPr/>
+        </p:nvSpPr>
+        <p:spPr>
+          <a:xfrm>
+            <a:off x="8274357" y="5484114"/>
+            <a:ext cx="155448" cy="155448"/>
+          </a:xfrm>
+          <a:prstGeom prst="roundRect">
+            <a:avLst>
+              <a:gd name="adj" fmla="val 29411"/>
+            </a:avLst>
+          </a:prstGeom>
+          <a:solidFill>
+            <a:srgbClr val="CBBCF6"/>
+          </a:solidFill>
+          <a:ln>
+            <a:noFill/>
+          </a:ln>
+          <a:effectLst/>
+        </p:spPr>
+        <p:style>
+          <a:lnRef idx="1">
+            <a:schemeClr val="accent1"/>
+          </a:lnRef>
+          <a:fillRef idx="3">
+            <a:schemeClr val="accent1"/>
+          </a:fillRef>
+          <a:effectRef idx="2">
+            <a:schemeClr val="accent1"/>
+          </a:effectRef>
+          <a:fontRef idx="minor">
+            <a:schemeClr val="lt1"/>
+          </a:fontRef>
+        </p:style>
+        <p:txBody>
+          <a:bodyPr rtlCol="0" anchor="ctr" wrap="square"/>
+          <a:lstStyle/>
+          <a:p>
+            <a:pPr algn="ctr"/>
+          </a:p>
+        </p:txBody>
+      </p:sp>
+      <p:sp>
+        <p:nvSpPr>
+          <p:cNvPr id="184" name="Rounded Rectangle 183"/>
+          <p:cNvSpPr/>
+          <p:nvPr/>
+        </p:nvSpPr>
+        <p:spPr>
+          <a:xfrm>
+            <a:off x="8746476" y="5484114"/>
+            <a:ext cx="155448" cy="155448"/>
+          </a:xfrm>
+          <a:prstGeom prst="roundRect">
+            <a:avLst>
+              <a:gd name="adj" fmla="val 29411"/>
+            </a:avLst>
+          </a:prstGeom>
+          <a:solidFill>
+            <a:srgbClr val="CBBCF6"/>
+          </a:solidFill>
+          <a:ln>
+            <a:noFill/>
+          </a:ln>
+          <a:effectLst/>
+        </p:spPr>
+        <p:style>
+          <a:lnRef idx="1">
+            <a:schemeClr val="accent1"/>
+          </a:lnRef>
+          <a:fillRef idx="3">
+            <a:schemeClr val="accent1"/>
+          </a:fillRef>
+          <a:effectRef idx="2">
+            <a:schemeClr val="accent1"/>
+          </a:effectRef>
+          <a:fontRef idx="minor">
+            <a:schemeClr val="lt1"/>
+          </a:fontRef>
+        </p:style>
+        <p:txBody>
+          <a:bodyPr rtlCol="0" anchor="ctr" wrap="square"/>
+          <a:lstStyle/>
+          <a:p>
+            <a:pPr algn="ctr"/>
+          </a:p>
+        </p:txBody>
+      </p:sp>
+      <p:sp>
+        <p:nvSpPr>
+          <p:cNvPr id="185" name="Rounded Rectangle 184"/>
+          <p:cNvSpPr/>
+          <p:nvPr/>
+        </p:nvSpPr>
+        <p:spPr>
+          <a:xfrm>
+            <a:off x="9218595" y="5484114"/>
+            <a:ext cx="155448" cy="155448"/>
+          </a:xfrm>
+          <a:prstGeom prst="roundRect">
+            <a:avLst>
+              <a:gd name="adj" fmla="val 29411"/>
+            </a:avLst>
+          </a:prstGeom>
+          <a:solidFill>
+            <a:srgbClr val="CBBCF6"/>
+          </a:solidFill>
+          <a:ln>
+            <a:noFill/>
+          </a:ln>
+          <a:effectLst/>
+        </p:spPr>
+        <p:style>
+          <a:lnRef idx="1">
+            <a:schemeClr val="accent1"/>
+          </a:lnRef>
+          <a:fillRef idx="3">
+            <a:schemeClr val="accent1"/>
+          </a:fillRef>
+          <a:effectRef idx="2">
+            <a:schemeClr val="accent1"/>
+          </a:effectRef>
+          <a:fontRef idx="minor">
+            <a:schemeClr val="lt1"/>
+          </a:fontRef>
+        </p:style>
+        <p:txBody>
+          <a:bodyPr rtlCol="0" anchor="ctr" wrap="square"/>
+          <a:lstStyle/>
+          <a:p>
+            <a:pPr algn="ctr"/>
+          </a:p>
+        </p:txBody>
+      </p:sp>
+      <p:sp>
+        <p:nvSpPr>
+          <p:cNvPr id="186" name="Rounded Rectangle 185"/>
+          <p:cNvSpPr/>
+          <p:nvPr/>
+        </p:nvSpPr>
+        <p:spPr>
+          <a:xfrm>
+            <a:off x="9690714" y="5484114"/>
+            <a:ext cx="155448" cy="155448"/>
+          </a:xfrm>
+          <a:prstGeom prst="roundRect">
+            <a:avLst>
+              <a:gd name="adj" fmla="val 29411"/>
+            </a:avLst>
+          </a:prstGeom>
+          <a:solidFill>
+            <a:srgbClr val="CBBCF6"/>
+          </a:solidFill>
+          <a:ln>
+            <a:noFill/>
+          </a:ln>
+          <a:effectLst/>
+        </p:spPr>
+        <p:style>
+          <a:lnRef idx="1">
+            <a:schemeClr val="accent1"/>
+          </a:lnRef>
+          <a:fillRef idx="3">
+            <a:schemeClr val="accent1"/>
+          </a:fillRef>
+          <a:effectRef idx="2">
+            <a:schemeClr val="accent1"/>
+          </a:effectRef>
+          <a:fontRef idx="minor">
+            <a:schemeClr val="lt1"/>
+          </a:fontRef>
+        </p:style>
+        <p:txBody>
+          <a:bodyPr rtlCol="0" anchor="ctr" wrap="square"/>
+          <a:lstStyle/>
+          <a:p>
+            <a:pPr algn="ctr"/>
+          </a:p>
+        </p:txBody>
+      </p:sp>
+      <p:sp>
+        <p:nvSpPr>
+          <p:cNvPr id="187" name="Rounded Rectangle 186"/>
+          <p:cNvSpPr/>
+          <p:nvPr/>
+        </p:nvSpPr>
+        <p:spPr>
+          <a:xfrm>
+            <a:off x="10634953" y="5484114"/>
+            <a:ext cx="155448" cy="155448"/>
+          </a:xfrm>
+          <a:prstGeom prst="roundRect">
+            <a:avLst>
+              <a:gd name="adj" fmla="val 29411"/>
+            </a:avLst>
+          </a:prstGeom>
+          <a:solidFill>
+            <a:srgbClr val="CBBCF6"/>
+          </a:solidFill>
+          <a:ln>
+            <a:noFill/>
+          </a:ln>
+          <a:effectLst/>
+        </p:spPr>
+        <p:style>
+          <a:lnRef idx="1">
+            <a:schemeClr val="accent1"/>
+          </a:lnRef>
+          <a:fillRef idx="3">
+            <a:schemeClr val="accent1"/>
+          </a:fillRef>
+          <a:effectRef idx="2">
+            <a:schemeClr val="accent1"/>
+          </a:effectRef>
+          <a:fontRef idx="minor">
+            <a:schemeClr val="lt1"/>
+          </a:fontRef>
+        </p:style>
+        <p:txBody>
+          <a:bodyPr rtlCol="0" anchor="ctr" wrap="square"/>
+          <a:lstStyle/>
+          <a:p>
+            <a:pPr algn="ctr"/>
+          </a:p>
+        </p:txBody>
+      </p:sp>
+      <p:sp>
+        <p:nvSpPr>
+          <p:cNvPr id="188" name="Rounded Rectangle 187"/>
+          <p:cNvSpPr/>
+          <p:nvPr/>
+        </p:nvSpPr>
+        <p:spPr>
+          <a:xfrm>
+            <a:off x="11107072" y="5484114"/>
+            <a:ext cx="155448" cy="155448"/>
+          </a:xfrm>
+          <a:prstGeom prst="roundRect">
+            <a:avLst>
+              <a:gd name="adj" fmla="val 29411"/>
+            </a:avLst>
+          </a:prstGeom>
+          <a:solidFill>
+            <a:srgbClr val="CBBCF6"/>
+          </a:solidFill>
+          <a:ln>
+            <a:noFill/>
+          </a:ln>
+          <a:effectLst/>
+        </p:spPr>
+        <p:style>
+          <a:lnRef idx="1">
+            <a:schemeClr val="accent1"/>
+          </a:lnRef>
+          <a:fillRef idx="3">
+            <a:schemeClr val="accent1"/>
+          </a:fillRef>
+          <a:effectRef idx="2">
+            <a:schemeClr val="accent1"/>
+          </a:effectRef>
+          <a:fontRef idx="minor">
+            <a:schemeClr val="lt1"/>
+          </a:fontRef>
+        </p:style>
+        <p:txBody>
+          <a:bodyPr rtlCol="0" anchor="ctr" wrap="square"/>
+          <a:lstStyle/>
+          <a:p>
+            <a:pPr algn="ctr"/>
+          </a:p>
+        </p:txBody>
+      </p:sp>
+      <p:sp>
+        <p:nvSpPr>
+          <p:cNvPr id="189" name="Rounded Rectangle 188"/>
+          <p:cNvSpPr/>
+          <p:nvPr/>
+        </p:nvSpPr>
+        <p:spPr>
+          <a:xfrm>
+            <a:off x="566928" y="5961888"/>
+            <a:ext cx="137160" cy="137160"/>
+          </a:xfrm>
+          <a:prstGeom prst="roundRect">
+            <a:avLst>
+              <a:gd name="adj" fmla="val 30000"/>
+            </a:avLst>
+          </a:prstGeom>
+          <a:solidFill>
+            <a:srgbClr val="0066CC"/>
+          </a:solidFill>
+          <a:ln>
+            <a:noFill/>
+          </a:ln>
+          <a:effectLst/>
+        </p:spPr>
+        <p:style>
+          <a:lnRef idx="1">
+            <a:schemeClr val="accent1"/>
+          </a:lnRef>
+          <a:fillRef idx="3">
+            <a:schemeClr val="accent1"/>
+          </a:fillRef>
+          <a:effectRef idx="2">
+            <a:schemeClr val="accent1"/>
+          </a:effectRef>
+          <a:fontRef idx="minor">
+            <a:schemeClr val="lt1"/>
+          </a:fontRef>
+        </p:style>
+        <p:txBody>
+          <a:bodyPr rtlCol="0" anchor="ctr" wrap="square"/>
+          <a:lstStyle/>
+          <a:p>
+            <a:pPr algn="ctr"/>
+          </a:p>
+        </p:txBody>
+      </p:sp>
+      <p:sp>
+        <p:nvSpPr>
+          <p:cNvPr id="190" name="TextBox 189"/>
+          <p:cNvSpPr txBox="1"/>
+          <p:nvPr/>
+        </p:nvSpPr>
+        <p:spPr>
+          <a:xfrm>
+            <a:off x="768096" y="5957316"/>
+            <a:ext cx="3108960" cy="365760"/>
+          </a:xfrm>
+          <a:prstGeom prst="rect">
+            <a:avLst/>
+          </a:prstGeom>
+          <a:noFill/>
+        </p:spPr>
+        <p:txBody>
+          <a:bodyPr wrap="square" anchor="t" lIns="0" tIns="0" rIns="0" bIns="0">
+            <a:spAutoFit/>
+          </a:bodyPr>
+          <a:lstStyle/>
+          <a:p>
+            <a:pPr algn="l">
+              <a:lnSpc>
+                <a:spcPct val="100000"/>
+              </a:lnSpc>
+            </a:pPr>
+            <a:r>
+              <a:rPr sz="800" b="0">
+                <a:solidFill>
+                  <a:srgbClr val="545A72"/>
+                </a:solidFill>
+                <a:latin typeface="Segoe UI"/>
+              </a:rPr>
+              <a:t>Automated in OTC Tracker today (34)</a:t>
+            </a:r>
+          </a:p>
+        </p:txBody>
+      </p:sp>
+      <p:sp>
+        <p:nvSpPr>
+          <p:cNvPr id="191" name="Rounded Rectangle 190"/>
+          <p:cNvSpPr/>
+          <p:nvPr/>
+        </p:nvSpPr>
+        <p:spPr>
+          <a:xfrm>
+            <a:off x="3026664" y="5961888"/>
+            <a:ext cx="137160" cy="137160"/>
+          </a:xfrm>
+          <a:prstGeom prst="roundRect">
+            <a:avLst>
+              <a:gd name="adj" fmla="val 30000"/>
+            </a:avLst>
+          </a:prstGeom>
+          <a:solidFill>
+            <a:srgbClr val="B9C0D0"/>
+          </a:solidFill>
+          <a:ln>
+            <a:noFill/>
+          </a:ln>
+          <a:effectLst/>
+        </p:spPr>
+        <p:style>
+          <a:lnRef idx="1">
+            <a:schemeClr val="accent1"/>
+          </a:lnRef>
+          <a:fillRef idx="3">
+            <a:schemeClr val="accent1"/>
+          </a:fillRef>
+          <a:effectRef idx="2">
+            <a:schemeClr val="accent1"/>
+          </a:effectRef>
+          <a:fontRef idx="minor">
+            <a:schemeClr val="lt1"/>
+          </a:fontRef>
+        </p:style>
+        <p:txBody>
+          <a:bodyPr rtlCol="0" anchor="ctr" wrap="square"/>
+          <a:lstStyle/>
+          <a:p>
+            <a:pPr algn="ctr"/>
+          </a:p>
+        </p:txBody>
+      </p:sp>
+      <p:sp>
+        <p:nvSpPr>
+          <p:cNvPr id="192" name="TextBox 191"/>
+          <p:cNvSpPr txBox="1"/>
+          <p:nvPr/>
+        </p:nvSpPr>
+        <p:spPr>
+          <a:xfrm>
+            <a:off x="3227832" y="5957316"/>
+            <a:ext cx="3108960" cy="365760"/>
+          </a:xfrm>
+          <a:prstGeom prst="rect">
+            <a:avLst/>
+          </a:prstGeom>
+          <a:noFill/>
+        </p:spPr>
+        <p:txBody>
+          <a:bodyPr wrap="square" anchor="t" lIns="0" tIns="0" rIns="0" bIns="0">
+            <a:spAutoFit/>
+          </a:bodyPr>
+          <a:lstStyle/>
+          <a:p>
+            <a:pPr algn="l">
+              <a:lnSpc>
+                <a:spcPct val="100000"/>
+              </a:lnSpc>
+            </a:pPr>
+            <a:r>
+              <a:rPr sz="800" b="0">
+                <a:solidFill>
+                  <a:srgbClr val="545A72"/>
+                </a:solidFill>
+                <a:latin typeface="Segoe UI"/>
+              </a:rPr>
+              <a:t>Legacy tools — Cockpit / Inoa / AEVO (19)</a:t>
+            </a:r>
+          </a:p>
+        </p:txBody>
+      </p:sp>
+      <p:sp>
+        <p:nvSpPr>
+          <p:cNvPr id="193" name="Rounded Rectangle 192"/>
+          <p:cNvSpPr/>
+          <p:nvPr/>
+        </p:nvSpPr>
+        <p:spPr>
+          <a:xfrm>
+            <a:off x="5848502" y="5961888"/>
+            <a:ext cx="137160" cy="137160"/>
+          </a:xfrm>
+          <a:prstGeom prst="roundRect">
+            <a:avLst>
+              <a:gd name="adj" fmla="val 30000"/>
+            </a:avLst>
+          </a:prstGeom>
+          <a:solidFill>
+            <a:srgbClr val="CBBCF6"/>
+          </a:solidFill>
+          <a:ln>
+            <a:noFill/>
+          </a:ln>
+          <a:effectLst/>
+        </p:spPr>
+        <p:style>
+          <a:lnRef idx="1">
+            <a:schemeClr val="accent1"/>
+          </a:lnRef>
+          <a:fillRef idx="3">
+            <a:schemeClr val="accent1"/>
+          </a:fillRef>
+          <a:effectRef idx="2">
+            <a:schemeClr val="accent1"/>
+          </a:effectRef>
+          <a:fontRef idx="minor">
+            <a:schemeClr val="lt1"/>
+          </a:fontRef>
+        </p:style>
+        <p:txBody>
+          <a:bodyPr rtlCol="0" anchor="ctr" wrap="square"/>
+          <a:lstStyle/>
+          <a:p>
+            <a:pPr algn="ctr"/>
+          </a:p>
+        </p:txBody>
+      </p:sp>
+      <p:sp>
+        <p:nvSpPr>
+          <p:cNvPr id="194" name="TextBox 193"/>
+          <p:cNvSpPr txBox="1"/>
+          <p:nvPr/>
+        </p:nvSpPr>
+        <p:spPr>
+          <a:xfrm>
+            <a:off x="6049670" y="5957316"/>
+            <a:ext cx="3108960" cy="365760"/>
+          </a:xfrm>
+          <a:prstGeom prst="rect">
+            <a:avLst/>
+          </a:prstGeom>
+          <a:noFill/>
+        </p:spPr>
+        <p:txBody>
+          <a:bodyPr wrap="square" anchor="t" lIns="0" tIns="0" rIns="0" bIns="0">
+            <a:spAutoFit/>
+          </a:bodyPr>
+          <a:lstStyle/>
+          <a:p>
+            <a:pPr algn="l">
+              <a:lnSpc>
+                <a:spcPct val="100000"/>
+              </a:lnSpc>
+            </a:pPr>
+            <a:r>
+              <a:rPr sz="800" b="0">
+                <a:solidFill>
+                  <a:srgbClr val="545A72"/>
+                </a:solidFill>
+                <a:latin typeface="Segoe UI"/>
+              </a:rPr>
+              <a:t>OTC Tracker target (65)</a:t>
+            </a:r>
+          </a:p>
+        </p:txBody>
+      </p:sp>
+      <p:sp>
+        <p:nvSpPr>
+          <p:cNvPr id="195" name="Rounded Rectangle 194"/>
+          <p:cNvSpPr/>
+          <p:nvPr/>
+        </p:nvSpPr>
+        <p:spPr>
+          <a:xfrm>
+            <a:off x="7584033" y="5961888"/>
+            <a:ext cx="137160" cy="137160"/>
+          </a:xfrm>
+          <a:prstGeom prst="roundRect">
+            <a:avLst>
+              <a:gd name="adj" fmla="val 30000"/>
+            </a:avLst>
+          </a:prstGeom>
+          <a:solidFill>
+            <a:srgbClr val="EFCDD6"/>
+          </a:solidFill>
+          <a:ln>
+            <a:noFill/>
+          </a:ln>
+          <a:effectLst/>
+        </p:spPr>
+        <p:style>
+          <a:lnRef idx="1">
+            <a:schemeClr val="accent1"/>
+          </a:lnRef>
+          <a:fillRef idx="3">
+            <a:schemeClr val="accent1"/>
+          </a:fillRef>
+          <a:effectRef idx="2">
+            <a:schemeClr val="accent1"/>
+          </a:effectRef>
+          <a:fontRef idx="minor">
+            <a:schemeClr val="lt1"/>
+          </a:fontRef>
+        </p:style>
+        <p:txBody>
+          <a:bodyPr rtlCol="0" anchor="ctr" wrap="square"/>
+          <a:lstStyle/>
+          <a:p>
+            <a:pPr algn="ctr"/>
+          </a:p>
+        </p:txBody>
+      </p:sp>
+      <p:sp>
+        <p:nvSpPr>
+          <p:cNvPr id="196" name="TextBox 195"/>
+          <p:cNvSpPr txBox="1"/>
+          <p:nvPr/>
+        </p:nvSpPr>
+        <p:spPr>
+          <a:xfrm>
+            <a:off x="7785201" y="5957316"/>
+            <a:ext cx="3108960" cy="365760"/>
+          </a:xfrm>
+          <a:prstGeom prst="rect">
+            <a:avLst/>
+          </a:prstGeom>
+          <a:noFill/>
+        </p:spPr>
+        <p:txBody>
+          <a:bodyPr wrap="square" anchor="t" lIns="0" tIns="0" rIns="0" bIns="0">
+            <a:spAutoFit/>
+          </a:bodyPr>
+          <a:lstStyle/>
+          <a:p>
+            <a:pPr algn="l">
+              <a:lnSpc>
+                <a:spcPct val="100000"/>
+              </a:lnSpc>
+            </a:pPr>
+            <a:r>
+              <a:rPr sz="800" b="0">
+                <a:solidFill>
+                  <a:srgbClr val="545A72"/>
+                </a:solidFill>
+                <a:latin typeface="Segoe UI"/>
+              </a:rPr>
+              <a:t>Manual, outside the target (6)</a:t>
+            </a:r>
+          </a:p>
+        </p:txBody>
+      </p:sp>
+      <p:sp>
+        <p:nvSpPr>
+          <p:cNvPr id="197" name="Rounded Rectangle 196"/>
+          <p:cNvSpPr/>
+          <p:nvPr/>
+        </p:nvSpPr>
+        <p:spPr>
+          <a:xfrm>
+            <a:off x="9742017" y="5961888"/>
+            <a:ext cx="137160" cy="137160"/>
+          </a:xfrm>
+          <a:prstGeom prst="roundRect">
+            <a:avLst>
+              <a:gd name="adj" fmla="val 30000"/>
+            </a:avLst>
+          </a:prstGeom>
+          <a:solidFill>
+            <a:srgbClr val="CBBCF6"/>
+          </a:solidFill>
+          <a:ln>
+            <a:noFill/>
+          </a:ln>
+          <a:effectLst/>
+        </p:spPr>
+        <p:style>
+          <a:lnRef idx="1">
+            <a:schemeClr val="accent1"/>
+          </a:lnRef>
+          <a:fillRef idx="3">
+            <a:schemeClr val="accent1"/>
+          </a:fillRef>
+          <a:effectRef idx="2">
+            <a:schemeClr val="accent1"/>
+          </a:effectRef>
+          <a:fontRef idx="minor">
+            <a:schemeClr val="lt1"/>
+          </a:fontRef>
+        </p:style>
+        <p:txBody>
+          <a:bodyPr rtlCol="0" anchor="ctr" wrap="square"/>
+          <a:lstStyle/>
+          <a:p>
+            <a:pPr algn="ctr"/>
+          </a:p>
+        </p:txBody>
+      </p:sp>
+      <p:sp>
+        <p:nvSpPr>
+          <p:cNvPr id="198" name="Rounded Rectangle 197"/>
+          <p:cNvSpPr/>
+          <p:nvPr/>
+        </p:nvSpPr>
+        <p:spPr>
+          <a:xfrm>
+            <a:off x="9742017" y="5961888"/>
+            <a:ext cx="68580" cy="137160"/>
+          </a:xfrm>
+          <a:prstGeom prst="roundRect">
+            <a:avLst>
+              <a:gd name="adj" fmla="val 60000"/>
+            </a:avLst>
+          </a:prstGeom>
+          <a:solidFill>
+            <a:srgbClr val="8B5CF6"/>
+          </a:solidFill>
+          <a:ln>
+            <a:noFill/>
+          </a:ln>
+          <a:effectLst/>
+        </p:spPr>
+        <p:style>
+          <a:lnRef idx="1">
+            <a:schemeClr val="accent1"/>
+          </a:lnRef>
+          <a:fillRef idx="3">
+            <a:schemeClr val="accent1"/>
+          </a:fillRef>
+          <a:effectRef idx="2">
+            <a:schemeClr val="accent1"/>
+          </a:effectRef>
+          <a:fontRef idx="minor">
+            <a:schemeClr val="lt1"/>
+          </a:fontRef>
+        </p:style>
+        <p:txBody>
+          <a:bodyPr rtlCol="0" anchor="ctr" wrap="square"/>
+          <a:lstStyle/>
+          <a:p>
+            <a:pPr algn="ctr"/>
+          </a:p>
+        </p:txBody>
+      </p:sp>
+      <p:sp>
+        <p:nvSpPr>
+          <p:cNvPr id="199" name="TextBox 198"/>
+          <p:cNvSpPr txBox="1"/>
+          <p:nvPr/>
+        </p:nvSpPr>
+        <p:spPr>
+          <a:xfrm>
+            <a:off x="9943185" y="5957316"/>
+            <a:ext cx="3108960" cy="365760"/>
+          </a:xfrm>
+          <a:prstGeom prst="rect">
+            <a:avLst/>
+          </a:prstGeom>
+          <a:noFill/>
+        </p:spPr>
+        <p:txBody>
+          <a:bodyPr wrap="square" anchor="t" lIns="0" tIns="0" rIns="0" bIns="0">
+            <a:spAutoFit/>
+          </a:bodyPr>
+          <a:lstStyle/>
+          <a:p>
+            <a:pPr algn="l">
+              <a:lnSpc>
+                <a:spcPct val="100000"/>
+              </a:lnSpc>
+            </a:pPr>
+            <a:r>
+              <a:rPr sz="800" b="0">
+                <a:solidFill>
+                  <a:srgbClr val="545A72"/>
+                </a:solidFill>
+                <a:latin typeface="Segoe UI"/>
+              </a:rPr>
+              <a:t>half = partial in target</a:t>
+            </a:r>
+          </a:p>
+        </p:txBody>
+      </p:sp>
+      <p:sp>
+        <p:nvSpPr>
+          <p:cNvPr id="200" name="TextBox 199"/>
           <p:cNvSpPr txBox="1"/>
           <p:nvPr/>
         </p:nvSpPr>
